--- a/VulnApp_Lite_Jules_Bot_Presentation.pptx
+++ b/VulnApp_Lite_Jules_Bot_Presentation.pptx
@@ -3250,7 +3250,50 @@
       </p:sp>
       <p:sp>
         <p:nvSpPr>
-          <p:cNvPr id="6" name="TextBox 5"/>
+          <p:cNvPr id="6" name="Rectangle 5"/>
+          <p:cNvSpPr/>
+          <p:nvPr/>
+        </p:nvSpPr>
+        <p:spPr>
+          <a:xfrm>
+            <a:off x="502920" y="3337560"/>
+            <a:ext cx="1097280" cy="45720"/>
+          </a:xfrm>
+          <a:prstGeom prst="rect">
+            <a:avLst/>
+          </a:prstGeom>
+          <a:solidFill>
+            <a:srgbClr val="00E5FF"/>
+          </a:solidFill>
+          <a:ln>
+            <a:noFill/>
+          </a:ln>
+        </p:spPr>
+        <p:style>
+          <a:lnRef idx="1">
+            <a:schemeClr val="accent1"/>
+          </a:lnRef>
+          <a:fillRef idx="3">
+            <a:schemeClr val="accent1"/>
+          </a:fillRef>
+          <a:effectRef idx="2">
+            <a:schemeClr val="accent1"/>
+          </a:effectRef>
+          <a:fontRef idx="minor">
+            <a:schemeClr val="lt1"/>
+          </a:fontRef>
+        </p:style>
+        <p:txBody>
+          <a:bodyPr rtlCol="0" anchor="ctr"/>
+          <a:lstStyle/>
+          <a:p>
+            <a:pPr algn="ctr"/>
+          </a:p>
+        </p:txBody>
+      </p:sp>
+      <p:sp>
+        <p:nvSpPr>
+          <p:cNvPr id="7" name="TextBox 6"/>
           <p:cNvSpPr txBox="1"/>
           <p:nvPr/>
         </p:nvSpPr>
@@ -3281,49 +3324,6 @@
               <a:t>Zarządzanie podatnościami
 i automatyzacja przez Telegram</a:t>
             </a:r>
-          </a:p>
-        </p:txBody>
-      </p:sp>
-      <p:sp>
-        <p:nvSpPr>
-          <p:cNvPr id="7" name="Rectangle 6"/>
-          <p:cNvSpPr/>
-          <p:nvPr/>
-        </p:nvSpPr>
-        <p:spPr>
-          <a:xfrm>
-            <a:off x="502920" y="3337560"/>
-            <a:ext cx="1097280" cy="45720"/>
-          </a:xfrm>
-          <a:prstGeom prst="rect">
-            <a:avLst/>
-          </a:prstGeom>
-          <a:solidFill>
-            <a:srgbClr val="00E5FF"/>
-          </a:solidFill>
-          <a:ln>
-            <a:noFill/>
-          </a:ln>
-        </p:spPr>
-        <p:style>
-          <a:lnRef idx="1">
-            <a:schemeClr val="accent1"/>
-          </a:lnRef>
-          <a:fillRef idx="3">
-            <a:schemeClr val="accent1"/>
-          </a:fillRef>
-          <a:effectRef idx="2">
-            <a:schemeClr val="accent1"/>
-          </a:effectRef>
-          <a:fontRef idx="minor">
-            <a:schemeClr val="lt1"/>
-          </a:fontRef>
-        </p:style>
-        <p:txBody>
-          <a:bodyPr rtlCol="0" anchor="ctr"/>
-          <a:lstStyle/>
-          <a:p>
-            <a:pPr algn="ctr"/>
           </a:p>
         </p:txBody>
       </p:sp>
@@ -3975,7 +3975,7 @@
         <p:spPr>
           <a:xfrm>
             <a:off x="457200" y="1234440"/>
-            <a:ext cx="11274552" cy="54864"/>
+            <a:ext cx="11274552" cy="45720"/>
           </a:xfrm>
           <a:prstGeom prst="rect">
             <a:avLst/>
@@ -4088,7 +4088,7 @@
         <p:spPr>
           <a:xfrm>
             <a:off x="457200" y="1417320"/>
-            <a:ext cx="11247120" cy="320040"/>
+            <a:ext cx="11247120" cy="274320"/>
           </a:xfrm>
           <a:prstGeom prst="rect">
             <a:avLst/>
@@ -4103,7 +4103,7 @@
           <a:p>
             <a:pPr algn="ctr"/>
             <a:r>
-              <a:rPr sz="1100" b="1" i="0">
+              <a:rPr sz="1000" b="1" i="0">
                 <a:solidFill>
                   <a:srgbClr val="00E5FF"/>
                 </a:solidFill>
@@ -4122,8 +4122,8 @@
         </p:nvSpPr>
         <p:spPr>
           <a:xfrm>
-            <a:off x="914400" y="1783080"/>
-            <a:ext cx="1920240" cy="777240"/>
+            <a:off x="457200" y="1737360"/>
+            <a:ext cx="2468880" cy="777240"/>
           </a:xfrm>
           <a:prstGeom prst="roundRect">
             <a:avLst>
@@ -4165,8 +4165,8 @@
                 </a:solidFill>
                 <a:latin typeface="Calibri"/>
               </a:rPr>
-              <a:t>🌐 Przeglądarka
-Web (LAN)</a:t>
+              <a:t>🌐  Przeglądarka Web
+(LAN / port 80)</a:t>
             </a:r>
           </a:p>
         </p:txBody>
@@ -4179,8 +4179,8 @@
         </p:nvSpPr>
         <p:spPr>
           <a:xfrm>
-            <a:off x="3657600" y="1783080"/>
-            <a:ext cx="1920240" cy="777240"/>
+            <a:off x="3200400" y="1737360"/>
+            <a:ext cx="2468880" cy="777240"/>
           </a:xfrm>
           <a:prstGeom prst="roundRect">
             <a:avLst>
@@ -4222,8 +4222,8 @@
                 </a:solidFill>
                 <a:latin typeface="Calibri"/>
               </a:rPr>
-              <a:t>📱 VulnApp
-iOS Mobile</a:t>
+              <a:t>📱  VulnApp Mobile
+(iOS / ZeroTier)</a:t>
             </a:r>
           </a:p>
         </p:txBody>
@@ -4236,8 +4236,8 @@
         </p:nvSpPr>
         <p:spPr>
           <a:xfrm>
-            <a:off x="6400800" y="1783080"/>
-            <a:ext cx="1920240" cy="777240"/>
+            <a:off x="5943600" y="1737360"/>
+            <a:ext cx="2468880" cy="777240"/>
           </a:xfrm>
           <a:prstGeom prst="roundRect">
             <a:avLst>
@@ -4279,8 +4279,8 @@
                 </a:solidFill>
                 <a:latin typeface="Calibri"/>
               </a:rPr>
-              <a:t>🤖 Telegram
-Jules Bot</a:t>
+              <a:t>🤖  Jules Bot
+(Telegram API)</a:t>
             </a:r>
           </a:p>
         </p:txBody>
@@ -4293,8 +4293,8 @@
         </p:nvSpPr>
         <p:spPr>
           <a:xfrm>
-            <a:off x="9326880" y="1783080"/>
-            <a:ext cx="1920240" cy="777240"/>
+            <a:off x="8686800" y="1737360"/>
+            <a:ext cx="2468880" cy="777240"/>
           </a:xfrm>
           <a:prstGeom prst="roundRect">
             <a:avLst>
@@ -4336,26 +4336,1043 @@
                 </a:solidFill>
                 <a:latin typeface="Calibri"/>
               </a:rPr>
-              <a:t>👤 Użytkownik
-Admin</a:t>
-            </a:r>
-          </a:p>
-        </p:txBody>
-      </p:sp>
-      <p:cxnSp>
-        <p:nvCxnSpPr>
-          <p:cNvPr id="11" name="Connector 10"/>
-          <p:cNvCxnSpPr/>
-          <p:nvPr/>
-        </p:nvCxnSpPr>
-        <p:spPr>
-          <a:xfrm>
-            <a:off x="1874519" y="2560320"/>
-            <a:ext cx="0" cy="502920"/>
-          </a:xfrm>
-          <a:prstGeom prst="line">
-            <a:avLst/>
-          </a:prstGeom>
+              <a:t>👤  Admin
+(SSH / terminal)</a:t>
+            </a:r>
+          </a:p>
+        </p:txBody>
+      </p:sp>
+      <p:sp>
+        <p:nvSpPr>
+          <p:cNvPr id="11" name="Rectangle 10"/>
+          <p:cNvSpPr/>
+          <p:nvPr/>
+        </p:nvSpPr>
+        <p:spPr>
+          <a:xfrm>
+            <a:off x="1673352" y="2514600"/>
+            <a:ext cx="36576" cy="347472"/>
+          </a:xfrm>
+          <a:prstGeom prst="rect">
+            <a:avLst/>
+          </a:prstGeom>
+          <a:solidFill>
+            <a:srgbClr val="00E5FF"/>
+          </a:solidFill>
+          <a:ln>
+            <a:noFill/>
+          </a:ln>
+        </p:spPr>
+        <p:style>
+          <a:lnRef idx="1">
+            <a:schemeClr val="accent1"/>
+          </a:lnRef>
+          <a:fillRef idx="3">
+            <a:schemeClr val="accent1"/>
+          </a:fillRef>
+          <a:effectRef idx="2">
+            <a:schemeClr val="accent1"/>
+          </a:effectRef>
+          <a:fontRef idx="minor">
+            <a:schemeClr val="lt1"/>
+          </a:fontRef>
+        </p:style>
+        <p:txBody>
+          <a:bodyPr rtlCol="0" anchor="ctr"/>
+          <a:lstStyle/>
+          <a:p>
+            <a:pPr algn="ctr"/>
+          </a:p>
+        </p:txBody>
+      </p:sp>
+      <p:sp>
+        <p:nvSpPr>
+          <p:cNvPr id="12" name="Rounded Rectangle 11"/>
+          <p:cNvSpPr/>
+          <p:nvPr/>
+        </p:nvSpPr>
+        <p:spPr>
+          <a:xfrm>
+            <a:off x="1627632" y="2843784"/>
+            <a:ext cx="128016" cy="128016"/>
+          </a:xfrm>
+          <a:prstGeom prst="roundRect">
+            <a:avLst/>
+          </a:prstGeom>
+          <a:solidFill>
+            <a:srgbClr val="00E5FF"/>
+          </a:solidFill>
+          <a:ln>
+            <a:noFill/>
+          </a:ln>
+        </p:spPr>
+        <p:style>
+          <a:lnRef idx="1">
+            <a:schemeClr val="accent1"/>
+          </a:lnRef>
+          <a:fillRef idx="3">
+            <a:schemeClr val="accent1"/>
+          </a:fillRef>
+          <a:effectRef idx="2">
+            <a:schemeClr val="accent1"/>
+          </a:effectRef>
+          <a:fontRef idx="minor">
+            <a:schemeClr val="lt1"/>
+          </a:fontRef>
+        </p:style>
+        <p:txBody>
+          <a:bodyPr rtlCol="0" anchor="ctr"/>
+          <a:lstStyle/>
+          <a:p>
+            <a:pPr algn="ctr"/>
+          </a:p>
+        </p:txBody>
+      </p:sp>
+      <p:sp>
+        <p:nvSpPr>
+          <p:cNvPr id="13" name="Rectangle 12"/>
+          <p:cNvSpPr/>
+          <p:nvPr/>
+        </p:nvSpPr>
+        <p:spPr>
+          <a:xfrm>
+            <a:off x="4416552" y="2514600"/>
+            <a:ext cx="36576" cy="347472"/>
+          </a:xfrm>
+          <a:prstGeom prst="rect">
+            <a:avLst/>
+          </a:prstGeom>
+          <a:solidFill>
+            <a:srgbClr val="00E5FF"/>
+          </a:solidFill>
+          <a:ln>
+            <a:noFill/>
+          </a:ln>
+        </p:spPr>
+        <p:style>
+          <a:lnRef idx="1">
+            <a:schemeClr val="accent1"/>
+          </a:lnRef>
+          <a:fillRef idx="3">
+            <a:schemeClr val="accent1"/>
+          </a:fillRef>
+          <a:effectRef idx="2">
+            <a:schemeClr val="accent1"/>
+          </a:effectRef>
+          <a:fontRef idx="minor">
+            <a:schemeClr val="lt1"/>
+          </a:fontRef>
+        </p:style>
+        <p:txBody>
+          <a:bodyPr rtlCol="0" anchor="ctr"/>
+          <a:lstStyle/>
+          <a:p>
+            <a:pPr algn="ctr"/>
+          </a:p>
+        </p:txBody>
+      </p:sp>
+      <p:sp>
+        <p:nvSpPr>
+          <p:cNvPr id="14" name="Rounded Rectangle 13"/>
+          <p:cNvSpPr/>
+          <p:nvPr/>
+        </p:nvSpPr>
+        <p:spPr>
+          <a:xfrm>
+            <a:off x="4370832" y="2843784"/>
+            <a:ext cx="128016" cy="128016"/>
+          </a:xfrm>
+          <a:prstGeom prst="roundRect">
+            <a:avLst/>
+          </a:prstGeom>
+          <a:solidFill>
+            <a:srgbClr val="00E5FF"/>
+          </a:solidFill>
+          <a:ln>
+            <a:noFill/>
+          </a:ln>
+        </p:spPr>
+        <p:style>
+          <a:lnRef idx="1">
+            <a:schemeClr val="accent1"/>
+          </a:lnRef>
+          <a:fillRef idx="3">
+            <a:schemeClr val="accent1"/>
+          </a:fillRef>
+          <a:effectRef idx="2">
+            <a:schemeClr val="accent1"/>
+          </a:effectRef>
+          <a:fontRef idx="minor">
+            <a:schemeClr val="lt1"/>
+          </a:fontRef>
+        </p:style>
+        <p:txBody>
+          <a:bodyPr rtlCol="0" anchor="ctr"/>
+          <a:lstStyle/>
+          <a:p>
+            <a:pPr algn="ctr"/>
+          </a:p>
+        </p:txBody>
+      </p:sp>
+      <p:sp>
+        <p:nvSpPr>
+          <p:cNvPr id="15" name="Rectangle 14"/>
+          <p:cNvSpPr/>
+          <p:nvPr/>
+        </p:nvSpPr>
+        <p:spPr>
+          <a:xfrm>
+            <a:off x="7159752" y="2514600"/>
+            <a:ext cx="36576" cy="347472"/>
+          </a:xfrm>
+          <a:prstGeom prst="rect">
+            <a:avLst/>
+          </a:prstGeom>
+          <a:solidFill>
+            <a:srgbClr val="00E5FF"/>
+          </a:solidFill>
+          <a:ln>
+            <a:noFill/>
+          </a:ln>
+        </p:spPr>
+        <p:style>
+          <a:lnRef idx="1">
+            <a:schemeClr val="accent1"/>
+          </a:lnRef>
+          <a:fillRef idx="3">
+            <a:schemeClr val="accent1"/>
+          </a:fillRef>
+          <a:effectRef idx="2">
+            <a:schemeClr val="accent1"/>
+          </a:effectRef>
+          <a:fontRef idx="minor">
+            <a:schemeClr val="lt1"/>
+          </a:fontRef>
+        </p:style>
+        <p:txBody>
+          <a:bodyPr rtlCol="0" anchor="ctr"/>
+          <a:lstStyle/>
+          <a:p>
+            <a:pPr algn="ctr"/>
+          </a:p>
+        </p:txBody>
+      </p:sp>
+      <p:sp>
+        <p:nvSpPr>
+          <p:cNvPr id="16" name="Rounded Rectangle 15"/>
+          <p:cNvSpPr/>
+          <p:nvPr/>
+        </p:nvSpPr>
+        <p:spPr>
+          <a:xfrm>
+            <a:off x="7114032" y="2843784"/>
+            <a:ext cx="128016" cy="128016"/>
+          </a:xfrm>
+          <a:prstGeom prst="roundRect">
+            <a:avLst/>
+          </a:prstGeom>
+          <a:solidFill>
+            <a:srgbClr val="00E5FF"/>
+          </a:solidFill>
+          <a:ln>
+            <a:noFill/>
+          </a:ln>
+        </p:spPr>
+        <p:style>
+          <a:lnRef idx="1">
+            <a:schemeClr val="accent1"/>
+          </a:lnRef>
+          <a:fillRef idx="3">
+            <a:schemeClr val="accent1"/>
+          </a:fillRef>
+          <a:effectRef idx="2">
+            <a:schemeClr val="accent1"/>
+          </a:effectRef>
+          <a:fontRef idx="minor">
+            <a:schemeClr val="lt1"/>
+          </a:fontRef>
+        </p:style>
+        <p:txBody>
+          <a:bodyPr rtlCol="0" anchor="ctr"/>
+          <a:lstStyle/>
+          <a:p>
+            <a:pPr algn="ctr"/>
+          </a:p>
+        </p:txBody>
+      </p:sp>
+      <p:sp>
+        <p:nvSpPr>
+          <p:cNvPr id="17" name="Rectangle 16"/>
+          <p:cNvSpPr/>
+          <p:nvPr/>
+        </p:nvSpPr>
+        <p:spPr>
+          <a:xfrm>
+            <a:off x="9902952" y="2514600"/>
+            <a:ext cx="36576" cy="347472"/>
+          </a:xfrm>
+          <a:prstGeom prst="rect">
+            <a:avLst/>
+          </a:prstGeom>
+          <a:solidFill>
+            <a:srgbClr val="00E5FF"/>
+          </a:solidFill>
+          <a:ln>
+            <a:noFill/>
+          </a:ln>
+        </p:spPr>
+        <p:style>
+          <a:lnRef idx="1">
+            <a:schemeClr val="accent1"/>
+          </a:lnRef>
+          <a:fillRef idx="3">
+            <a:schemeClr val="accent1"/>
+          </a:fillRef>
+          <a:effectRef idx="2">
+            <a:schemeClr val="accent1"/>
+          </a:effectRef>
+          <a:fontRef idx="minor">
+            <a:schemeClr val="lt1"/>
+          </a:fontRef>
+        </p:style>
+        <p:txBody>
+          <a:bodyPr rtlCol="0" anchor="ctr"/>
+          <a:lstStyle/>
+          <a:p>
+            <a:pPr algn="ctr"/>
+          </a:p>
+        </p:txBody>
+      </p:sp>
+      <p:sp>
+        <p:nvSpPr>
+          <p:cNvPr id="18" name="Rounded Rectangle 17"/>
+          <p:cNvSpPr/>
+          <p:nvPr/>
+        </p:nvSpPr>
+        <p:spPr>
+          <a:xfrm>
+            <a:off x="9857232" y="2843784"/>
+            <a:ext cx="128016" cy="128016"/>
+          </a:xfrm>
+          <a:prstGeom prst="roundRect">
+            <a:avLst/>
+          </a:prstGeom>
+          <a:solidFill>
+            <a:srgbClr val="00E5FF"/>
+          </a:solidFill>
+          <a:ln>
+            <a:noFill/>
+          </a:ln>
+        </p:spPr>
+        <p:style>
+          <a:lnRef idx="1">
+            <a:schemeClr val="accent1"/>
+          </a:lnRef>
+          <a:fillRef idx="3">
+            <a:schemeClr val="accent1"/>
+          </a:fillRef>
+          <a:effectRef idx="2">
+            <a:schemeClr val="accent1"/>
+          </a:effectRef>
+          <a:fontRef idx="minor">
+            <a:schemeClr val="lt1"/>
+          </a:fontRef>
+        </p:style>
+        <p:txBody>
+          <a:bodyPr rtlCol="0" anchor="ctr"/>
+          <a:lstStyle/>
+          <a:p>
+            <a:pPr algn="ctr"/>
+          </a:p>
+        </p:txBody>
+      </p:sp>
+      <p:sp>
+        <p:nvSpPr>
+          <p:cNvPr id="19" name="TextBox 18"/>
+          <p:cNvSpPr txBox="1"/>
+          <p:nvPr/>
+        </p:nvSpPr>
+        <p:spPr>
+          <a:xfrm>
+            <a:off x="457200" y="2834640"/>
+            <a:ext cx="11247120" cy="274320"/>
+          </a:xfrm>
+          <a:prstGeom prst="rect">
+            <a:avLst/>
+          </a:prstGeom>
+          <a:noFill/>
+        </p:spPr>
+        <p:txBody>
+          <a:bodyPr wrap="square">
+            <a:spAutoFit/>
+          </a:bodyPr>
+          <a:lstStyle/>
+          <a:p>
+            <a:pPr algn="ctr"/>
+            <a:r>
+              <a:rPr sz="1000" b="1" i="0">
+                <a:solidFill>
+                  <a:srgbClr val="00E676"/>
+                </a:solidFill>
+                <a:latin typeface="Calibri"/>
+              </a:rPr>
+              <a:t>SIEĆ / PROXY</a:t>
+            </a:r>
+          </a:p>
+        </p:txBody>
+      </p:sp>
+      <p:sp>
+        <p:nvSpPr>
+          <p:cNvPr id="20" name="Rounded Rectangle 19"/>
+          <p:cNvSpPr/>
+          <p:nvPr/>
+        </p:nvSpPr>
+        <p:spPr>
+          <a:xfrm>
+            <a:off x="457200" y="3154680"/>
+            <a:ext cx="5303520" cy="685800"/>
+          </a:xfrm>
+          <a:prstGeom prst="roundRect">
+            <a:avLst>
+              <a:gd name="adj" fmla="val 5000"/>
+            </a:avLst>
+          </a:prstGeom>
+          <a:solidFill>
+            <a:srgbClr val="003322"/>
+          </a:solidFill>
+          <a:ln w="19050">
+            <a:solidFill>
+              <a:srgbClr val="00E676"/>
+            </a:solidFill>
+          </a:ln>
+        </p:spPr>
+        <p:style>
+          <a:lnRef idx="1">
+            <a:schemeClr val="accent1"/>
+          </a:lnRef>
+          <a:fillRef idx="3">
+            <a:schemeClr val="accent1"/>
+          </a:fillRef>
+          <a:effectRef idx="2">
+            <a:schemeClr val="accent1"/>
+          </a:effectRef>
+          <a:fontRef idx="minor">
+            <a:schemeClr val="lt1"/>
+          </a:fontRef>
+        </p:style>
+        <p:txBody>
+          <a:bodyPr rtlCol="0" anchor="ctr" wrap="square"/>
+          <a:lstStyle/>
+          <a:p>
+            <a:pPr algn="ctr"/>
+            <a:r>
+              <a:rPr sz="1300" b="1">
+                <a:solidFill>
+                  <a:srgbClr val="00E676"/>
+                </a:solidFill>
+                <a:latin typeface="Calibri"/>
+              </a:rPr>
+              <a:t>🔀  Nginx Reverse Proxy  (port 80)</a:t>
+            </a:r>
+          </a:p>
+        </p:txBody>
+      </p:sp>
+      <p:sp>
+        <p:nvSpPr>
+          <p:cNvPr id="21" name="Rounded Rectangle 20"/>
+          <p:cNvSpPr/>
+          <p:nvPr/>
+        </p:nvSpPr>
+        <p:spPr>
+          <a:xfrm>
+            <a:off x="6400800" y="3154680"/>
+            <a:ext cx="5303520" cy="685800"/>
+          </a:xfrm>
+          <a:prstGeom prst="roundRect">
+            <a:avLst>
+              <a:gd name="adj" fmla="val 5000"/>
+            </a:avLst>
+          </a:prstGeom>
+          <a:solidFill>
+            <a:srgbClr val="332200"/>
+          </a:solidFill>
+          <a:ln w="19050">
+            <a:solidFill>
+              <a:srgbClr val="FFBF00"/>
+            </a:solidFill>
+          </a:ln>
+        </p:spPr>
+        <p:style>
+          <a:lnRef idx="1">
+            <a:schemeClr val="accent1"/>
+          </a:lnRef>
+          <a:fillRef idx="3">
+            <a:schemeClr val="accent1"/>
+          </a:fillRef>
+          <a:effectRef idx="2">
+            <a:schemeClr val="accent1"/>
+          </a:effectRef>
+          <a:fontRef idx="minor">
+            <a:schemeClr val="lt1"/>
+          </a:fontRef>
+        </p:style>
+        <p:txBody>
+          <a:bodyPr rtlCol="0" anchor="ctr" wrap="square"/>
+          <a:lstStyle/>
+          <a:p>
+            <a:pPr algn="ctr"/>
+            <a:r>
+              <a:rPr sz="1300" b="1">
+                <a:solidFill>
+                  <a:srgbClr val="FFBF00"/>
+                </a:solidFill>
+                <a:latin typeface="Calibri"/>
+              </a:rPr>
+              <a:t>🌐  ZeroTier VPN  (zdalny dostęp)</a:t>
+            </a:r>
+          </a:p>
+        </p:txBody>
+      </p:sp>
+      <p:sp>
+        <p:nvSpPr>
+          <p:cNvPr id="22" name="Rectangle 21"/>
+          <p:cNvSpPr/>
+          <p:nvPr/>
+        </p:nvSpPr>
+        <p:spPr>
+          <a:xfrm>
+            <a:off x="5760720" y="3474720"/>
+            <a:ext cx="640080" cy="36576"/>
+          </a:xfrm>
+          <a:prstGeom prst="rect">
+            <a:avLst/>
+          </a:prstGeom>
+          <a:solidFill>
+            <a:srgbClr val="FFBF00"/>
+          </a:solidFill>
+          <a:ln>
+            <a:noFill/>
+          </a:ln>
+        </p:spPr>
+        <p:style>
+          <a:lnRef idx="1">
+            <a:schemeClr val="accent1"/>
+          </a:lnRef>
+          <a:fillRef idx="3">
+            <a:schemeClr val="accent1"/>
+          </a:fillRef>
+          <a:effectRef idx="2">
+            <a:schemeClr val="accent1"/>
+          </a:effectRef>
+          <a:fontRef idx="minor">
+            <a:schemeClr val="lt1"/>
+          </a:fontRef>
+        </p:style>
+        <p:txBody>
+          <a:bodyPr rtlCol="0" anchor="ctr"/>
+          <a:lstStyle/>
+          <a:p>
+            <a:pPr algn="ctr"/>
+          </a:p>
+        </p:txBody>
+      </p:sp>
+      <p:sp>
+        <p:nvSpPr>
+          <p:cNvPr id="23" name="Rounded Rectangle 22"/>
+          <p:cNvSpPr/>
+          <p:nvPr/>
+        </p:nvSpPr>
+        <p:spPr>
+          <a:xfrm>
+            <a:off x="6272784" y="3429000"/>
+            <a:ext cx="128016" cy="128016"/>
+          </a:xfrm>
+          <a:prstGeom prst="roundRect">
+            <a:avLst/>
+          </a:prstGeom>
+          <a:solidFill>
+            <a:srgbClr val="FFBF00"/>
+          </a:solidFill>
+          <a:ln>
+            <a:noFill/>
+          </a:ln>
+        </p:spPr>
+        <p:style>
+          <a:lnRef idx="1">
+            <a:schemeClr val="accent1"/>
+          </a:lnRef>
+          <a:fillRef idx="3">
+            <a:schemeClr val="accent1"/>
+          </a:fillRef>
+          <a:effectRef idx="2">
+            <a:schemeClr val="accent1"/>
+          </a:effectRef>
+          <a:fontRef idx="minor">
+            <a:schemeClr val="lt1"/>
+          </a:fontRef>
+        </p:style>
+        <p:txBody>
+          <a:bodyPr rtlCol="0" anchor="ctr"/>
+          <a:lstStyle/>
+          <a:p>
+            <a:pPr algn="ctr"/>
+          </a:p>
+        </p:txBody>
+      </p:sp>
+      <p:sp>
+        <p:nvSpPr>
+          <p:cNvPr id="24" name="Rectangle 23"/>
+          <p:cNvSpPr/>
+          <p:nvPr/>
+        </p:nvSpPr>
+        <p:spPr>
+          <a:xfrm>
+            <a:off x="3090672" y="3840480"/>
+            <a:ext cx="36576" cy="393192"/>
+          </a:xfrm>
+          <a:prstGeom prst="rect">
+            <a:avLst/>
+          </a:prstGeom>
+          <a:solidFill>
+            <a:srgbClr val="00E676"/>
+          </a:solidFill>
+          <a:ln>
+            <a:noFill/>
+          </a:ln>
+        </p:spPr>
+        <p:style>
+          <a:lnRef idx="1">
+            <a:schemeClr val="accent1"/>
+          </a:lnRef>
+          <a:fillRef idx="3">
+            <a:schemeClr val="accent1"/>
+          </a:fillRef>
+          <a:effectRef idx="2">
+            <a:schemeClr val="accent1"/>
+          </a:effectRef>
+          <a:fontRef idx="minor">
+            <a:schemeClr val="lt1"/>
+          </a:fontRef>
+        </p:style>
+        <p:txBody>
+          <a:bodyPr rtlCol="0" anchor="ctr"/>
+          <a:lstStyle/>
+          <a:p>
+            <a:pPr algn="ctr"/>
+          </a:p>
+        </p:txBody>
+      </p:sp>
+      <p:sp>
+        <p:nvSpPr>
+          <p:cNvPr id="25" name="Rounded Rectangle 24"/>
+          <p:cNvSpPr/>
+          <p:nvPr/>
+        </p:nvSpPr>
+        <p:spPr>
+          <a:xfrm>
+            <a:off x="3044952" y="4215384"/>
+            <a:ext cx="128016" cy="128016"/>
+          </a:xfrm>
+          <a:prstGeom prst="roundRect">
+            <a:avLst/>
+          </a:prstGeom>
+          <a:solidFill>
+            <a:srgbClr val="00E676"/>
+          </a:solidFill>
+          <a:ln>
+            <a:noFill/>
+          </a:ln>
+        </p:spPr>
+        <p:style>
+          <a:lnRef idx="1">
+            <a:schemeClr val="accent1"/>
+          </a:lnRef>
+          <a:fillRef idx="3">
+            <a:schemeClr val="accent1"/>
+          </a:fillRef>
+          <a:effectRef idx="2">
+            <a:schemeClr val="accent1"/>
+          </a:effectRef>
+          <a:fontRef idx="minor">
+            <a:schemeClr val="lt1"/>
+          </a:fontRef>
+        </p:style>
+        <p:txBody>
+          <a:bodyPr rtlCol="0" anchor="ctr"/>
+          <a:lstStyle/>
+          <a:p>
+            <a:pPr algn="ctr"/>
+          </a:p>
+        </p:txBody>
+      </p:sp>
+      <p:sp>
+        <p:nvSpPr>
+          <p:cNvPr id="26" name="Rectangle 25"/>
+          <p:cNvSpPr/>
+          <p:nvPr/>
+        </p:nvSpPr>
+        <p:spPr>
+          <a:xfrm>
+            <a:off x="9034272" y="3840480"/>
+            <a:ext cx="36576" cy="393192"/>
+          </a:xfrm>
+          <a:prstGeom prst="rect">
+            <a:avLst/>
+          </a:prstGeom>
+          <a:solidFill>
+            <a:srgbClr val="FFBF00"/>
+          </a:solidFill>
+          <a:ln>
+            <a:noFill/>
+          </a:ln>
+        </p:spPr>
+        <p:style>
+          <a:lnRef idx="1">
+            <a:schemeClr val="accent1"/>
+          </a:lnRef>
+          <a:fillRef idx="3">
+            <a:schemeClr val="accent1"/>
+          </a:fillRef>
+          <a:effectRef idx="2">
+            <a:schemeClr val="accent1"/>
+          </a:effectRef>
+          <a:fontRef idx="minor">
+            <a:schemeClr val="lt1"/>
+          </a:fontRef>
+        </p:style>
+        <p:txBody>
+          <a:bodyPr rtlCol="0" anchor="ctr"/>
+          <a:lstStyle/>
+          <a:p>
+            <a:pPr algn="ctr"/>
+          </a:p>
+        </p:txBody>
+      </p:sp>
+      <p:sp>
+        <p:nvSpPr>
+          <p:cNvPr id="27" name="Rounded Rectangle 26"/>
+          <p:cNvSpPr/>
+          <p:nvPr/>
+        </p:nvSpPr>
+        <p:spPr>
+          <a:xfrm>
+            <a:off x="8988552" y="4215384"/>
+            <a:ext cx="128016" cy="128016"/>
+          </a:xfrm>
+          <a:prstGeom prst="roundRect">
+            <a:avLst/>
+          </a:prstGeom>
+          <a:solidFill>
+            <a:srgbClr val="FFBF00"/>
+          </a:solidFill>
+          <a:ln>
+            <a:noFill/>
+          </a:ln>
+        </p:spPr>
+        <p:style>
+          <a:lnRef idx="1">
+            <a:schemeClr val="accent1"/>
+          </a:lnRef>
+          <a:fillRef idx="3">
+            <a:schemeClr val="accent1"/>
+          </a:fillRef>
+          <a:effectRef idx="2">
+            <a:schemeClr val="accent1"/>
+          </a:effectRef>
+          <a:fontRef idx="minor">
+            <a:schemeClr val="lt1"/>
+          </a:fontRef>
+        </p:style>
+        <p:txBody>
+          <a:bodyPr rtlCol="0" anchor="ctr"/>
+          <a:lstStyle/>
+          <a:p>
+            <a:pPr algn="ctr"/>
+          </a:p>
+        </p:txBody>
+      </p:sp>
+      <p:sp>
+        <p:nvSpPr>
+          <p:cNvPr id="28" name="TextBox 27"/>
+          <p:cNvSpPr txBox="1"/>
+          <p:nvPr/>
+        </p:nvSpPr>
+        <p:spPr>
+          <a:xfrm>
+            <a:off x="457200" y="4206240"/>
+            <a:ext cx="11247120" cy="274320"/>
+          </a:xfrm>
+          <a:prstGeom prst="rect">
+            <a:avLst/>
+          </a:prstGeom>
+          <a:noFill/>
+        </p:spPr>
+        <p:txBody>
+          <a:bodyPr wrap="square">
+            <a:spAutoFit/>
+          </a:bodyPr>
+          <a:lstStyle/>
+          <a:p>
+            <a:pPr algn="ctr"/>
+            <a:r>
+              <a:rPr sz="1000" b="1" i="0">
+                <a:solidFill>
+                  <a:srgbClr val="FF4545"/>
+                </a:solidFill>
+                <a:latin typeface="Calibri"/>
+              </a:rPr>
+              <a:t>BACKEND  (rafserver — Ubuntu 24.04, AMD A6, 8GB RAM)</a:t>
+            </a:r>
+          </a:p>
+        </p:txBody>
+      </p:sp>
+      <p:sp>
+        <p:nvSpPr>
+          <p:cNvPr id="29" name="Rounded Rectangle 28"/>
+          <p:cNvSpPr/>
+          <p:nvPr/>
+        </p:nvSpPr>
+        <p:spPr>
+          <a:xfrm>
+            <a:off x="457200" y="4526280"/>
+            <a:ext cx="2194560" cy="822960"/>
+          </a:xfrm>
+          <a:prstGeom prst="roundRect">
+            <a:avLst>
+              <a:gd name="adj" fmla="val 5000"/>
+            </a:avLst>
+          </a:prstGeom>
+          <a:solidFill>
+            <a:srgbClr val="112D4A"/>
+          </a:solidFill>
+          <a:ln w="19050">
+            <a:solidFill>
+              <a:srgbClr val="FF4545"/>
+            </a:solidFill>
+          </a:ln>
+        </p:spPr>
+        <p:style>
+          <a:lnRef idx="1">
+            <a:schemeClr val="accent1"/>
+          </a:lnRef>
+          <a:fillRef idx="3">
+            <a:schemeClr val="accent1"/>
+          </a:fillRef>
+          <a:effectRef idx="2">
+            <a:schemeClr val="accent1"/>
+          </a:effectRef>
+          <a:fontRef idx="minor">
+            <a:schemeClr val="lt1"/>
+          </a:fontRef>
+        </p:style>
+        <p:txBody>
+          <a:bodyPr rtlCol="0" anchor="ctr" wrap="square"/>
+          <a:lstStyle/>
+          <a:p>
+            <a:pPr algn="ctr"/>
+            <a:r>
+              <a:rPr sz="1200" b="1">
+                <a:solidFill>
+                  <a:srgbClr val="FF4545"/>
+                </a:solidFill>
+                <a:latin typeface="Calibri"/>
+              </a:rPr>
+              <a:t>🐍  Flask
++ Gunicorn</a:t>
+            </a:r>
+          </a:p>
+        </p:txBody>
+      </p:sp>
+      <p:sp>
+        <p:nvSpPr>
+          <p:cNvPr id="30" name="Rounded Rectangle 29"/>
+          <p:cNvSpPr/>
+          <p:nvPr/>
+        </p:nvSpPr>
+        <p:spPr>
+          <a:xfrm>
+            <a:off x="2743200" y="4526280"/>
+            <a:ext cx="2194560" cy="822960"/>
+          </a:xfrm>
+          <a:prstGeom prst="roundRect">
+            <a:avLst>
+              <a:gd name="adj" fmla="val 5000"/>
+            </a:avLst>
+          </a:prstGeom>
+          <a:solidFill>
+            <a:srgbClr val="112D4A"/>
+          </a:solidFill>
+          <a:ln w="19050">
+            <a:solidFill>
+              <a:srgbClr val="FFBF00"/>
+            </a:solidFill>
+          </a:ln>
+        </p:spPr>
+        <p:style>
+          <a:lnRef idx="1">
+            <a:schemeClr val="accent1"/>
+          </a:lnRef>
+          <a:fillRef idx="3">
+            <a:schemeClr val="accent1"/>
+          </a:fillRef>
+          <a:effectRef idx="2">
+            <a:schemeClr val="accent1"/>
+          </a:effectRef>
+          <a:fontRef idx="minor">
+            <a:schemeClr val="lt1"/>
+          </a:fontRef>
+        </p:style>
+        <p:txBody>
+          <a:bodyPr rtlCol="0" anchor="ctr" wrap="square"/>
+          <a:lstStyle/>
+          <a:p>
+            <a:pPr algn="ctr"/>
+            <a:r>
+              <a:rPr sz="1200" b="1">
+                <a:solidFill>
+                  <a:srgbClr val="FFBF00"/>
+                </a:solidFill>
+                <a:latin typeface="Calibri"/>
+              </a:rPr>
+              <a:t>📊  SQLite
+tracker.db</a:t>
+            </a:r>
+          </a:p>
+        </p:txBody>
+      </p:sp>
+      <p:sp>
+        <p:nvSpPr>
+          <p:cNvPr id="31" name="Rounded Rectangle 30"/>
+          <p:cNvSpPr/>
+          <p:nvPr/>
+        </p:nvSpPr>
+        <p:spPr>
+          <a:xfrm>
+            <a:off x="5029200" y="4526280"/>
+            <a:ext cx="2194560" cy="822960"/>
+          </a:xfrm>
+          <a:prstGeom prst="roundRect">
+            <a:avLst>
+              <a:gd name="adj" fmla="val 5000"/>
+            </a:avLst>
+          </a:prstGeom>
+          <a:solidFill>
+            <a:srgbClr val="112D4A"/>
+          </a:solidFill>
+          <a:ln w="19050">
+            <a:solidFill>
+              <a:srgbClr val="A0B4C8"/>
+            </a:solidFill>
+          </a:ln>
+        </p:spPr>
+        <p:style>
+          <a:lnRef idx="1">
+            <a:schemeClr val="accent1"/>
+          </a:lnRef>
+          <a:fillRef idx="3">
+            <a:schemeClr val="accent1"/>
+          </a:fillRef>
+          <a:effectRef idx="2">
+            <a:schemeClr val="accent1"/>
+          </a:effectRef>
+          <a:fontRef idx="minor">
+            <a:schemeClr val="lt1"/>
+          </a:fontRef>
+        </p:style>
+        <p:txBody>
+          <a:bodyPr rtlCol="0" anchor="ctr" wrap="square"/>
+          <a:lstStyle/>
+          <a:p>
+            <a:pPr algn="ctr"/>
+            <a:r>
+              <a:rPr sz="1200" b="1">
+                <a:solidFill>
+                  <a:srgbClr val="A0B4C8"/>
+                </a:solidFill>
+                <a:latin typeface="Calibri"/>
+              </a:rPr>
+              <a:t>📁  CSV Input
+Weekly/</a:t>
+            </a:r>
+          </a:p>
+        </p:txBody>
+      </p:sp>
+      <p:sp>
+        <p:nvSpPr>
+          <p:cNvPr id="32" name="Rounded Rectangle 31"/>
+          <p:cNvSpPr/>
+          <p:nvPr/>
+        </p:nvSpPr>
+        <p:spPr>
+          <a:xfrm>
+            <a:off x="7315200" y="4526280"/>
+            <a:ext cx="2194560" cy="822960"/>
+          </a:xfrm>
+          <a:prstGeom prst="roundRect">
+            <a:avLst>
+              <a:gd name="adj" fmla="val 5000"/>
+            </a:avLst>
+          </a:prstGeom>
+          <a:solidFill>
+            <a:srgbClr val="112D4A"/>
+          </a:solidFill>
+          <a:ln w="19050">
+            <a:solidFill>
+              <a:srgbClr val="00E676"/>
+            </a:solidFill>
+          </a:ln>
+        </p:spPr>
+        <p:style>
+          <a:lnRef idx="1">
+            <a:schemeClr val="accent1"/>
+          </a:lnRef>
+          <a:fillRef idx="3">
+            <a:schemeClr val="accent1"/>
+          </a:fillRef>
+          <a:effectRef idx="2">
+            <a:schemeClr val="accent1"/>
+          </a:effectRef>
+          <a:fontRef idx="minor">
+            <a:schemeClr val="lt1"/>
+          </a:fontRef>
+        </p:style>
+        <p:txBody>
+          <a:bodyPr rtlCol="0" anchor="ctr" wrap="square"/>
+          <a:lstStyle/>
+          <a:p>
+            <a:pPr algn="ctr"/>
+            <a:r>
+              <a:rPr sz="1200" b="1">
+                <a:solidFill>
+                  <a:srgbClr val="00E676"/>
+                </a:solidFill>
+                <a:latin typeface="Calibri"/>
+              </a:rPr>
+              <a:t>⚙️  systemd
+Services</a:t>
+            </a:r>
+          </a:p>
+        </p:txBody>
+      </p:sp>
+      <p:sp>
+        <p:nvSpPr>
+          <p:cNvPr id="33" name="Rounded Rectangle 32"/>
+          <p:cNvSpPr/>
+          <p:nvPr/>
+        </p:nvSpPr>
+        <p:spPr>
+          <a:xfrm>
+            <a:off x="9601200" y="4526280"/>
+            <a:ext cx="2194560" cy="822960"/>
+          </a:xfrm>
+          <a:prstGeom prst="roundRect">
+            <a:avLst>
+              <a:gd name="adj" fmla="val 5000"/>
+            </a:avLst>
+          </a:prstGeom>
+          <a:solidFill>
+            <a:srgbClr val="112D4A"/>
+          </a:solidFill>
           <a:ln w="19050">
             <a:solidFill>
               <a:srgbClr val="00E5FF"/>
@@ -4363,135 +5380,47 @@
           </a:ln>
         </p:spPr>
         <p:style>
-          <a:lnRef idx="2">
-            <a:schemeClr val="accent1"/>
-          </a:lnRef>
-          <a:fillRef idx="0">
-            <a:schemeClr val="accent1"/>
-          </a:fillRef>
-          <a:effectRef idx="1">
-            <a:schemeClr val="accent1"/>
-          </a:effectRef>
-          <a:fontRef idx="minor">
-            <a:schemeClr val="tx1"/>
-          </a:fontRef>
-        </p:style>
-      </p:cxnSp>
-      <p:cxnSp>
-        <p:nvCxnSpPr>
-          <p:cNvPr id="12" name="Connector 11"/>
-          <p:cNvCxnSpPr/>
-          <p:nvPr/>
-        </p:nvCxnSpPr>
-        <p:spPr>
-          <a:xfrm>
-            <a:off x="4617720" y="2560320"/>
-            <a:ext cx="0" cy="502920"/>
-          </a:xfrm>
-          <a:prstGeom prst="line">
-            <a:avLst/>
-          </a:prstGeom>
-          <a:ln w="19050">
-            <a:solidFill>
-              <a:srgbClr val="00E5FF"/>
-            </a:solidFill>
-          </a:ln>
-        </p:spPr>
-        <p:style>
-          <a:lnRef idx="2">
-            <a:schemeClr val="accent1"/>
-          </a:lnRef>
-          <a:fillRef idx="0">
-            <a:schemeClr val="accent1"/>
-          </a:fillRef>
-          <a:effectRef idx="1">
-            <a:schemeClr val="accent1"/>
-          </a:effectRef>
-          <a:fontRef idx="minor">
-            <a:schemeClr val="tx1"/>
-          </a:fontRef>
-        </p:style>
-      </p:cxnSp>
-      <p:cxnSp>
-        <p:nvCxnSpPr>
-          <p:cNvPr id="13" name="Connector 12"/>
-          <p:cNvCxnSpPr/>
-          <p:nvPr/>
-        </p:nvCxnSpPr>
-        <p:spPr>
-          <a:xfrm>
-            <a:off x="7360920" y="2560320"/>
-            <a:ext cx="0" cy="502920"/>
-          </a:xfrm>
-          <a:prstGeom prst="line">
-            <a:avLst/>
-          </a:prstGeom>
-          <a:ln w="19050">
-            <a:solidFill>
-              <a:srgbClr val="00E5FF"/>
-            </a:solidFill>
-          </a:ln>
-        </p:spPr>
-        <p:style>
-          <a:lnRef idx="2">
-            <a:schemeClr val="accent1"/>
-          </a:lnRef>
-          <a:fillRef idx="0">
-            <a:schemeClr val="accent1"/>
-          </a:fillRef>
-          <a:effectRef idx="1">
-            <a:schemeClr val="accent1"/>
-          </a:effectRef>
-          <a:fontRef idx="minor">
-            <a:schemeClr val="tx1"/>
-          </a:fontRef>
-        </p:style>
-      </p:cxnSp>
-      <p:cxnSp>
-        <p:nvCxnSpPr>
-          <p:cNvPr id="14" name="Connector 13"/>
-          <p:cNvCxnSpPr/>
-          <p:nvPr/>
-        </p:nvCxnSpPr>
-        <p:spPr>
-          <a:xfrm>
-            <a:off x="10287000" y="2560320"/>
-            <a:ext cx="0" cy="502920"/>
-          </a:xfrm>
-          <a:prstGeom prst="line">
-            <a:avLst/>
-          </a:prstGeom>
-          <a:ln w="19050">
-            <a:solidFill>
-              <a:srgbClr val="FFBF00"/>
-            </a:solidFill>
-          </a:ln>
-        </p:spPr>
-        <p:style>
-          <a:lnRef idx="2">
-            <a:schemeClr val="accent1"/>
-          </a:lnRef>
-          <a:fillRef idx="0">
-            <a:schemeClr val="accent1"/>
-          </a:fillRef>
-          <a:effectRef idx="1">
-            <a:schemeClr val="accent1"/>
-          </a:effectRef>
-          <a:fontRef idx="minor">
-            <a:schemeClr val="tx1"/>
-          </a:fontRef>
-        </p:style>
-      </p:cxnSp>
-      <p:sp>
-        <p:nvSpPr>
-          <p:cNvPr id="15" name="TextBox 14"/>
+          <a:lnRef idx="1">
+            <a:schemeClr val="accent1"/>
+          </a:lnRef>
+          <a:fillRef idx="3">
+            <a:schemeClr val="accent1"/>
+          </a:fillRef>
+          <a:effectRef idx="2">
+            <a:schemeClr val="accent1"/>
+          </a:effectRef>
+          <a:fontRef idx="minor">
+            <a:schemeClr val="lt1"/>
+          </a:fontRef>
+        </p:style>
+        <p:txBody>
+          <a:bodyPr rtlCol="0" anchor="ctr" wrap="square"/>
+          <a:lstStyle/>
+          <a:p>
+            <a:pPr algn="ctr"/>
+            <a:r>
+              <a:rPr sz="1200" b="1">
+                <a:solidFill>
+                  <a:srgbClr val="00E5FF"/>
+                </a:solidFill>
+                <a:latin typeface="Calibri"/>
+              </a:rPr>
+              <a:t>📋  Jules
+Scripts</a:t>
+            </a:r>
+          </a:p>
+        </p:txBody>
+      </p:sp>
+      <p:sp>
+        <p:nvSpPr>
+          <p:cNvPr id="34" name="TextBox 33"/>
           <p:cNvSpPr txBox="1"/>
           <p:nvPr/>
         </p:nvSpPr>
         <p:spPr>
           <a:xfrm>
-            <a:off x="457200" y="2926080"/>
-            <a:ext cx="11247120" cy="274320"/>
+            <a:off x="457200" y="6263640"/>
+            <a:ext cx="11247120" cy="365760"/>
           </a:xfrm>
           <a:prstGeom prst="rect">
             <a:avLst/>
@@ -4506,592 +5435,20 @@
           <a:p>
             <a:pPr algn="ctr"/>
             <a:r>
-              <a:rPr sz="1100" b="1" i="0">
-                <a:solidFill>
-                  <a:srgbClr val="00E676"/>
+              <a:rPr sz="1000" b="0" i="0">
+                <a:solidFill>
+                  <a:srgbClr val="A0B4C8"/>
                 </a:solidFill>
                 <a:latin typeface="Calibri"/>
               </a:rPr>
-              <a:t>SIEĆ / PROXY</a:t>
-            </a:r>
-          </a:p>
-        </p:txBody>
-      </p:sp>
-      <p:sp>
-        <p:nvSpPr>
-          <p:cNvPr id="16" name="Rounded Rectangle 15"/>
-          <p:cNvSpPr/>
-          <p:nvPr/>
-        </p:nvSpPr>
-        <p:spPr>
-          <a:xfrm>
-            <a:off x="914400" y="3200400"/>
-            <a:ext cx="5029200" cy="685800"/>
-          </a:xfrm>
-          <a:prstGeom prst="roundRect">
-            <a:avLst>
-              <a:gd name="adj" fmla="val 5000"/>
-            </a:avLst>
-          </a:prstGeom>
-          <a:solidFill>
-            <a:srgbClr val="004D33"/>
-          </a:solidFill>
-          <a:ln w="19050">
-            <a:solidFill>
-              <a:srgbClr val="00E676"/>
-            </a:solidFill>
-          </a:ln>
-        </p:spPr>
-        <p:style>
-          <a:lnRef idx="1">
-            <a:schemeClr val="accent1"/>
-          </a:lnRef>
-          <a:fillRef idx="3">
-            <a:schemeClr val="accent1"/>
-          </a:fillRef>
-          <a:effectRef idx="2">
-            <a:schemeClr val="accent1"/>
-          </a:effectRef>
-          <a:fontRef idx="minor">
-            <a:schemeClr val="lt1"/>
-          </a:fontRef>
-        </p:style>
-        <p:txBody>
-          <a:bodyPr rtlCol="0" anchor="ctr" wrap="square"/>
-          <a:lstStyle/>
-          <a:p>
-            <a:pPr algn="ctr"/>
-            <a:r>
-              <a:rPr sz="1300" b="1">
-                <a:solidFill>
-                  <a:srgbClr val="00E676"/>
-                </a:solidFill>
-                <a:latin typeface="Calibri"/>
-              </a:rPr>
-              <a:t>🔀  Nginx Reverse Proxy  (port 80)</a:t>
-            </a:r>
-          </a:p>
-        </p:txBody>
-      </p:sp>
-      <p:sp>
-        <p:nvSpPr>
-          <p:cNvPr id="17" name="Rounded Rectangle 16"/>
-          <p:cNvSpPr/>
-          <p:nvPr/>
-        </p:nvSpPr>
-        <p:spPr>
-          <a:xfrm>
-            <a:off x="6583680" y="3200400"/>
-            <a:ext cx="4572000" cy="685800"/>
-          </a:xfrm>
-          <a:prstGeom prst="roundRect">
-            <a:avLst>
-              <a:gd name="adj" fmla="val 5000"/>
-            </a:avLst>
-          </a:prstGeom>
-          <a:solidFill>
-            <a:srgbClr val="332200"/>
-          </a:solidFill>
-          <a:ln w="19050">
-            <a:solidFill>
-              <a:srgbClr val="FFBF00"/>
-            </a:solidFill>
-          </a:ln>
-        </p:spPr>
-        <p:style>
-          <a:lnRef idx="1">
-            <a:schemeClr val="accent1"/>
-          </a:lnRef>
-          <a:fillRef idx="3">
-            <a:schemeClr val="accent1"/>
-          </a:fillRef>
-          <a:effectRef idx="2">
-            <a:schemeClr val="accent1"/>
-          </a:effectRef>
-          <a:fontRef idx="minor">
-            <a:schemeClr val="lt1"/>
-          </a:fontRef>
-        </p:style>
-        <p:txBody>
-          <a:bodyPr rtlCol="0" anchor="ctr" wrap="square"/>
-          <a:lstStyle/>
-          <a:p>
-            <a:pPr algn="ctr"/>
-            <a:r>
-              <a:rPr sz="1300" b="1">
-                <a:solidFill>
-                  <a:srgbClr val="FFBF00"/>
-                </a:solidFill>
-                <a:latin typeface="Calibri"/>
-              </a:rPr>
-              <a:t>🌐  ZeroTier VPN  (remote access)</a:t>
-            </a:r>
-          </a:p>
-        </p:txBody>
-      </p:sp>
-      <p:cxnSp>
-        <p:nvCxnSpPr>
-          <p:cNvPr id="18" name="Connector 17"/>
-          <p:cNvCxnSpPr/>
-          <p:nvPr/>
-        </p:nvCxnSpPr>
-        <p:spPr>
-          <a:xfrm>
-            <a:off x="3429000" y="3886200"/>
-            <a:ext cx="0" cy="502920"/>
-          </a:xfrm>
-          <a:prstGeom prst="line">
-            <a:avLst/>
-          </a:prstGeom>
-          <a:ln w="19050">
-            <a:solidFill>
-              <a:srgbClr val="00E676"/>
-            </a:solidFill>
-          </a:ln>
-        </p:spPr>
-        <p:style>
-          <a:lnRef idx="2">
-            <a:schemeClr val="accent1"/>
-          </a:lnRef>
-          <a:fillRef idx="0">
-            <a:schemeClr val="accent1"/>
-          </a:fillRef>
-          <a:effectRef idx="1">
-            <a:schemeClr val="accent1"/>
-          </a:effectRef>
-          <a:fontRef idx="minor">
-            <a:schemeClr val="tx1"/>
-          </a:fontRef>
-        </p:style>
-      </p:cxnSp>
-      <p:cxnSp>
-        <p:nvCxnSpPr>
-          <p:cNvPr id="19" name="Connector 18"/>
-          <p:cNvCxnSpPr/>
-          <p:nvPr/>
-        </p:nvCxnSpPr>
-        <p:spPr>
-          <a:xfrm>
-            <a:off x="8869680" y="3886200"/>
-            <a:ext cx="0" cy="502920"/>
-          </a:xfrm>
-          <a:prstGeom prst="line">
-            <a:avLst/>
-          </a:prstGeom>
-          <a:ln w="19050">
-            <a:solidFill>
-              <a:srgbClr val="FFBF00"/>
-            </a:solidFill>
-          </a:ln>
-        </p:spPr>
-        <p:style>
-          <a:lnRef idx="2">
-            <a:schemeClr val="accent1"/>
-          </a:lnRef>
-          <a:fillRef idx="0">
-            <a:schemeClr val="accent1"/>
-          </a:fillRef>
-          <a:effectRef idx="1">
-            <a:schemeClr val="accent1"/>
-          </a:effectRef>
-          <a:fontRef idx="minor">
-            <a:schemeClr val="tx1"/>
-          </a:fontRef>
-        </p:style>
-      </p:cxnSp>
-      <p:cxnSp>
-        <p:nvCxnSpPr>
-          <p:cNvPr id="20" name="Connector 19"/>
-          <p:cNvCxnSpPr/>
-          <p:nvPr/>
-        </p:nvCxnSpPr>
-        <p:spPr>
-          <a:xfrm flipH="1">
-            <a:off x="5943600" y="3543300"/>
-            <a:ext cx="640080" cy="0"/>
-          </a:xfrm>
-          <a:prstGeom prst="line">
-            <a:avLst/>
-          </a:prstGeom>
-          <a:ln w="15240">
-            <a:solidFill>
-              <a:srgbClr val="FFBF00"/>
-            </a:solidFill>
-          </a:ln>
-        </p:spPr>
-        <p:style>
-          <a:lnRef idx="2">
-            <a:schemeClr val="accent1"/>
-          </a:lnRef>
-          <a:fillRef idx="0">
-            <a:schemeClr val="accent1"/>
-          </a:fillRef>
-          <a:effectRef idx="1">
-            <a:schemeClr val="accent1"/>
-          </a:effectRef>
-          <a:fontRef idx="minor">
-            <a:schemeClr val="tx1"/>
-          </a:fontRef>
-        </p:style>
-      </p:cxnSp>
-      <p:sp>
-        <p:nvSpPr>
-          <p:cNvPr id="21" name="TextBox 20"/>
-          <p:cNvSpPr txBox="1"/>
-          <p:nvPr/>
-        </p:nvSpPr>
-        <p:spPr>
-          <a:xfrm>
-            <a:off x="457200" y="4251960"/>
-            <a:ext cx="11247120" cy="274320"/>
-          </a:xfrm>
-          <a:prstGeom prst="rect">
-            <a:avLst/>
-          </a:prstGeom>
-          <a:noFill/>
-        </p:spPr>
-        <p:txBody>
-          <a:bodyPr wrap="square">
-            <a:spAutoFit/>
-          </a:bodyPr>
-          <a:lstStyle/>
-          <a:p>
-            <a:pPr algn="ctr"/>
-            <a:r>
-              <a:rPr sz="1100" b="1" i="0">
-                <a:solidFill>
-                  <a:srgbClr val="FF4545"/>
-                </a:solidFill>
-                <a:latin typeface="Calibri"/>
-              </a:rPr>
-              <a:t>BACKEND  (rafserver)</a:t>
-            </a:r>
-          </a:p>
-        </p:txBody>
-      </p:sp>
-      <p:sp>
-        <p:nvSpPr>
-          <p:cNvPr id="22" name="Rounded Rectangle 21"/>
-          <p:cNvSpPr/>
-          <p:nvPr/>
-        </p:nvSpPr>
-        <p:spPr>
-          <a:xfrm>
-            <a:off x="548640" y="4526280"/>
-            <a:ext cx="2103120" cy="822960"/>
-          </a:xfrm>
-          <a:prstGeom prst="roundRect">
-            <a:avLst>
-              <a:gd name="adj" fmla="val 5000"/>
-            </a:avLst>
-          </a:prstGeom>
-          <a:solidFill>
-            <a:srgbClr val="112D4A"/>
-          </a:solidFill>
-          <a:ln w="19050">
-            <a:solidFill>
-              <a:srgbClr val="FF4545"/>
-            </a:solidFill>
-          </a:ln>
-        </p:spPr>
-        <p:style>
-          <a:lnRef idx="1">
-            <a:schemeClr val="accent1"/>
-          </a:lnRef>
-          <a:fillRef idx="3">
-            <a:schemeClr val="accent1"/>
-          </a:fillRef>
-          <a:effectRef idx="2">
-            <a:schemeClr val="accent1"/>
-          </a:effectRef>
-          <a:fontRef idx="minor">
-            <a:schemeClr val="lt1"/>
-          </a:fontRef>
-        </p:style>
-        <p:txBody>
-          <a:bodyPr rtlCol="0" anchor="ctr" wrap="square"/>
-          <a:lstStyle/>
-          <a:p>
-            <a:pPr algn="ctr"/>
-            <a:r>
-              <a:rPr sz="1200" b="1">
-                <a:solidFill>
-                  <a:srgbClr val="FF4545"/>
-                </a:solidFill>
-                <a:latin typeface="Calibri"/>
-              </a:rPr>
-              <a:t>🐍 Flask
-+ Gunicorn</a:t>
-            </a:r>
-          </a:p>
-        </p:txBody>
-      </p:sp>
-      <p:sp>
-        <p:nvSpPr>
-          <p:cNvPr id="23" name="Rounded Rectangle 22"/>
-          <p:cNvSpPr/>
-          <p:nvPr/>
-        </p:nvSpPr>
-        <p:spPr>
-          <a:xfrm>
-            <a:off x="2926080" y="4526280"/>
-            <a:ext cx="2103120" cy="822960"/>
-          </a:xfrm>
-          <a:prstGeom prst="roundRect">
-            <a:avLst>
-              <a:gd name="adj" fmla="val 5000"/>
-            </a:avLst>
-          </a:prstGeom>
-          <a:solidFill>
-            <a:srgbClr val="112D4A"/>
-          </a:solidFill>
-          <a:ln w="19050">
-            <a:solidFill>
-              <a:srgbClr val="FFBF00"/>
-            </a:solidFill>
-          </a:ln>
-        </p:spPr>
-        <p:style>
-          <a:lnRef idx="1">
-            <a:schemeClr val="accent1"/>
-          </a:lnRef>
-          <a:fillRef idx="3">
-            <a:schemeClr val="accent1"/>
-          </a:fillRef>
-          <a:effectRef idx="2">
-            <a:schemeClr val="accent1"/>
-          </a:effectRef>
-          <a:fontRef idx="minor">
-            <a:schemeClr val="lt1"/>
-          </a:fontRef>
-        </p:style>
-        <p:txBody>
-          <a:bodyPr rtlCol="0" anchor="ctr" wrap="square"/>
-          <a:lstStyle/>
-          <a:p>
-            <a:pPr algn="ctr"/>
-            <a:r>
-              <a:rPr sz="1200" b="1">
-                <a:solidFill>
-                  <a:srgbClr val="FFBF00"/>
-                </a:solidFill>
-                <a:latin typeface="Calibri"/>
-              </a:rPr>
-              <a:t>📊 SQLite
-DB</a:t>
-            </a:r>
-          </a:p>
-        </p:txBody>
-      </p:sp>
-      <p:sp>
-        <p:nvSpPr>
-          <p:cNvPr id="24" name="Rounded Rectangle 23"/>
-          <p:cNvSpPr/>
-          <p:nvPr/>
-        </p:nvSpPr>
-        <p:spPr>
-          <a:xfrm>
-            <a:off x="5303520" y="4526280"/>
-            <a:ext cx="2103120" cy="822960"/>
-          </a:xfrm>
-          <a:prstGeom prst="roundRect">
-            <a:avLst>
-              <a:gd name="adj" fmla="val 5000"/>
-            </a:avLst>
-          </a:prstGeom>
-          <a:solidFill>
-            <a:srgbClr val="112D4A"/>
-          </a:solidFill>
-          <a:ln w="19050">
-            <a:solidFill>
-              <a:srgbClr val="A0B4C8"/>
-            </a:solidFill>
-          </a:ln>
-        </p:spPr>
-        <p:style>
-          <a:lnRef idx="1">
-            <a:schemeClr val="accent1"/>
-          </a:lnRef>
-          <a:fillRef idx="3">
-            <a:schemeClr val="accent1"/>
-          </a:fillRef>
-          <a:effectRef idx="2">
-            <a:schemeClr val="accent1"/>
-          </a:effectRef>
-          <a:fontRef idx="minor">
-            <a:schemeClr val="lt1"/>
-          </a:fontRef>
-        </p:style>
-        <p:txBody>
-          <a:bodyPr rtlCol="0" anchor="ctr" wrap="square"/>
-          <a:lstStyle/>
-          <a:p>
-            <a:pPr algn="ctr"/>
-            <a:r>
-              <a:rPr sz="1200" b="1">
-                <a:solidFill>
-                  <a:srgbClr val="A0B4C8"/>
-                </a:solidFill>
-                <a:latin typeface="Calibri"/>
-              </a:rPr>
-              <a:t>📁 CSV
-Input</a:t>
-            </a:r>
-          </a:p>
-        </p:txBody>
-      </p:sp>
-      <p:sp>
-        <p:nvSpPr>
-          <p:cNvPr id="25" name="Rounded Rectangle 24"/>
-          <p:cNvSpPr/>
-          <p:nvPr/>
-        </p:nvSpPr>
-        <p:spPr>
-          <a:xfrm>
-            <a:off x="7680960" y="4526280"/>
-            <a:ext cx="2103120" cy="822960"/>
-          </a:xfrm>
-          <a:prstGeom prst="roundRect">
-            <a:avLst>
-              <a:gd name="adj" fmla="val 5000"/>
-            </a:avLst>
-          </a:prstGeom>
-          <a:solidFill>
-            <a:srgbClr val="112D4A"/>
-          </a:solidFill>
-          <a:ln w="19050">
-            <a:solidFill>
-              <a:srgbClr val="00E676"/>
-            </a:solidFill>
-          </a:ln>
-        </p:spPr>
-        <p:style>
-          <a:lnRef idx="1">
-            <a:schemeClr val="accent1"/>
-          </a:lnRef>
-          <a:fillRef idx="3">
-            <a:schemeClr val="accent1"/>
-          </a:fillRef>
-          <a:effectRef idx="2">
-            <a:schemeClr val="accent1"/>
-          </a:effectRef>
-          <a:fontRef idx="minor">
-            <a:schemeClr val="lt1"/>
-          </a:fontRef>
-        </p:style>
-        <p:txBody>
-          <a:bodyPr rtlCol="0" anchor="ctr" wrap="square"/>
-          <a:lstStyle/>
-          <a:p>
-            <a:pPr algn="ctr"/>
-            <a:r>
-              <a:rPr sz="1200" b="1">
-                <a:solidFill>
-                  <a:srgbClr val="00E676"/>
-                </a:solidFill>
-                <a:latin typeface="Calibri"/>
-              </a:rPr>
-              <a:t>📜 systemd
-Services</a:t>
-            </a:r>
-          </a:p>
-        </p:txBody>
-      </p:sp>
-      <p:sp>
-        <p:nvSpPr>
-          <p:cNvPr id="26" name="Rounded Rectangle 25"/>
-          <p:cNvSpPr/>
-          <p:nvPr/>
-        </p:nvSpPr>
-        <p:spPr>
-          <a:xfrm>
-            <a:off x="10058400" y="4526280"/>
-            <a:ext cx="2103120" cy="822960"/>
-          </a:xfrm>
-          <a:prstGeom prst="roundRect">
-            <a:avLst>
-              <a:gd name="adj" fmla="val 5000"/>
-            </a:avLst>
-          </a:prstGeom>
-          <a:solidFill>
-            <a:srgbClr val="112D4A"/>
-          </a:solidFill>
-          <a:ln w="19050">
-            <a:solidFill>
-              <a:srgbClr val="00E5FF"/>
-            </a:solidFill>
-          </a:ln>
-        </p:spPr>
-        <p:style>
-          <a:lnRef idx="1">
-            <a:schemeClr val="accent1"/>
-          </a:lnRef>
-          <a:fillRef idx="3">
-            <a:schemeClr val="accent1"/>
-          </a:fillRef>
-          <a:effectRef idx="2">
-            <a:schemeClr val="accent1"/>
-          </a:effectRef>
-          <a:fontRef idx="minor">
-            <a:schemeClr val="lt1"/>
-          </a:fontRef>
-        </p:style>
-        <p:txBody>
-          <a:bodyPr rtlCol="0" anchor="ctr" wrap="square"/>
-          <a:lstStyle/>
-          <a:p>
-            <a:pPr algn="ctr"/>
-            <a:r>
-              <a:rPr sz="1200" b="1">
-                <a:solidFill>
-                  <a:srgbClr val="00E5FF"/>
-                </a:solidFill>
-                <a:latin typeface="Calibri"/>
-              </a:rPr>
-              <a:t>📋 Jules
-Scripts</a:t>
-            </a:r>
-          </a:p>
-        </p:txBody>
-      </p:sp>
-      <p:sp>
-        <p:nvSpPr>
-          <p:cNvPr id="27" name="TextBox 26"/>
-          <p:cNvSpPr txBox="1"/>
-          <p:nvPr/>
-        </p:nvSpPr>
-        <p:spPr>
-          <a:xfrm>
-            <a:off x="457200" y="6263640"/>
-            <a:ext cx="11247120" cy="365760"/>
-          </a:xfrm>
-          <a:prstGeom prst="rect">
-            <a:avLst/>
-          </a:prstGeom>
-          <a:noFill/>
-        </p:spPr>
-        <p:txBody>
-          <a:bodyPr wrap="square">
-            <a:spAutoFit/>
-          </a:bodyPr>
-          <a:lstStyle/>
-          <a:p>
-            <a:pPr algn="ctr"/>
-            <a:r>
-              <a:rPr sz="1100" b="0" i="0">
-                <a:solidFill>
-                  <a:srgbClr val="A0B4C8"/>
-                </a:solidFill>
-                <a:latin typeface="Calibri"/>
-              </a:rPr>
-              <a:t>● LAN  ● ZeroTier  ● Telegram API  ● GitHub API</a:t>
-            </a:r>
-          </a:p>
-        </p:txBody>
-      </p:sp>
-      <p:sp>
-        <p:nvSpPr>
-          <p:cNvPr id="28" name="TextBox 27"/>
+              <a:t>Dane: Defender CSV → /Input/Weekly/  |  API: /api/cves  |  Logi: /var/log/vulnapp/</a:t>
+            </a:r>
+          </a:p>
+        </p:txBody>
+      </p:sp>
+      <p:sp>
+        <p:nvSpPr>
+          <p:cNvPr id="35" name="TextBox 34"/>
           <p:cNvSpPr txBox="1"/>
           <p:nvPr/>
         </p:nvSpPr>
@@ -5194,7 +5551,7 @@
         <p:spPr>
           <a:xfrm>
             <a:off x="457200" y="1234440"/>
-            <a:ext cx="11274552" cy="54864"/>
+            <a:ext cx="11274552" cy="45720"/>
           </a:xfrm>
           <a:prstGeom prst="rect">
             <a:avLst/>
@@ -5300,14 +5657,49 @@
       </p:sp>
       <p:sp>
         <p:nvSpPr>
-          <p:cNvPr id="6" name="Rounded Rectangle 5"/>
-          <p:cNvSpPr/>
-          <p:nvPr/>
-        </p:nvSpPr>
-        <p:spPr>
-          <a:xfrm>
-            <a:off x="411480" y="1371600"/>
-            <a:ext cx="3383280" cy="685800"/>
+          <p:cNvPr id="6" name="TextBox 5"/>
+          <p:cNvSpPr txBox="1"/>
+          <p:nvPr/>
+        </p:nvSpPr>
+        <p:spPr>
+          <a:xfrm>
+            <a:off x="365760" y="1417320"/>
+            <a:ext cx="3383280" cy="320040"/>
+          </a:xfrm>
+          <a:prstGeom prst="rect">
+            <a:avLst/>
+          </a:prstGeom>
+          <a:noFill/>
+        </p:spPr>
+        <p:txBody>
+          <a:bodyPr wrap="square">
+            <a:spAutoFit/>
+          </a:bodyPr>
+          <a:lstStyle/>
+          <a:p>
+            <a:pPr algn="ctr"/>
+            <a:r>
+              <a:rPr sz="1200" b="1" i="0">
+                <a:solidFill>
+                  <a:srgbClr val="FFBF00"/>
+                </a:solidFill>
+                <a:latin typeface="Calibri"/>
+              </a:rPr>
+              <a:t>⚡  LIVE LISTENER</a:t>
+            </a:r>
+          </a:p>
+        </p:txBody>
+      </p:sp>
+      <p:sp>
+        <p:nvSpPr>
+          <p:cNvPr id="7" name="Rounded Rectangle 6"/>
+          <p:cNvSpPr/>
+          <p:nvPr/>
+        </p:nvSpPr>
+        <p:spPr>
+          <a:xfrm>
+            <a:off x="365760" y="1783080"/>
+            <a:ext cx="3383280" cy="658368"/>
           </a:xfrm>
           <a:prstGeom prst="roundRect">
             <a:avLst>
@@ -5357,14 +5749,100 @@
       </p:sp>
       <p:sp>
         <p:nvSpPr>
-          <p:cNvPr id="7" name="Rounded Rectangle 6"/>
-          <p:cNvSpPr/>
-          <p:nvPr/>
-        </p:nvSpPr>
-        <p:spPr>
-          <a:xfrm>
-            <a:off x="1600200" y="914400"/>
-            <a:ext cx="1005840" cy="320040"/>
+          <p:cNvPr id="8" name="Rectangle 7"/>
+          <p:cNvSpPr/>
+          <p:nvPr/>
+        </p:nvSpPr>
+        <p:spPr>
+          <a:xfrm>
+            <a:off x="2039112" y="2441448"/>
+            <a:ext cx="36576" cy="100584"/>
+          </a:xfrm>
+          <a:prstGeom prst="rect">
+            <a:avLst/>
+          </a:prstGeom>
+          <a:solidFill>
+            <a:srgbClr val="FFBF00"/>
+          </a:solidFill>
+          <a:ln>
+            <a:noFill/>
+          </a:ln>
+        </p:spPr>
+        <p:style>
+          <a:lnRef idx="1">
+            <a:schemeClr val="accent1"/>
+          </a:lnRef>
+          <a:fillRef idx="3">
+            <a:schemeClr val="accent1"/>
+          </a:fillRef>
+          <a:effectRef idx="2">
+            <a:schemeClr val="accent1"/>
+          </a:effectRef>
+          <a:fontRef idx="minor">
+            <a:schemeClr val="lt1"/>
+          </a:fontRef>
+        </p:style>
+        <p:txBody>
+          <a:bodyPr rtlCol="0" anchor="ctr"/>
+          <a:lstStyle/>
+          <a:p>
+            <a:pPr algn="ctr"/>
+          </a:p>
+        </p:txBody>
+      </p:sp>
+      <p:sp>
+        <p:nvSpPr>
+          <p:cNvPr id="9" name="Rounded Rectangle 8"/>
+          <p:cNvSpPr/>
+          <p:nvPr/>
+        </p:nvSpPr>
+        <p:spPr>
+          <a:xfrm>
+            <a:off x="1993392" y="2523744"/>
+            <a:ext cx="128016" cy="128016"/>
+          </a:xfrm>
+          <a:prstGeom prst="roundRect">
+            <a:avLst/>
+          </a:prstGeom>
+          <a:solidFill>
+            <a:srgbClr val="FFBF00"/>
+          </a:solidFill>
+          <a:ln>
+            <a:noFill/>
+          </a:ln>
+        </p:spPr>
+        <p:style>
+          <a:lnRef idx="1">
+            <a:schemeClr val="accent1"/>
+          </a:lnRef>
+          <a:fillRef idx="3">
+            <a:schemeClr val="accent1"/>
+          </a:fillRef>
+          <a:effectRef idx="2">
+            <a:schemeClr val="accent1"/>
+          </a:effectRef>
+          <a:fontRef idx="minor">
+            <a:schemeClr val="lt1"/>
+          </a:fontRef>
+        </p:style>
+        <p:txBody>
+          <a:bodyPr rtlCol="0" anchor="ctr"/>
+          <a:lstStyle/>
+          <a:p>
+            <a:pPr algn="ctr"/>
+          </a:p>
+        </p:txBody>
+      </p:sp>
+      <p:sp>
+        <p:nvSpPr>
+          <p:cNvPr id="10" name="Rounded Rectangle 9"/>
+          <p:cNvSpPr/>
+          <p:nvPr/>
+        </p:nvSpPr>
+        <p:spPr>
+          <a:xfrm>
+            <a:off x="365760" y="2651760"/>
+            <a:ext cx="3383280" cy="658368"/>
           </a:xfrm>
           <a:prstGeom prst="roundRect">
             <a:avLst>
@@ -5372,6 +5850,61 @@
             </a:avLst>
           </a:prstGeom>
           <a:solidFill>
+            <a:srgbClr val="112D4A"/>
+          </a:solidFill>
+          <a:ln w="19050">
+            <a:solidFill>
+              <a:srgbClr val="FFBF00"/>
+            </a:solidFill>
+          </a:ln>
+        </p:spPr>
+        <p:style>
+          <a:lnRef idx="1">
+            <a:schemeClr val="accent1"/>
+          </a:lnRef>
+          <a:fillRef idx="3">
+            <a:schemeClr val="accent1"/>
+          </a:fillRef>
+          <a:effectRef idx="2">
+            <a:schemeClr val="accent1"/>
+          </a:effectRef>
+          <a:fontRef idx="minor">
+            <a:schemeClr val="lt1"/>
+          </a:fontRef>
+        </p:style>
+        <p:txBody>
+          <a:bodyPr rtlCol="0" anchor="ctr" wrap="square"/>
+          <a:lstStyle/>
+          <a:p>
+            <a:pPr algn="ctr"/>
+            <a:r>
+              <a:rPr sz="1200" b="0">
+                <a:solidFill>
+                  <a:srgbClr val="FFBF00"/>
+                </a:solidFill>
+                <a:latin typeface="Calibri"/>
+              </a:rPr>
+              <a:t>Wiadomość od
+użytkownika</a:t>
+            </a:r>
+          </a:p>
+        </p:txBody>
+      </p:sp>
+      <p:sp>
+        <p:nvSpPr>
+          <p:cNvPr id="11" name="Rectangle 10"/>
+          <p:cNvSpPr/>
+          <p:nvPr/>
+        </p:nvSpPr>
+        <p:spPr>
+          <a:xfrm>
+            <a:off x="2039112" y="3310128"/>
+            <a:ext cx="36576" cy="100584"/>
+          </a:xfrm>
+          <a:prstGeom prst="rect">
+            <a:avLst/>
+          </a:prstGeom>
+          <a:solidFill>
             <a:srgbClr val="FFBF00"/>
           </a:solidFill>
           <a:ln>
@@ -5393,32 +5926,66 @@
           </a:fontRef>
         </p:style>
         <p:txBody>
-          <a:bodyPr rtlCol="0" anchor="ctr" wrap="square"/>
-          <a:lstStyle/>
-          <a:p>
-            <a:pPr algn="ctr"/>
-            <a:r>
-              <a:rPr sz="1000" b="1">
-                <a:solidFill>
-                  <a:srgbClr val="0D1B2A"/>
-                </a:solidFill>
-                <a:latin typeface="Calibri"/>
-              </a:rPr>
-              <a:t>START</a:t>
-            </a:r>
-          </a:p>
-        </p:txBody>
-      </p:sp>
-      <p:sp>
-        <p:nvSpPr>
-          <p:cNvPr id="8" name="Rounded Rectangle 7"/>
-          <p:cNvSpPr/>
-          <p:nvPr/>
-        </p:nvSpPr>
-        <p:spPr>
-          <a:xfrm>
-            <a:off x="411480" y="2286000"/>
-            <a:ext cx="3383280" cy="685800"/>
+          <a:bodyPr rtlCol="0" anchor="ctr"/>
+          <a:lstStyle/>
+          <a:p>
+            <a:pPr algn="ctr"/>
+          </a:p>
+        </p:txBody>
+      </p:sp>
+      <p:sp>
+        <p:nvSpPr>
+          <p:cNvPr id="12" name="Rounded Rectangle 11"/>
+          <p:cNvSpPr/>
+          <p:nvPr/>
+        </p:nvSpPr>
+        <p:spPr>
+          <a:xfrm>
+            <a:off x="1993392" y="3392424"/>
+            <a:ext cx="128016" cy="128016"/>
+          </a:xfrm>
+          <a:prstGeom prst="roundRect">
+            <a:avLst/>
+          </a:prstGeom>
+          <a:solidFill>
+            <a:srgbClr val="FFBF00"/>
+          </a:solidFill>
+          <a:ln>
+            <a:noFill/>
+          </a:ln>
+        </p:spPr>
+        <p:style>
+          <a:lnRef idx="1">
+            <a:schemeClr val="accent1"/>
+          </a:lnRef>
+          <a:fillRef idx="3">
+            <a:schemeClr val="accent1"/>
+          </a:fillRef>
+          <a:effectRef idx="2">
+            <a:schemeClr val="accent1"/>
+          </a:effectRef>
+          <a:fontRef idx="minor">
+            <a:schemeClr val="lt1"/>
+          </a:fontRef>
+        </p:style>
+        <p:txBody>
+          <a:bodyPr rtlCol="0" anchor="ctr"/>
+          <a:lstStyle/>
+          <a:p>
+            <a:pPr algn="ctr"/>
+          </a:p>
+        </p:txBody>
+      </p:sp>
+      <p:sp>
+        <p:nvSpPr>
+          <p:cNvPr id="13" name="Rounded Rectangle 12"/>
+          <p:cNvSpPr/>
+          <p:nvPr/>
+        </p:nvSpPr>
+        <p:spPr>
+          <a:xfrm>
+            <a:off x="365760" y="3520440"/>
+            <a:ext cx="3383280" cy="658368"/>
           </a:xfrm>
           <a:prstGeom prst="roundRect">
             <a:avLst>
@@ -5460,22 +6027,108 @@
                 </a:solidFill>
                 <a:latin typeface="Calibri"/>
               </a:rPr>
-              <a:t>Wiadomość
-od użytkownika</a:t>
-            </a:r>
-          </a:p>
-        </p:txBody>
-      </p:sp>
-      <p:sp>
-        <p:nvSpPr>
-          <p:cNvPr id="9" name="Rounded Rectangle 8"/>
-          <p:cNvSpPr/>
-          <p:nvPr/>
-        </p:nvSpPr>
-        <p:spPr>
-          <a:xfrm>
-            <a:off x="411480" y="3200400"/>
-            <a:ext cx="3383280" cy="685800"/>
+              <a:t>jules_actions.sh
+przetwarza tekst</a:t>
+            </a:r>
+          </a:p>
+        </p:txBody>
+      </p:sp>
+      <p:sp>
+        <p:nvSpPr>
+          <p:cNvPr id="14" name="Rectangle 13"/>
+          <p:cNvSpPr/>
+          <p:nvPr/>
+        </p:nvSpPr>
+        <p:spPr>
+          <a:xfrm>
+            <a:off x="2039112" y="4178808"/>
+            <a:ext cx="36576" cy="100584"/>
+          </a:xfrm>
+          <a:prstGeom prst="rect">
+            <a:avLst/>
+          </a:prstGeom>
+          <a:solidFill>
+            <a:srgbClr val="FFBF00"/>
+          </a:solidFill>
+          <a:ln>
+            <a:noFill/>
+          </a:ln>
+        </p:spPr>
+        <p:style>
+          <a:lnRef idx="1">
+            <a:schemeClr val="accent1"/>
+          </a:lnRef>
+          <a:fillRef idx="3">
+            <a:schemeClr val="accent1"/>
+          </a:fillRef>
+          <a:effectRef idx="2">
+            <a:schemeClr val="accent1"/>
+          </a:effectRef>
+          <a:fontRef idx="minor">
+            <a:schemeClr val="lt1"/>
+          </a:fontRef>
+        </p:style>
+        <p:txBody>
+          <a:bodyPr rtlCol="0" anchor="ctr"/>
+          <a:lstStyle/>
+          <a:p>
+            <a:pPr algn="ctr"/>
+          </a:p>
+        </p:txBody>
+      </p:sp>
+      <p:sp>
+        <p:nvSpPr>
+          <p:cNvPr id="15" name="Rounded Rectangle 14"/>
+          <p:cNvSpPr/>
+          <p:nvPr/>
+        </p:nvSpPr>
+        <p:spPr>
+          <a:xfrm>
+            <a:off x="1993392" y="4261104"/>
+            <a:ext cx="128016" cy="128016"/>
+          </a:xfrm>
+          <a:prstGeom prst="roundRect">
+            <a:avLst/>
+          </a:prstGeom>
+          <a:solidFill>
+            <a:srgbClr val="FFBF00"/>
+          </a:solidFill>
+          <a:ln>
+            <a:noFill/>
+          </a:ln>
+        </p:spPr>
+        <p:style>
+          <a:lnRef idx="1">
+            <a:schemeClr val="accent1"/>
+          </a:lnRef>
+          <a:fillRef idx="3">
+            <a:schemeClr val="accent1"/>
+          </a:fillRef>
+          <a:effectRef idx="2">
+            <a:schemeClr val="accent1"/>
+          </a:effectRef>
+          <a:fontRef idx="minor">
+            <a:schemeClr val="lt1"/>
+          </a:fontRef>
+        </p:style>
+        <p:txBody>
+          <a:bodyPr rtlCol="0" anchor="ctr"/>
+          <a:lstStyle/>
+          <a:p>
+            <a:pPr algn="ctr"/>
+          </a:p>
+        </p:txBody>
+      </p:sp>
+      <p:sp>
+        <p:nvSpPr>
+          <p:cNvPr id="16" name="Rounded Rectangle 15"/>
+          <p:cNvSpPr/>
+          <p:nvPr/>
+        </p:nvSpPr>
+        <p:spPr>
+          <a:xfrm>
+            <a:off x="365760" y="4389120"/>
+            <a:ext cx="3383280" cy="658368"/>
           </a:xfrm>
           <a:prstGeom prst="roundRect">
             <a:avLst>
@@ -5517,22 +6170,108 @@
                 </a:solidFill>
                 <a:latin typeface="Calibri"/>
               </a:rPr>
-              <a:t>jules_actions.sh
-przetwarza tekst</a:t>
-            </a:r>
-          </a:p>
-        </p:txBody>
-      </p:sp>
-      <p:sp>
-        <p:nvSpPr>
-          <p:cNvPr id="10" name="Rounded Rectangle 9"/>
-          <p:cNvSpPr/>
-          <p:nvPr/>
-        </p:nvSpPr>
-        <p:spPr>
-          <a:xfrm>
-            <a:off x="411480" y="4114800"/>
-            <a:ext cx="3383280" cy="685800"/>
+              <a:t>Wywołanie
+Claude API</a:t>
+            </a:r>
+          </a:p>
+        </p:txBody>
+      </p:sp>
+      <p:sp>
+        <p:nvSpPr>
+          <p:cNvPr id="17" name="Rectangle 16"/>
+          <p:cNvSpPr/>
+          <p:nvPr/>
+        </p:nvSpPr>
+        <p:spPr>
+          <a:xfrm>
+            <a:off x="2039112" y="5047488"/>
+            <a:ext cx="36576" cy="100584"/>
+          </a:xfrm>
+          <a:prstGeom prst="rect">
+            <a:avLst/>
+          </a:prstGeom>
+          <a:solidFill>
+            <a:srgbClr val="FFBF00"/>
+          </a:solidFill>
+          <a:ln>
+            <a:noFill/>
+          </a:ln>
+        </p:spPr>
+        <p:style>
+          <a:lnRef idx="1">
+            <a:schemeClr val="accent1"/>
+          </a:lnRef>
+          <a:fillRef idx="3">
+            <a:schemeClr val="accent1"/>
+          </a:fillRef>
+          <a:effectRef idx="2">
+            <a:schemeClr val="accent1"/>
+          </a:effectRef>
+          <a:fontRef idx="minor">
+            <a:schemeClr val="lt1"/>
+          </a:fontRef>
+        </p:style>
+        <p:txBody>
+          <a:bodyPr rtlCol="0" anchor="ctr"/>
+          <a:lstStyle/>
+          <a:p>
+            <a:pPr algn="ctr"/>
+          </a:p>
+        </p:txBody>
+      </p:sp>
+      <p:sp>
+        <p:nvSpPr>
+          <p:cNvPr id="18" name="Rounded Rectangle 17"/>
+          <p:cNvSpPr/>
+          <p:nvPr/>
+        </p:nvSpPr>
+        <p:spPr>
+          <a:xfrm>
+            <a:off x="1993392" y="5129784"/>
+            <a:ext cx="128016" cy="128016"/>
+          </a:xfrm>
+          <a:prstGeom prst="roundRect">
+            <a:avLst/>
+          </a:prstGeom>
+          <a:solidFill>
+            <a:srgbClr val="FFBF00"/>
+          </a:solidFill>
+          <a:ln>
+            <a:noFill/>
+          </a:ln>
+        </p:spPr>
+        <p:style>
+          <a:lnRef idx="1">
+            <a:schemeClr val="accent1"/>
+          </a:lnRef>
+          <a:fillRef idx="3">
+            <a:schemeClr val="accent1"/>
+          </a:fillRef>
+          <a:effectRef idx="2">
+            <a:schemeClr val="accent1"/>
+          </a:effectRef>
+          <a:fontRef idx="minor">
+            <a:schemeClr val="lt1"/>
+          </a:fontRef>
+        </p:style>
+        <p:txBody>
+          <a:bodyPr rtlCol="0" anchor="ctr"/>
+          <a:lstStyle/>
+          <a:p>
+            <a:pPr algn="ctr"/>
+          </a:p>
+        </p:txBody>
+      </p:sp>
+      <p:sp>
+        <p:nvSpPr>
+          <p:cNvPr id="19" name="Rounded Rectangle 18"/>
+          <p:cNvSpPr/>
+          <p:nvPr/>
+        </p:nvSpPr>
+        <p:spPr>
+          <a:xfrm>
+            <a:off x="365760" y="5257800"/>
+            <a:ext cx="3383280" cy="658368"/>
           </a:xfrm>
           <a:prstGeom prst="roundRect">
             <a:avLst>
@@ -5544,7 +6283,7 @@
           </a:solidFill>
           <a:ln w="19050">
             <a:solidFill>
-              <a:srgbClr val="00E5FF"/>
+              <a:srgbClr val="00E676"/>
             </a:solidFill>
           </a:ln>
         </p:spPr>
@@ -5568,28 +6307,63 @@
           <a:p>
             <a:pPr algn="ctr"/>
             <a:r>
-              <a:rPr sz="1200" b="0">
-                <a:solidFill>
-                  <a:srgbClr val="00E5FF"/>
+              <a:rPr sz="1200" b="1">
+                <a:solidFill>
+                  <a:srgbClr val="00E676"/>
                 </a:solidFill>
                 <a:latin typeface="Calibri"/>
               </a:rPr>
-              <a:t>Wywołanie
-Claude API</a:t>
-            </a:r>
-          </a:p>
-        </p:txBody>
-      </p:sp>
-      <p:sp>
-        <p:nvSpPr>
-          <p:cNvPr id="11" name="Rounded Rectangle 10"/>
-          <p:cNvSpPr/>
-          <p:nvPr/>
-        </p:nvSpPr>
-        <p:spPr>
-          <a:xfrm>
-            <a:off x="411480" y="5029200"/>
-            <a:ext cx="3383280" cy="685800"/>
+              <a:t>Odpowiedź →
+Telegram</a:t>
+            </a:r>
+          </a:p>
+        </p:txBody>
+      </p:sp>
+      <p:sp>
+        <p:nvSpPr>
+          <p:cNvPr id="20" name="TextBox 19"/>
+          <p:cNvSpPr txBox="1"/>
+          <p:nvPr/>
+        </p:nvSpPr>
+        <p:spPr>
+          <a:xfrm>
+            <a:off x="4160520" y="1417320"/>
+            <a:ext cx="3383280" cy="320040"/>
+          </a:xfrm>
+          <a:prstGeom prst="rect">
+            <a:avLst/>
+          </a:prstGeom>
+          <a:noFill/>
+        </p:spPr>
+        <p:txBody>
+          <a:bodyPr wrap="square">
+            <a:spAutoFit/>
+          </a:bodyPr>
+          <a:lstStyle/>
+          <a:p>
+            <a:pPr algn="ctr"/>
+            <a:r>
+              <a:rPr sz="1200" b="1" i="0">
+                <a:solidFill>
+                  <a:srgbClr val="00E5FF"/>
+                </a:solidFill>
+                <a:latin typeface="Calibri"/>
+              </a:rPr>
+              <a:t>🔄  PR REVIEW  (cron 5 min)</a:t>
+            </a:r>
+          </a:p>
+        </p:txBody>
+      </p:sp>
+      <p:sp>
+        <p:nvSpPr>
+          <p:cNvPr id="21" name="Rounded Rectangle 20"/>
+          <p:cNvSpPr/>
+          <p:nvPr/>
+        </p:nvSpPr>
+        <p:spPr>
+          <a:xfrm>
+            <a:off x="4160520" y="1783080"/>
+            <a:ext cx="3383280" cy="658368"/>
           </a:xfrm>
           <a:prstGeom prst="roundRect">
             <a:avLst>
@@ -5601,7 +6375,7 @@
           </a:solidFill>
           <a:ln w="19050">
             <a:solidFill>
-              <a:srgbClr val="00E676"/>
+              <a:srgbClr val="00E5FF"/>
             </a:solidFill>
           </a:ln>
         </p:spPr>
@@ -5627,26 +6401,112 @@
             <a:r>
               <a:rPr sz="1200" b="1">
                 <a:solidFill>
-                  <a:srgbClr val="00E676"/>
+                  <a:srgbClr val="00E5FF"/>
                 </a:solidFill>
                 <a:latin typeface="Calibri"/>
               </a:rPr>
-              <a:t>Odpowiedź →
-Telegram</a:t>
-            </a:r>
-          </a:p>
-        </p:txBody>
-      </p:sp>
-      <p:sp>
-        <p:nvSpPr>
-          <p:cNvPr id="12" name="Rounded Rectangle 11"/>
-          <p:cNvSpPr/>
-          <p:nvPr/>
-        </p:nvSpPr>
-        <p:spPr>
-          <a:xfrm>
-            <a:off x="1600200" y="5715000"/>
-            <a:ext cx="1005840" cy="320040"/>
+              <a:t>jules_review.sh
+(cron co 5 min)</a:t>
+            </a:r>
+          </a:p>
+        </p:txBody>
+      </p:sp>
+      <p:sp>
+        <p:nvSpPr>
+          <p:cNvPr id="22" name="Rectangle 21"/>
+          <p:cNvSpPr/>
+          <p:nvPr/>
+        </p:nvSpPr>
+        <p:spPr>
+          <a:xfrm>
+            <a:off x="5833872" y="2441448"/>
+            <a:ext cx="36576" cy="100584"/>
+          </a:xfrm>
+          <a:prstGeom prst="rect">
+            <a:avLst/>
+          </a:prstGeom>
+          <a:solidFill>
+            <a:srgbClr val="00E5FF"/>
+          </a:solidFill>
+          <a:ln>
+            <a:noFill/>
+          </a:ln>
+        </p:spPr>
+        <p:style>
+          <a:lnRef idx="1">
+            <a:schemeClr val="accent1"/>
+          </a:lnRef>
+          <a:fillRef idx="3">
+            <a:schemeClr val="accent1"/>
+          </a:fillRef>
+          <a:effectRef idx="2">
+            <a:schemeClr val="accent1"/>
+          </a:effectRef>
+          <a:fontRef idx="minor">
+            <a:schemeClr val="lt1"/>
+          </a:fontRef>
+        </p:style>
+        <p:txBody>
+          <a:bodyPr rtlCol="0" anchor="ctr"/>
+          <a:lstStyle/>
+          <a:p>
+            <a:pPr algn="ctr"/>
+          </a:p>
+        </p:txBody>
+      </p:sp>
+      <p:sp>
+        <p:nvSpPr>
+          <p:cNvPr id="23" name="Rounded Rectangle 22"/>
+          <p:cNvSpPr/>
+          <p:nvPr/>
+        </p:nvSpPr>
+        <p:spPr>
+          <a:xfrm>
+            <a:off x="5788152" y="2523744"/>
+            <a:ext cx="128016" cy="128016"/>
+          </a:xfrm>
+          <a:prstGeom prst="roundRect">
+            <a:avLst/>
+          </a:prstGeom>
+          <a:solidFill>
+            <a:srgbClr val="00E5FF"/>
+          </a:solidFill>
+          <a:ln>
+            <a:noFill/>
+          </a:ln>
+        </p:spPr>
+        <p:style>
+          <a:lnRef idx="1">
+            <a:schemeClr val="accent1"/>
+          </a:lnRef>
+          <a:fillRef idx="3">
+            <a:schemeClr val="accent1"/>
+          </a:fillRef>
+          <a:effectRef idx="2">
+            <a:schemeClr val="accent1"/>
+          </a:effectRef>
+          <a:fontRef idx="minor">
+            <a:schemeClr val="lt1"/>
+          </a:fontRef>
+        </p:style>
+        <p:txBody>
+          <a:bodyPr rtlCol="0" anchor="ctr"/>
+          <a:lstStyle/>
+          <a:p>
+            <a:pPr algn="ctr"/>
+          </a:p>
+        </p:txBody>
+      </p:sp>
+      <p:sp>
+        <p:nvSpPr>
+          <p:cNvPr id="24" name="Rounded Rectangle 23"/>
+          <p:cNvSpPr/>
+          <p:nvPr/>
+        </p:nvSpPr>
+        <p:spPr>
+          <a:xfrm>
+            <a:off x="4160520" y="2651760"/>
+            <a:ext cx="3383280" cy="658368"/>
           </a:xfrm>
           <a:prstGeom prst="roundRect">
             <a:avLst>
@@ -5654,7 +6514,62 @@
             </a:avLst>
           </a:prstGeom>
           <a:solidFill>
-            <a:srgbClr val="00E676"/>
+            <a:srgbClr val="112D4A"/>
+          </a:solidFill>
+          <a:ln w="19050">
+            <a:solidFill>
+              <a:srgbClr val="00E5FF"/>
+            </a:solidFill>
+          </a:ln>
+        </p:spPr>
+        <p:style>
+          <a:lnRef idx="1">
+            <a:schemeClr val="accent1"/>
+          </a:lnRef>
+          <a:fillRef idx="3">
+            <a:schemeClr val="accent1"/>
+          </a:fillRef>
+          <a:effectRef idx="2">
+            <a:schemeClr val="accent1"/>
+          </a:effectRef>
+          <a:fontRef idx="minor">
+            <a:schemeClr val="lt1"/>
+          </a:fontRef>
+        </p:style>
+        <p:txBody>
+          <a:bodyPr rtlCol="0" anchor="ctr" wrap="square"/>
+          <a:lstStyle/>
+          <a:p>
+            <a:pPr algn="ctr"/>
+            <a:r>
+              <a:rPr sz="1200" b="0">
+                <a:solidFill>
+                  <a:srgbClr val="00E5FF"/>
+                </a:solidFill>
+                <a:latin typeface="Calibri"/>
+              </a:rPr>
+              <a:t>gh pr list
+— pobierz nowe PR-y</a:t>
+            </a:r>
+          </a:p>
+        </p:txBody>
+      </p:sp>
+      <p:sp>
+        <p:nvSpPr>
+          <p:cNvPr id="25" name="Rectangle 24"/>
+          <p:cNvSpPr/>
+          <p:nvPr/>
+        </p:nvSpPr>
+        <p:spPr>
+          <a:xfrm>
+            <a:off x="5833872" y="3310128"/>
+            <a:ext cx="36576" cy="100584"/>
+          </a:xfrm>
+          <a:prstGeom prst="rect">
+            <a:avLst/>
+          </a:prstGeom>
+          <a:solidFill>
+            <a:srgbClr val="00E5FF"/>
           </a:solidFill>
           <a:ln>
             <a:noFill/>
@@ -5675,172 +6590,66 @@
           </a:fontRef>
         </p:style>
         <p:txBody>
-          <a:bodyPr rtlCol="0" anchor="ctr" wrap="square"/>
-          <a:lstStyle/>
-          <a:p>
-            <a:pPr algn="ctr"/>
-            <a:r>
-              <a:rPr sz="1000" b="1">
-                <a:solidFill>
-                  <a:srgbClr val="0D1B2A"/>
-                </a:solidFill>
-                <a:latin typeface="Calibri"/>
-              </a:rPr>
-              <a:t>END</a:t>
-            </a:r>
-          </a:p>
-        </p:txBody>
-      </p:sp>
-      <p:cxnSp>
-        <p:nvCxnSpPr>
-          <p:cNvPr id="13" name="Connector 12"/>
-          <p:cNvCxnSpPr/>
-          <p:nvPr/>
-        </p:nvCxnSpPr>
-        <p:spPr>
-          <a:xfrm>
-            <a:off x="2103120.0" y="2057400"/>
-            <a:ext cx="0.0" cy="228600"/>
-          </a:xfrm>
-          <a:prstGeom prst="line">
-            <a:avLst/>
-          </a:prstGeom>
-          <a:ln w="25400">
-            <a:solidFill>
-              <a:srgbClr val="FFBF00"/>
-            </a:solidFill>
-          </a:ln>
-        </p:spPr>
-        <p:style>
-          <a:lnRef idx="2">
-            <a:schemeClr val="accent1"/>
-          </a:lnRef>
-          <a:fillRef idx="0">
-            <a:schemeClr val="accent1"/>
-          </a:fillRef>
-          <a:effectRef idx="1">
-            <a:schemeClr val="accent1"/>
-          </a:effectRef>
-          <a:fontRef idx="minor">
-            <a:schemeClr val="tx1"/>
-          </a:fontRef>
-        </p:style>
-      </p:cxnSp>
-      <p:cxnSp>
-        <p:nvCxnSpPr>
-          <p:cNvPr id="14" name="Connector 13"/>
-          <p:cNvCxnSpPr/>
-          <p:nvPr/>
-        </p:nvCxnSpPr>
-        <p:spPr>
-          <a:xfrm>
-            <a:off x="2103120.0" y="2971800"/>
-            <a:ext cx="0.0" cy="228600"/>
-          </a:xfrm>
-          <a:prstGeom prst="line">
-            <a:avLst/>
-          </a:prstGeom>
-          <a:ln w="25400">
-            <a:solidFill>
-              <a:srgbClr val="FFBF00"/>
-            </a:solidFill>
-          </a:ln>
-        </p:spPr>
-        <p:style>
-          <a:lnRef idx="2">
-            <a:schemeClr val="accent1"/>
-          </a:lnRef>
-          <a:fillRef idx="0">
-            <a:schemeClr val="accent1"/>
-          </a:fillRef>
-          <a:effectRef idx="1">
-            <a:schemeClr val="accent1"/>
-          </a:effectRef>
-          <a:fontRef idx="minor">
-            <a:schemeClr val="tx1"/>
-          </a:fontRef>
-        </p:style>
-      </p:cxnSp>
-      <p:cxnSp>
-        <p:nvCxnSpPr>
-          <p:cNvPr id="15" name="Connector 14"/>
-          <p:cNvCxnSpPr/>
-          <p:nvPr/>
-        </p:nvCxnSpPr>
-        <p:spPr>
-          <a:xfrm>
-            <a:off x="2103120.0" y="3886200"/>
-            <a:ext cx="0.0" cy="228600"/>
-          </a:xfrm>
-          <a:prstGeom prst="line">
-            <a:avLst/>
-          </a:prstGeom>
-          <a:ln w="25400">
-            <a:solidFill>
-              <a:srgbClr val="FFBF00"/>
-            </a:solidFill>
-          </a:ln>
-        </p:spPr>
-        <p:style>
-          <a:lnRef idx="2">
-            <a:schemeClr val="accent1"/>
-          </a:lnRef>
-          <a:fillRef idx="0">
-            <a:schemeClr val="accent1"/>
-          </a:fillRef>
-          <a:effectRef idx="1">
-            <a:schemeClr val="accent1"/>
-          </a:effectRef>
-          <a:fontRef idx="minor">
-            <a:schemeClr val="tx1"/>
-          </a:fontRef>
-        </p:style>
-      </p:cxnSp>
-      <p:cxnSp>
-        <p:nvCxnSpPr>
-          <p:cNvPr id="16" name="Connector 15"/>
-          <p:cNvCxnSpPr/>
-          <p:nvPr/>
-        </p:nvCxnSpPr>
-        <p:spPr>
-          <a:xfrm>
-            <a:off x="2103120.0" y="4800600"/>
-            <a:ext cx="0.0" cy="228600"/>
-          </a:xfrm>
-          <a:prstGeom prst="line">
-            <a:avLst/>
-          </a:prstGeom>
-          <a:ln w="25400">
-            <a:solidFill>
-              <a:srgbClr val="FFBF00"/>
-            </a:solidFill>
-          </a:ln>
-        </p:spPr>
-        <p:style>
-          <a:lnRef idx="2">
-            <a:schemeClr val="accent1"/>
-          </a:lnRef>
-          <a:fillRef idx="0">
-            <a:schemeClr val="accent1"/>
-          </a:fillRef>
-          <a:effectRef idx="1">
-            <a:schemeClr val="accent1"/>
-          </a:effectRef>
-          <a:fontRef idx="minor">
-            <a:schemeClr val="tx1"/>
-          </a:fontRef>
-        </p:style>
-      </p:cxnSp>
-      <p:sp>
-        <p:nvSpPr>
-          <p:cNvPr id="17" name="Rounded Rectangle 16"/>
-          <p:cNvSpPr/>
-          <p:nvPr/>
-        </p:nvSpPr>
-        <p:spPr>
-          <a:xfrm>
-            <a:off x="4160520" y="1371600"/>
-            <a:ext cx="3383280" cy="685800"/>
+          <a:bodyPr rtlCol="0" anchor="ctr"/>
+          <a:lstStyle/>
+          <a:p>
+            <a:pPr algn="ctr"/>
+          </a:p>
+        </p:txBody>
+      </p:sp>
+      <p:sp>
+        <p:nvSpPr>
+          <p:cNvPr id="26" name="Rounded Rectangle 25"/>
+          <p:cNvSpPr/>
+          <p:nvPr/>
+        </p:nvSpPr>
+        <p:spPr>
+          <a:xfrm>
+            <a:off x="5788152" y="3392424"/>
+            <a:ext cx="128016" cy="128016"/>
+          </a:xfrm>
+          <a:prstGeom prst="roundRect">
+            <a:avLst/>
+          </a:prstGeom>
+          <a:solidFill>
+            <a:srgbClr val="00E5FF"/>
+          </a:solidFill>
+          <a:ln>
+            <a:noFill/>
+          </a:ln>
+        </p:spPr>
+        <p:style>
+          <a:lnRef idx="1">
+            <a:schemeClr val="accent1"/>
+          </a:lnRef>
+          <a:fillRef idx="3">
+            <a:schemeClr val="accent1"/>
+          </a:fillRef>
+          <a:effectRef idx="2">
+            <a:schemeClr val="accent1"/>
+          </a:effectRef>
+          <a:fontRef idx="minor">
+            <a:schemeClr val="lt1"/>
+          </a:fontRef>
+        </p:style>
+        <p:txBody>
+          <a:bodyPr rtlCol="0" anchor="ctr"/>
+          <a:lstStyle/>
+          <a:p>
+            <a:pPr algn="ctr"/>
+          </a:p>
+        </p:txBody>
+      </p:sp>
+      <p:sp>
+        <p:nvSpPr>
+          <p:cNvPr id="27" name="Rounded Rectangle 26"/>
+          <p:cNvSpPr/>
+          <p:nvPr/>
+        </p:nvSpPr>
+        <p:spPr>
+          <a:xfrm>
+            <a:off x="4160520" y="3520440"/>
+            <a:ext cx="3383280" cy="658368"/>
           </a:xfrm>
           <a:prstGeom prst="roundRect">
             <a:avLst>
@@ -5876,28 +6685,114 @@
           <a:p>
             <a:pPr algn="ctr"/>
             <a:r>
-              <a:rPr sz="1200" b="1">
+              <a:rPr sz="1200" b="0">
                 <a:solidFill>
                   <a:srgbClr val="00E5FF"/>
                 </a:solidFill>
                 <a:latin typeface="Calibri"/>
               </a:rPr>
-              <a:t>jules_review.sh
-(cron co 5 min)</a:t>
-            </a:r>
-          </a:p>
-        </p:txBody>
-      </p:sp>
-      <p:sp>
-        <p:nvSpPr>
-          <p:cNvPr id="18" name="Rounded Rectangle 17"/>
-          <p:cNvSpPr/>
-          <p:nvPr/>
-        </p:nvSpPr>
-        <p:spPr>
-          <a:xfrm>
-            <a:off x="5349240" y="914400"/>
-            <a:ext cx="1005840" cy="320040"/>
+              <a:t>Claude analizuje
+diff kodu</a:t>
+            </a:r>
+          </a:p>
+        </p:txBody>
+      </p:sp>
+      <p:sp>
+        <p:nvSpPr>
+          <p:cNvPr id="28" name="Rectangle 27"/>
+          <p:cNvSpPr/>
+          <p:nvPr/>
+        </p:nvSpPr>
+        <p:spPr>
+          <a:xfrm>
+            <a:off x="5833872" y="4178808"/>
+            <a:ext cx="36576" cy="100584"/>
+          </a:xfrm>
+          <a:prstGeom prst="rect">
+            <a:avLst/>
+          </a:prstGeom>
+          <a:solidFill>
+            <a:srgbClr val="00E5FF"/>
+          </a:solidFill>
+          <a:ln>
+            <a:noFill/>
+          </a:ln>
+        </p:spPr>
+        <p:style>
+          <a:lnRef idx="1">
+            <a:schemeClr val="accent1"/>
+          </a:lnRef>
+          <a:fillRef idx="3">
+            <a:schemeClr val="accent1"/>
+          </a:fillRef>
+          <a:effectRef idx="2">
+            <a:schemeClr val="accent1"/>
+          </a:effectRef>
+          <a:fontRef idx="minor">
+            <a:schemeClr val="lt1"/>
+          </a:fontRef>
+        </p:style>
+        <p:txBody>
+          <a:bodyPr rtlCol="0" anchor="ctr"/>
+          <a:lstStyle/>
+          <a:p>
+            <a:pPr algn="ctr"/>
+          </a:p>
+        </p:txBody>
+      </p:sp>
+      <p:sp>
+        <p:nvSpPr>
+          <p:cNvPr id="29" name="Rounded Rectangle 28"/>
+          <p:cNvSpPr/>
+          <p:nvPr/>
+        </p:nvSpPr>
+        <p:spPr>
+          <a:xfrm>
+            <a:off x="5788152" y="4261104"/>
+            <a:ext cx="128016" cy="128016"/>
+          </a:xfrm>
+          <a:prstGeom prst="roundRect">
+            <a:avLst/>
+          </a:prstGeom>
+          <a:solidFill>
+            <a:srgbClr val="00E5FF"/>
+          </a:solidFill>
+          <a:ln>
+            <a:noFill/>
+          </a:ln>
+        </p:spPr>
+        <p:style>
+          <a:lnRef idx="1">
+            <a:schemeClr val="accent1"/>
+          </a:lnRef>
+          <a:fillRef idx="3">
+            <a:schemeClr val="accent1"/>
+          </a:fillRef>
+          <a:effectRef idx="2">
+            <a:schemeClr val="accent1"/>
+          </a:effectRef>
+          <a:fontRef idx="minor">
+            <a:schemeClr val="lt1"/>
+          </a:fontRef>
+        </p:style>
+        <p:txBody>
+          <a:bodyPr rtlCol="0" anchor="ctr"/>
+          <a:lstStyle/>
+          <a:p>
+            <a:pPr algn="ctr"/>
+          </a:p>
+        </p:txBody>
+      </p:sp>
+      <p:sp>
+        <p:nvSpPr>
+          <p:cNvPr id="30" name="Rounded Rectangle 29"/>
+          <p:cNvSpPr/>
+          <p:nvPr/>
+        </p:nvSpPr>
+        <p:spPr>
+          <a:xfrm>
+            <a:off x="4160520" y="4389120"/>
+            <a:ext cx="3383280" cy="658368"/>
           </a:xfrm>
           <a:prstGeom prst="roundRect">
             <a:avLst>
@@ -5905,6 +6800,61 @@
             </a:avLst>
           </a:prstGeom>
           <a:solidFill>
+            <a:srgbClr val="112D4A"/>
+          </a:solidFill>
+          <a:ln w="19050">
+            <a:solidFill>
+              <a:srgbClr val="00E5FF"/>
+            </a:solidFill>
+          </a:ln>
+        </p:spPr>
+        <p:style>
+          <a:lnRef idx="1">
+            <a:schemeClr val="accent1"/>
+          </a:lnRef>
+          <a:fillRef idx="3">
+            <a:schemeClr val="accent1"/>
+          </a:fillRef>
+          <a:effectRef idx="2">
+            <a:schemeClr val="accent1"/>
+          </a:effectRef>
+          <a:fontRef idx="minor">
+            <a:schemeClr val="lt1"/>
+          </a:fontRef>
+        </p:style>
+        <p:txBody>
+          <a:bodyPr rtlCol="0" anchor="ctr" wrap="square"/>
+          <a:lstStyle/>
+          <a:p>
+            <a:pPr algn="ctr"/>
+            <a:r>
+              <a:rPr sz="1200" b="0">
+                <a:solidFill>
+                  <a:srgbClr val="00E5FF"/>
+                </a:solidFill>
+                <a:latin typeface="Calibri"/>
+              </a:rPr>
+              <a:t>gh pr review
+— komentarz GitHub</a:t>
+            </a:r>
+          </a:p>
+        </p:txBody>
+      </p:sp>
+      <p:sp>
+        <p:nvSpPr>
+          <p:cNvPr id="31" name="Rectangle 30"/>
+          <p:cNvSpPr/>
+          <p:nvPr/>
+        </p:nvSpPr>
+        <p:spPr>
+          <a:xfrm>
+            <a:off x="5833872" y="5047488"/>
+            <a:ext cx="36576" cy="100584"/>
+          </a:xfrm>
+          <a:prstGeom prst="rect">
+            <a:avLst/>
+          </a:prstGeom>
+          <a:solidFill>
             <a:srgbClr val="00E5FF"/>
           </a:solidFill>
           <a:ln>
@@ -5926,32 +6876,66 @@
           </a:fontRef>
         </p:style>
         <p:txBody>
-          <a:bodyPr rtlCol="0" anchor="ctr" wrap="square"/>
-          <a:lstStyle/>
-          <a:p>
-            <a:pPr algn="ctr"/>
-            <a:r>
-              <a:rPr sz="1000" b="1">
-                <a:solidFill>
-                  <a:srgbClr val="0D1B2A"/>
-                </a:solidFill>
-                <a:latin typeface="Calibri"/>
-              </a:rPr>
-              <a:t>CRON</a:t>
-            </a:r>
-          </a:p>
-        </p:txBody>
-      </p:sp>
-      <p:sp>
-        <p:nvSpPr>
-          <p:cNvPr id="19" name="Rounded Rectangle 18"/>
-          <p:cNvSpPr/>
-          <p:nvPr/>
-        </p:nvSpPr>
-        <p:spPr>
-          <a:xfrm>
-            <a:off x="4160520" y="2286000"/>
-            <a:ext cx="3383280" cy="685800"/>
+          <a:bodyPr rtlCol="0" anchor="ctr"/>
+          <a:lstStyle/>
+          <a:p>
+            <a:pPr algn="ctr"/>
+          </a:p>
+        </p:txBody>
+      </p:sp>
+      <p:sp>
+        <p:nvSpPr>
+          <p:cNvPr id="32" name="Rounded Rectangle 31"/>
+          <p:cNvSpPr/>
+          <p:nvPr/>
+        </p:nvSpPr>
+        <p:spPr>
+          <a:xfrm>
+            <a:off x="5788152" y="5129784"/>
+            <a:ext cx="128016" cy="128016"/>
+          </a:xfrm>
+          <a:prstGeom prst="roundRect">
+            <a:avLst/>
+          </a:prstGeom>
+          <a:solidFill>
+            <a:srgbClr val="00E5FF"/>
+          </a:solidFill>
+          <a:ln>
+            <a:noFill/>
+          </a:ln>
+        </p:spPr>
+        <p:style>
+          <a:lnRef idx="1">
+            <a:schemeClr val="accent1"/>
+          </a:lnRef>
+          <a:fillRef idx="3">
+            <a:schemeClr val="accent1"/>
+          </a:fillRef>
+          <a:effectRef idx="2">
+            <a:schemeClr val="accent1"/>
+          </a:effectRef>
+          <a:fontRef idx="minor">
+            <a:schemeClr val="lt1"/>
+          </a:fontRef>
+        </p:style>
+        <p:txBody>
+          <a:bodyPr rtlCol="0" anchor="ctr"/>
+          <a:lstStyle/>
+          <a:p>
+            <a:pPr algn="ctr"/>
+          </a:p>
+        </p:txBody>
+      </p:sp>
+      <p:sp>
+        <p:nvSpPr>
+          <p:cNvPr id="33" name="Rounded Rectangle 32"/>
+          <p:cNvSpPr/>
+          <p:nvPr/>
+        </p:nvSpPr>
+        <p:spPr>
+          <a:xfrm>
+            <a:off x="4160520" y="5257800"/>
+            <a:ext cx="3383280" cy="658368"/>
           </a:xfrm>
           <a:prstGeom prst="roundRect">
             <a:avLst>
@@ -5963,7 +6947,7 @@
           </a:solidFill>
           <a:ln w="19050">
             <a:solidFill>
-              <a:srgbClr val="00E5FF"/>
+              <a:srgbClr val="00E676"/>
             </a:solidFill>
           </a:ln>
         </p:spPr>
@@ -5987,28 +6971,63 @@
           <a:p>
             <a:pPr algn="ctr"/>
             <a:r>
-              <a:rPr sz="1200" b="0">
-                <a:solidFill>
-                  <a:srgbClr val="00E5FF"/>
+              <a:rPr sz="1200" b="1">
+                <a:solidFill>
+                  <a:srgbClr val="00E676"/>
                 </a:solidFill>
                 <a:latin typeface="Calibri"/>
               </a:rPr>
-              <a:t>gh pr list
-— pobierz nowe PR-y</a:t>
-            </a:r>
-          </a:p>
-        </p:txBody>
-      </p:sp>
-      <p:sp>
-        <p:nvSpPr>
-          <p:cNvPr id="20" name="Rounded Rectangle 19"/>
-          <p:cNvSpPr/>
-          <p:nvPr/>
-        </p:nvSpPr>
-        <p:spPr>
-          <a:xfrm>
-            <a:off x="4160520" y="3200400"/>
-            <a:ext cx="3383280" cy="685800"/>
+              <a:t>Powiadomienie
+Telegram</a:t>
+            </a:r>
+          </a:p>
+        </p:txBody>
+      </p:sp>
+      <p:sp>
+        <p:nvSpPr>
+          <p:cNvPr id="34" name="TextBox 33"/>
+          <p:cNvSpPr txBox="1"/>
+          <p:nvPr/>
+        </p:nvSpPr>
+        <p:spPr>
+          <a:xfrm>
+            <a:off x="7955279" y="1417320"/>
+            <a:ext cx="3383280" cy="320040"/>
+          </a:xfrm>
+          <a:prstGeom prst="rect">
+            <a:avLst/>
+          </a:prstGeom>
+          <a:noFill/>
+        </p:spPr>
+        <p:txBody>
+          <a:bodyPr wrap="square">
+            <a:spAutoFit/>
+          </a:bodyPr>
+          <a:lstStyle/>
+          <a:p>
+            <a:pPr algn="ctr"/>
+            <a:r>
+              <a:rPr sz="1200" b="1" i="0">
+                <a:solidFill>
+                  <a:srgbClr val="FF4545"/>
+                </a:solidFill>
+                <a:latin typeface="Calibri"/>
+              </a:rPr>
+              <a:t>🔧  GITHUB ACTIONS</a:t>
+            </a:r>
+          </a:p>
+        </p:txBody>
+      </p:sp>
+      <p:sp>
+        <p:nvSpPr>
+          <p:cNvPr id="35" name="Rounded Rectangle 34"/>
+          <p:cNvSpPr/>
+          <p:nvPr/>
+        </p:nvSpPr>
+        <p:spPr>
+          <a:xfrm>
+            <a:off x="7955279" y="1783080"/>
+            <a:ext cx="3383280" cy="658368"/>
           </a:xfrm>
           <a:prstGeom prst="roundRect">
             <a:avLst>
@@ -6020,7 +7039,7 @@
           </a:solidFill>
           <a:ln w="19050">
             <a:solidFill>
-              <a:srgbClr val="00E5FF"/>
+              <a:srgbClr val="FF4545"/>
             </a:solidFill>
           </a:ln>
         </p:spPr>
@@ -6044,28 +7063,114 @@
           <a:p>
             <a:pPr algn="ctr"/>
             <a:r>
-              <a:rPr sz="1200" b="0">
-                <a:solidFill>
-                  <a:srgbClr val="00E5FF"/>
+              <a:rPr sz="1200" b="1">
+                <a:solidFill>
+                  <a:srgbClr val="FF4545"/>
                 </a:solidFill>
                 <a:latin typeface="Calibri"/>
               </a:rPr>
-              <a:t>Claude analizuje
-diff kodu</a:t>
-            </a:r>
-          </a:p>
-        </p:txBody>
-      </p:sp>
-      <p:sp>
-        <p:nvSpPr>
-          <p:cNvPr id="21" name="Rounded Rectangle 20"/>
-          <p:cNvSpPr/>
-          <p:nvPr/>
-        </p:nvSpPr>
-        <p:spPr>
-          <a:xfrm>
-            <a:off x="4160520" y="4114800"/>
-            <a:ext cx="3383280" cy="685800"/>
+              <a:t>Komenda /deploy
+lub /status</a:t>
+            </a:r>
+          </a:p>
+        </p:txBody>
+      </p:sp>
+      <p:sp>
+        <p:nvSpPr>
+          <p:cNvPr id="36" name="Rectangle 35"/>
+          <p:cNvSpPr/>
+          <p:nvPr/>
+        </p:nvSpPr>
+        <p:spPr>
+          <a:xfrm>
+            <a:off x="9628631" y="2441448"/>
+            <a:ext cx="36576" cy="100584"/>
+          </a:xfrm>
+          <a:prstGeom prst="rect">
+            <a:avLst/>
+          </a:prstGeom>
+          <a:solidFill>
+            <a:srgbClr val="FF4545"/>
+          </a:solidFill>
+          <a:ln>
+            <a:noFill/>
+          </a:ln>
+        </p:spPr>
+        <p:style>
+          <a:lnRef idx="1">
+            <a:schemeClr val="accent1"/>
+          </a:lnRef>
+          <a:fillRef idx="3">
+            <a:schemeClr val="accent1"/>
+          </a:fillRef>
+          <a:effectRef idx="2">
+            <a:schemeClr val="accent1"/>
+          </a:effectRef>
+          <a:fontRef idx="minor">
+            <a:schemeClr val="lt1"/>
+          </a:fontRef>
+        </p:style>
+        <p:txBody>
+          <a:bodyPr rtlCol="0" anchor="ctr"/>
+          <a:lstStyle/>
+          <a:p>
+            <a:pPr algn="ctr"/>
+          </a:p>
+        </p:txBody>
+      </p:sp>
+      <p:sp>
+        <p:nvSpPr>
+          <p:cNvPr id="37" name="Rounded Rectangle 36"/>
+          <p:cNvSpPr/>
+          <p:nvPr/>
+        </p:nvSpPr>
+        <p:spPr>
+          <a:xfrm>
+            <a:off x="9582911" y="2523744"/>
+            <a:ext cx="128016" cy="128016"/>
+          </a:xfrm>
+          <a:prstGeom prst="roundRect">
+            <a:avLst/>
+          </a:prstGeom>
+          <a:solidFill>
+            <a:srgbClr val="FF4545"/>
+          </a:solidFill>
+          <a:ln>
+            <a:noFill/>
+          </a:ln>
+        </p:spPr>
+        <p:style>
+          <a:lnRef idx="1">
+            <a:schemeClr val="accent1"/>
+          </a:lnRef>
+          <a:fillRef idx="3">
+            <a:schemeClr val="accent1"/>
+          </a:fillRef>
+          <a:effectRef idx="2">
+            <a:schemeClr val="accent1"/>
+          </a:effectRef>
+          <a:fontRef idx="minor">
+            <a:schemeClr val="lt1"/>
+          </a:fontRef>
+        </p:style>
+        <p:txBody>
+          <a:bodyPr rtlCol="0" anchor="ctr"/>
+          <a:lstStyle/>
+          <a:p>
+            <a:pPr algn="ctr"/>
+          </a:p>
+        </p:txBody>
+      </p:sp>
+      <p:sp>
+        <p:nvSpPr>
+          <p:cNvPr id="38" name="Rounded Rectangle 37"/>
+          <p:cNvSpPr/>
+          <p:nvPr/>
+        </p:nvSpPr>
+        <p:spPr>
+          <a:xfrm>
+            <a:off x="7955279" y="2651760"/>
+            <a:ext cx="3383280" cy="658368"/>
           </a:xfrm>
           <a:prstGeom prst="roundRect">
             <a:avLst>
@@ -6077,7 +7182,7 @@
           </a:solidFill>
           <a:ln w="19050">
             <a:solidFill>
-              <a:srgbClr val="00E5FF"/>
+              <a:srgbClr val="FF4545"/>
             </a:solidFill>
           </a:ln>
         </p:spPr>
@@ -6103,26 +7208,112 @@
             <a:r>
               <a:rPr sz="1200" b="0">
                 <a:solidFill>
-                  <a:srgbClr val="00E5FF"/>
+                  <a:srgbClr val="FF4545"/>
                 </a:solidFill>
                 <a:latin typeface="Calibri"/>
               </a:rPr>
-              <a:t>gh pr review
-— komentarz na GitHub</a:t>
-            </a:r>
-          </a:p>
-        </p:txBody>
-      </p:sp>
-      <p:sp>
-        <p:nvSpPr>
-          <p:cNvPr id="22" name="Rounded Rectangle 21"/>
-          <p:cNvSpPr/>
-          <p:nvPr/>
-        </p:nvSpPr>
-        <p:spPr>
-          <a:xfrm>
-            <a:off x="4160520" y="5029200"/>
-            <a:ext cx="3383280" cy="685800"/>
+              <a:t>Parsowanie
+komendy</a:t>
+            </a:r>
+          </a:p>
+        </p:txBody>
+      </p:sp>
+      <p:sp>
+        <p:nvSpPr>
+          <p:cNvPr id="39" name="Rectangle 38"/>
+          <p:cNvSpPr/>
+          <p:nvPr/>
+        </p:nvSpPr>
+        <p:spPr>
+          <a:xfrm>
+            <a:off x="9628631" y="3310128"/>
+            <a:ext cx="36576" cy="100584"/>
+          </a:xfrm>
+          <a:prstGeom prst="rect">
+            <a:avLst/>
+          </a:prstGeom>
+          <a:solidFill>
+            <a:srgbClr val="FF4545"/>
+          </a:solidFill>
+          <a:ln>
+            <a:noFill/>
+          </a:ln>
+        </p:spPr>
+        <p:style>
+          <a:lnRef idx="1">
+            <a:schemeClr val="accent1"/>
+          </a:lnRef>
+          <a:fillRef idx="3">
+            <a:schemeClr val="accent1"/>
+          </a:fillRef>
+          <a:effectRef idx="2">
+            <a:schemeClr val="accent1"/>
+          </a:effectRef>
+          <a:fontRef idx="minor">
+            <a:schemeClr val="lt1"/>
+          </a:fontRef>
+        </p:style>
+        <p:txBody>
+          <a:bodyPr rtlCol="0" anchor="ctr"/>
+          <a:lstStyle/>
+          <a:p>
+            <a:pPr algn="ctr"/>
+          </a:p>
+        </p:txBody>
+      </p:sp>
+      <p:sp>
+        <p:nvSpPr>
+          <p:cNvPr id="40" name="Rounded Rectangle 39"/>
+          <p:cNvSpPr/>
+          <p:nvPr/>
+        </p:nvSpPr>
+        <p:spPr>
+          <a:xfrm>
+            <a:off x="9582911" y="3392424"/>
+            <a:ext cx="128016" cy="128016"/>
+          </a:xfrm>
+          <a:prstGeom prst="roundRect">
+            <a:avLst/>
+          </a:prstGeom>
+          <a:solidFill>
+            <a:srgbClr val="FF4545"/>
+          </a:solidFill>
+          <a:ln>
+            <a:noFill/>
+          </a:ln>
+        </p:spPr>
+        <p:style>
+          <a:lnRef idx="1">
+            <a:schemeClr val="accent1"/>
+          </a:lnRef>
+          <a:fillRef idx="3">
+            <a:schemeClr val="accent1"/>
+          </a:fillRef>
+          <a:effectRef idx="2">
+            <a:schemeClr val="accent1"/>
+          </a:effectRef>
+          <a:fontRef idx="minor">
+            <a:schemeClr val="lt1"/>
+          </a:fontRef>
+        </p:style>
+        <p:txBody>
+          <a:bodyPr rtlCol="0" anchor="ctr"/>
+          <a:lstStyle/>
+          <a:p>
+            <a:pPr algn="ctr"/>
+          </a:p>
+        </p:txBody>
+      </p:sp>
+      <p:sp>
+        <p:nvSpPr>
+          <p:cNvPr id="41" name="Rounded Rectangle 40"/>
+          <p:cNvSpPr/>
+          <p:nvPr/>
+        </p:nvSpPr>
+        <p:spPr>
+          <a:xfrm>
+            <a:off x="7955279" y="3520440"/>
+            <a:ext cx="3383280" cy="658368"/>
           </a:xfrm>
           <a:prstGeom prst="roundRect">
             <a:avLst>
@@ -6134,7 +7325,7 @@
           </a:solidFill>
           <a:ln w="19050">
             <a:solidFill>
-              <a:srgbClr val="00E676"/>
+              <a:srgbClr val="FF4545"/>
             </a:solidFill>
           </a:ln>
         </p:spPr>
@@ -6158,168 +7349,114 @@
           <a:p>
             <a:pPr algn="ctr"/>
             <a:r>
-              <a:rPr sz="1200" b="1">
-                <a:solidFill>
-                  <a:srgbClr val="00E676"/>
+              <a:rPr sz="1200" b="0">
+                <a:solidFill>
+                  <a:srgbClr val="FF4545"/>
                 </a:solidFill>
                 <a:latin typeface="Calibri"/>
               </a:rPr>
-              <a:t>Powiadomienie
-Telegram</a:t>
-            </a:r>
-          </a:p>
-        </p:txBody>
-      </p:sp>
-      <p:cxnSp>
-        <p:nvCxnSpPr>
-          <p:cNvPr id="23" name="Connector 22"/>
-          <p:cNvCxnSpPr/>
-          <p:nvPr/>
-        </p:nvCxnSpPr>
-        <p:spPr>
-          <a:xfrm>
-            <a:off x="5852160.0" y="2057400"/>
-            <a:ext cx="0.0" cy="228600"/>
-          </a:xfrm>
-          <a:prstGeom prst="line">
-            <a:avLst/>
-          </a:prstGeom>
-          <a:ln w="25400">
-            <a:solidFill>
-              <a:srgbClr val="00E5FF"/>
-            </a:solidFill>
-          </a:ln>
-        </p:spPr>
-        <p:style>
-          <a:lnRef idx="2">
-            <a:schemeClr val="accent1"/>
-          </a:lnRef>
-          <a:fillRef idx="0">
-            <a:schemeClr val="accent1"/>
-          </a:fillRef>
-          <a:effectRef idx="1">
-            <a:schemeClr val="accent1"/>
-          </a:effectRef>
-          <a:fontRef idx="minor">
-            <a:schemeClr val="tx1"/>
-          </a:fontRef>
-        </p:style>
-      </p:cxnSp>
-      <p:cxnSp>
-        <p:nvCxnSpPr>
-          <p:cNvPr id="24" name="Connector 23"/>
-          <p:cNvCxnSpPr/>
-          <p:nvPr/>
-        </p:nvCxnSpPr>
-        <p:spPr>
-          <a:xfrm>
-            <a:off x="5852160.0" y="2971800"/>
-            <a:ext cx="0.0" cy="228600"/>
-          </a:xfrm>
-          <a:prstGeom prst="line">
-            <a:avLst/>
-          </a:prstGeom>
-          <a:ln w="25400">
-            <a:solidFill>
-              <a:srgbClr val="00E5FF"/>
-            </a:solidFill>
-          </a:ln>
-        </p:spPr>
-        <p:style>
-          <a:lnRef idx="2">
-            <a:schemeClr val="accent1"/>
-          </a:lnRef>
-          <a:fillRef idx="0">
-            <a:schemeClr val="accent1"/>
-          </a:fillRef>
-          <a:effectRef idx="1">
-            <a:schemeClr val="accent1"/>
-          </a:effectRef>
-          <a:fontRef idx="minor">
-            <a:schemeClr val="tx1"/>
-          </a:fontRef>
-        </p:style>
-      </p:cxnSp>
-      <p:cxnSp>
-        <p:nvCxnSpPr>
-          <p:cNvPr id="25" name="Connector 24"/>
-          <p:cNvCxnSpPr/>
-          <p:nvPr/>
-        </p:nvCxnSpPr>
-        <p:spPr>
-          <a:xfrm>
-            <a:off x="5852160.0" y="3886200"/>
-            <a:ext cx="0.0" cy="228600"/>
-          </a:xfrm>
-          <a:prstGeom prst="line">
-            <a:avLst/>
-          </a:prstGeom>
-          <a:ln w="25400">
-            <a:solidFill>
-              <a:srgbClr val="00E5FF"/>
-            </a:solidFill>
-          </a:ln>
-        </p:spPr>
-        <p:style>
-          <a:lnRef idx="2">
-            <a:schemeClr val="accent1"/>
-          </a:lnRef>
-          <a:fillRef idx="0">
-            <a:schemeClr val="accent1"/>
-          </a:fillRef>
-          <a:effectRef idx="1">
-            <a:schemeClr val="accent1"/>
-          </a:effectRef>
-          <a:fontRef idx="minor">
-            <a:schemeClr val="tx1"/>
-          </a:fontRef>
-        </p:style>
-      </p:cxnSp>
-      <p:cxnSp>
-        <p:nvCxnSpPr>
-          <p:cNvPr id="26" name="Connector 25"/>
-          <p:cNvCxnSpPr/>
-          <p:nvPr/>
-        </p:nvCxnSpPr>
-        <p:spPr>
-          <a:xfrm>
-            <a:off x="5852160.0" y="4800600"/>
-            <a:ext cx="0.0" cy="228600"/>
-          </a:xfrm>
-          <a:prstGeom prst="line">
-            <a:avLst/>
-          </a:prstGeom>
-          <a:ln w="25400">
-            <a:solidFill>
-              <a:srgbClr val="00E5FF"/>
-            </a:solidFill>
-          </a:ln>
-        </p:spPr>
-        <p:style>
-          <a:lnRef idx="2">
-            <a:schemeClr val="accent1"/>
-          </a:lnRef>
-          <a:fillRef idx="0">
-            <a:schemeClr val="accent1"/>
-          </a:fillRef>
-          <a:effectRef idx="1">
-            <a:schemeClr val="accent1"/>
-          </a:effectRef>
-          <a:fontRef idx="minor">
-            <a:schemeClr val="tx1"/>
-          </a:fontRef>
-        </p:style>
-      </p:cxnSp>
-      <p:sp>
-        <p:nvSpPr>
-          <p:cNvPr id="27" name="Rounded Rectangle 26"/>
-          <p:cNvSpPr/>
-          <p:nvPr/>
-        </p:nvSpPr>
-        <p:spPr>
-          <a:xfrm>
-            <a:off x="7909560" y="1371600"/>
-            <a:ext cx="3383280" cy="685800"/>
+              <a:t>gh run / gh issue
+/ gh pr</a:t>
+            </a:r>
+          </a:p>
+        </p:txBody>
+      </p:sp>
+      <p:sp>
+        <p:nvSpPr>
+          <p:cNvPr id="42" name="Rectangle 41"/>
+          <p:cNvSpPr/>
+          <p:nvPr/>
+        </p:nvSpPr>
+        <p:spPr>
+          <a:xfrm>
+            <a:off x="9628631" y="4178808"/>
+            <a:ext cx="36576" cy="100584"/>
+          </a:xfrm>
+          <a:prstGeom prst="rect">
+            <a:avLst/>
+          </a:prstGeom>
+          <a:solidFill>
+            <a:srgbClr val="FF4545"/>
+          </a:solidFill>
+          <a:ln>
+            <a:noFill/>
+          </a:ln>
+        </p:spPr>
+        <p:style>
+          <a:lnRef idx="1">
+            <a:schemeClr val="accent1"/>
+          </a:lnRef>
+          <a:fillRef idx="3">
+            <a:schemeClr val="accent1"/>
+          </a:fillRef>
+          <a:effectRef idx="2">
+            <a:schemeClr val="accent1"/>
+          </a:effectRef>
+          <a:fontRef idx="minor">
+            <a:schemeClr val="lt1"/>
+          </a:fontRef>
+        </p:style>
+        <p:txBody>
+          <a:bodyPr rtlCol="0" anchor="ctr"/>
+          <a:lstStyle/>
+          <a:p>
+            <a:pPr algn="ctr"/>
+          </a:p>
+        </p:txBody>
+      </p:sp>
+      <p:sp>
+        <p:nvSpPr>
+          <p:cNvPr id="43" name="Rounded Rectangle 42"/>
+          <p:cNvSpPr/>
+          <p:nvPr/>
+        </p:nvSpPr>
+        <p:spPr>
+          <a:xfrm>
+            <a:off x="9582911" y="4261104"/>
+            <a:ext cx="128016" cy="128016"/>
+          </a:xfrm>
+          <a:prstGeom prst="roundRect">
+            <a:avLst/>
+          </a:prstGeom>
+          <a:solidFill>
+            <a:srgbClr val="FF4545"/>
+          </a:solidFill>
+          <a:ln>
+            <a:noFill/>
+          </a:ln>
+        </p:spPr>
+        <p:style>
+          <a:lnRef idx="1">
+            <a:schemeClr val="accent1"/>
+          </a:lnRef>
+          <a:fillRef idx="3">
+            <a:schemeClr val="accent1"/>
+          </a:fillRef>
+          <a:effectRef idx="2">
+            <a:schemeClr val="accent1"/>
+          </a:effectRef>
+          <a:fontRef idx="minor">
+            <a:schemeClr val="lt1"/>
+          </a:fontRef>
+        </p:style>
+        <p:txBody>
+          <a:bodyPr rtlCol="0" anchor="ctr"/>
+          <a:lstStyle/>
+          <a:p>
+            <a:pPr algn="ctr"/>
+          </a:p>
+        </p:txBody>
+      </p:sp>
+      <p:sp>
+        <p:nvSpPr>
+          <p:cNvPr id="44" name="Rounded Rectangle 43"/>
+          <p:cNvSpPr/>
+          <p:nvPr/>
+        </p:nvSpPr>
+        <p:spPr>
+          <a:xfrm>
+            <a:off x="7955279" y="4389120"/>
+            <a:ext cx="3383280" cy="658368"/>
           </a:xfrm>
           <a:prstGeom prst="roundRect">
             <a:avLst>
@@ -6355,28 +7492,114 @@
           <a:p>
             <a:pPr algn="ctr"/>
             <a:r>
-              <a:rPr sz="1200" b="1">
+              <a:rPr sz="1200" b="0">
                 <a:solidFill>
                   <a:srgbClr val="FF4545"/>
                 </a:solidFill>
                 <a:latin typeface="Calibri"/>
               </a:rPr>
-              <a:t>Komenda /deploy
-lub /status</a:t>
-            </a:r>
-          </a:p>
-        </p:txBody>
-      </p:sp>
-      <p:sp>
-        <p:nvSpPr>
-          <p:cNvPr id="28" name="Rounded Rectangle 27"/>
-          <p:cNvSpPr/>
-          <p:nvPr/>
-        </p:nvSpPr>
-        <p:spPr>
-          <a:xfrm>
-            <a:off x="9098280" y="914400"/>
-            <a:ext cx="1005840" cy="320040"/>
+              <a:t>Sukces / Błąd
+zapis logu</a:t>
+            </a:r>
+          </a:p>
+        </p:txBody>
+      </p:sp>
+      <p:sp>
+        <p:nvSpPr>
+          <p:cNvPr id="45" name="Rectangle 44"/>
+          <p:cNvSpPr/>
+          <p:nvPr/>
+        </p:nvSpPr>
+        <p:spPr>
+          <a:xfrm>
+            <a:off x="9628631" y="5047488"/>
+            <a:ext cx="36576" cy="100584"/>
+          </a:xfrm>
+          <a:prstGeom prst="rect">
+            <a:avLst/>
+          </a:prstGeom>
+          <a:solidFill>
+            <a:srgbClr val="FF4545"/>
+          </a:solidFill>
+          <a:ln>
+            <a:noFill/>
+          </a:ln>
+        </p:spPr>
+        <p:style>
+          <a:lnRef idx="1">
+            <a:schemeClr val="accent1"/>
+          </a:lnRef>
+          <a:fillRef idx="3">
+            <a:schemeClr val="accent1"/>
+          </a:fillRef>
+          <a:effectRef idx="2">
+            <a:schemeClr val="accent1"/>
+          </a:effectRef>
+          <a:fontRef idx="minor">
+            <a:schemeClr val="lt1"/>
+          </a:fontRef>
+        </p:style>
+        <p:txBody>
+          <a:bodyPr rtlCol="0" anchor="ctr"/>
+          <a:lstStyle/>
+          <a:p>
+            <a:pPr algn="ctr"/>
+          </a:p>
+        </p:txBody>
+      </p:sp>
+      <p:sp>
+        <p:nvSpPr>
+          <p:cNvPr id="46" name="Rounded Rectangle 45"/>
+          <p:cNvSpPr/>
+          <p:nvPr/>
+        </p:nvSpPr>
+        <p:spPr>
+          <a:xfrm>
+            <a:off x="9582911" y="5129784"/>
+            <a:ext cx="128016" cy="128016"/>
+          </a:xfrm>
+          <a:prstGeom prst="roundRect">
+            <a:avLst/>
+          </a:prstGeom>
+          <a:solidFill>
+            <a:srgbClr val="FF4545"/>
+          </a:solidFill>
+          <a:ln>
+            <a:noFill/>
+          </a:ln>
+        </p:spPr>
+        <p:style>
+          <a:lnRef idx="1">
+            <a:schemeClr val="accent1"/>
+          </a:lnRef>
+          <a:fillRef idx="3">
+            <a:schemeClr val="accent1"/>
+          </a:fillRef>
+          <a:effectRef idx="2">
+            <a:schemeClr val="accent1"/>
+          </a:effectRef>
+          <a:fontRef idx="minor">
+            <a:schemeClr val="lt1"/>
+          </a:fontRef>
+        </p:style>
+        <p:txBody>
+          <a:bodyPr rtlCol="0" anchor="ctr"/>
+          <a:lstStyle/>
+          <a:p>
+            <a:pPr algn="ctr"/>
+          </a:p>
+        </p:txBody>
+      </p:sp>
+      <p:sp>
+        <p:nvSpPr>
+          <p:cNvPr id="47" name="Rounded Rectangle 46"/>
+          <p:cNvSpPr/>
+          <p:nvPr/>
+        </p:nvSpPr>
+        <p:spPr>
+          <a:xfrm>
+            <a:off x="7955279" y="5257800"/>
+            <a:ext cx="3383280" cy="658368"/>
           </a:xfrm>
           <a:prstGeom prst="roundRect">
             <a:avLst>
@@ -6384,231 +7607,6 @@
             </a:avLst>
           </a:prstGeom>
           <a:solidFill>
-            <a:srgbClr val="FF4545"/>
-          </a:solidFill>
-          <a:ln>
-            <a:noFill/>
-          </a:ln>
-        </p:spPr>
-        <p:style>
-          <a:lnRef idx="1">
-            <a:schemeClr val="accent1"/>
-          </a:lnRef>
-          <a:fillRef idx="3">
-            <a:schemeClr val="accent1"/>
-          </a:fillRef>
-          <a:effectRef idx="2">
-            <a:schemeClr val="accent1"/>
-          </a:effectRef>
-          <a:fontRef idx="minor">
-            <a:schemeClr val="lt1"/>
-          </a:fontRef>
-        </p:style>
-        <p:txBody>
-          <a:bodyPr rtlCol="0" anchor="ctr" wrap="square"/>
-          <a:lstStyle/>
-          <a:p>
-            <a:pPr algn="ctr"/>
-            <a:r>
-              <a:rPr sz="1000" b="1">
-                <a:solidFill>
-                  <a:srgbClr val="FFFFFF"/>
-                </a:solidFill>
-                <a:latin typeface="Calibri"/>
-              </a:rPr>
-              <a:t>TRIGGER</a:t>
-            </a:r>
-          </a:p>
-        </p:txBody>
-      </p:sp>
-      <p:sp>
-        <p:nvSpPr>
-          <p:cNvPr id="29" name="Rounded Rectangle 28"/>
-          <p:cNvSpPr/>
-          <p:nvPr/>
-        </p:nvSpPr>
-        <p:spPr>
-          <a:xfrm>
-            <a:off x="7909560" y="2286000"/>
-            <a:ext cx="3383280" cy="685800"/>
-          </a:xfrm>
-          <a:prstGeom prst="roundRect">
-            <a:avLst>
-              <a:gd name="adj" fmla="val 5000"/>
-            </a:avLst>
-          </a:prstGeom>
-          <a:solidFill>
-            <a:srgbClr val="112D4A"/>
-          </a:solidFill>
-          <a:ln w="19050">
-            <a:solidFill>
-              <a:srgbClr val="FF4545"/>
-            </a:solidFill>
-          </a:ln>
-        </p:spPr>
-        <p:style>
-          <a:lnRef idx="1">
-            <a:schemeClr val="accent1"/>
-          </a:lnRef>
-          <a:fillRef idx="3">
-            <a:schemeClr val="accent1"/>
-          </a:fillRef>
-          <a:effectRef idx="2">
-            <a:schemeClr val="accent1"/>
-          </a:effectRef>
-          <a:fontRef idx="minor">
-            <a:schemeClr val="lt1"/>
-          </a:fontRef>
-        </p:style>
-        <p:txBody>
-          <a:bodyPr rtlCol="0" anchor="ctr" wrap="square"/>
-          <a:lstStyle/>
-          <a:p>
-            <a:pPr algn="ctr"/>
-            <a:r>
-              <a:rPr sz="1200" b="0">
-                <a:solidFill>
-                  <a:srgbClr val="FF4545"/>
-                </a:solidFill>
-                <a:latin typeface="Calibri"/>
-              </a:rPr>
-              <a:t>Parsowanie
-komendy</a:t>
-            </a:r>
-          </a:p>
-        </p:txBody>
-      </p:sp>
-      <p:sp>
-        <p:nvSpPr>
-          <p:cNvPr id="30" name="Rounded Rectangle 29"/>
-          <p:cNvSpPr/>
-          <p:nvPr/>
-        </p:nvSpPr>
-        <p:spPr>
-          <a:xfrm>
-            <a:off x="7909560" y="3200400"/>
-            <a:ext cx="3383280" cy="685800"/>
-          </a:xfrm>
-          <a:prstGeom prst="roundRect">
-            <a:avLst>
-              <a:gd name="adj" fmla="val 5000"/>
-            </a:avLst>
-          </a:prstGeom>
-          <a:solidFill>
-            <a:srgbClr val="112D4A"/>
-          </a:solidFill>
-          <a:ln w="19050">
-            <a:solidFill>
-              <a:srgbClr val="FF4545"/>
-            </a:solidFill>
-          </a:ln>
-        </p:spPr>
-        <p:style>
-          <a:lnRef idx="1">
-            <a:schemeClr val="accent1"/>
-          </a:lnRef>
-          <a:fillRef idx="3">
-            <a:schemeClr val="accent1"/>
-          </a:fillRef>
-          <a:effectRef idx="2">
-            <a:schemeClr val="accent1"/>
-          </a:effectRef>
-          <a:fontRef idx="minor">
-            <a:schemeClr val="lt1"/>
-          </a:fontRef>
-        </p:style>
-        <p:txBody>
-          <a:bodyPr rtlCol="0" anchor="ctr" wrap="square"/>
-          <a:lstStyle/>
-          <a:p>
-            <a:pPr algn="ctr"/>
-            <a:r>
-              <a:rPr sz="1200" b="0">
-                <a:solidFill>
-                  <a:srgbClr val="FF4545"/>
-                </a:solidFill>
-                <a:latin typeface="Calibri"/>
-              </a:rPr>
-              <a:t>gh run
-/ gh issue / gh pr</a:t>
-            </a:r>
-          </a:p>
-        </p:txBody>
-      </p:sp>
-      <p:sp>
-        <p:nvSpPr>
-          <p:cNvPr id="31" name="Rounded Rectangle 30"/>
-          <p:cNvSpPr/>
-          <p:nvPr/>
-        </p:nvSpPr>
-        <p:spPr>
-          <a:xfrm>
-            <a:off x="7909560" y="4114800"/>
-            <a:ext cx="3383280" cy="685800"/>
-          </a:xfrm>
-          <a:prstGeom prst="roundRect">
-            <a:avLst>
-              <a:gd name="adj" fmla="val 5000"/>
-            </a:avLst>
-          </a:prstGeom>
-          <a:solidFill>
-            <a:srgbClr val="112D4A"/>
-          </a:solidFill>
-          <a:ln w="19050">
-            <a:solidFill>
-              <a:srgbClr val="FF4545"/>
-            </a:solidFill>
-          </a:ln>
-        </p:spPr>
-        <p:style>
-          <a:lnRef idx="1">
-            <a:schemeClr val="accent1"/>
-          </a:lnRef>
-          <a:fillRef idx="3">
-            <a:schemeClr val="accent1"/>
-          </a:fillRef>
-          <a:effectRef idx="2">
-            <a:schemeClr val="accent1"/>
-          </a:effectRef>
-          <a:fontRef idx="minor">
-            <a:schemeClr val="lt1"/>
-          </a:fontRef>
-        </p:style>
-        <p:txBody>
-          <a:bodyPr rtlCol="0" anchor="ctr" wrap="square"/>
-          <a:lstStyle/>
-          <a:p>
-            <a:pPr algn="ctr"/>
-            <a:r>
-              <a:rPr sz="1200" b="0">
-                <a:solidFill>
-                  <a:srgbClr val="FF4545"/>
-                </a:solidFill>
-                <a:latin typeface="Calibri"/>
-              </a:rPr>
-              <a:t>Sukces / Błąd
-zapis logu</a:t>
-            </a:r>
-          </a:p>
-        </p:txBody>
-      </p:sp>
-      <p:sp>
-        <p:nvSpPr>
-          <p:cNvPr id="32" name="Rounded Rectangle 31"/>
-          <p:cNvSpPr/>
-          <p:nvPr/>
-        </p:nvSpPr>
-        <p:spPr>
-          <a:xfrm>
-            <a:off x="7909560" y="5029200"/>
-            <a:ext cx="3383280" cy="685800"/>
-          </a:xfrm>
-          <a:prstGeom prst="roundRect">
-            <a:avLst>
-              <a:gd name="adj" fmla="val 5000"/>
-            </a:avLst>
-          </a:prstGeom>
-          <a:solidFill>
             <a:srgbClr val="112D4A"/>
           </a:solidFill>
           <a:ln w="19050">
@@ -6649,254 +7647,9 @@
           </a:p>
         </p:txBody>
       </p:sp>
-      <p:cxnSp>
-        <p:nvCxnSpPr>
-          <p:cNvPr id="33" name="Connector 32"/>
-          <p:cNvCxnSpPr/>
-          <p:nvPr/>
-        </p:nvCxnSpPr>
-        <p:spPr>
-          <a:xfrm>
-            <a:off x="9601200.0" y="2057400"/>
-            <a:ext cx="0.0" cy="228600"/>
-          </a:xfrm>
-          <a:prstGeom prst="line">
-            <a:avLst/>
-          </a:prstGeom>
-          <a:ln w="25400">
-            <a:solidFill>
-              <a:srgbClr val="FF4545"/>
-            </a:solidFill>
-          </a:ln>
-        </p:spPr>
-        <p:style>
-          <a:lnRef idx="2">
-            <a:schemeClr val="accent1"/>
-          </a:lnRef>
-          <a:fillRef idx="0">
-            <a:schemeClr val="accent1"/>
-          </a:fillRef>
-          <a:effectRef idx="1">
-            <a:schemeClr val="accent1"/>
-          </a:effectRef>
-          <a:fontRef idx="minor">
-            <a:schemeClr val="tx1"/>
-          </a:fontRef>
-        </p:style>
-      </p:cxnSp>
-      <p:cxnSp>
-        <p:nvCxnSpPr>
-          <p:cNvPr id="34" name="Connector 33"/>
-          <p:cNvCxnSpPr/>
-          <p:nvPr/>
-        </p:nvCxnSpPr>
-        <p:spPr>
-          <a:xfrm>
-            <a:off x="9601200.0" y="2971800"/>
-            <a:ext cx="0.0" cy="228600"/>
-          </a:xfrm>
-          <a:prstGeom prst="line">
-            <a:avLst/>
-          </a:prstGeom>
-          <a:ln w="25400">
-            <a:solidFill>
-              <a:srgbClr val="FF4545"/>
-            </a:solidFill>
-          </a:ln>
-        </p:spPr>
-        <p:style>
-          <a:lnRef idx="2">
-            <a:schemeClr val="accent1"/>
-          </a:lnRef>
-          <a:fillRef idx="0">
-            <a:schemeClr val="accent1"/>
-          </a:fillRef>
-          <a:effectRef idx="1">
-            <a:schemeClr val="accent1"/>
-          </a:effectRef>
-          <a:fontRef idx="minor">
-            <a:schemeClr val="tx1"/>
-          </a:fontRef>
-        </p:style>
-      </p:cxnSp>
-      <p:cxnSp>
-        <p:nvCxnSpPr>
-          <p:cNvPr id="35" name="Connector 34"/>
-          <p:cNvCxnSpPr/>
-          <p:nvPr/>
-        </p:nvCxnSpPr>
-        <p:spPr>
-          <a:xfrm>
-            <a:off x="9601200.0" y="3886200"/>
-            <a:ext cx="0.0" cy="228600"/>
-          </a:xfrm>
-          <a:prstGeom prst="line">
-            <a:avLst/>
-          </a:prstGeom>
-          <a:ln w="25400">
-            <a:solidFill>
-              <a:srgbClr val="FF4545"/>
-            </a:solidFill>
-          </a:ln>
-        </p:spPr>
-        <p:style>
-          <a:lnRef idx="2">
-            <a:schemeClr val="accent1"/>
-          </a:lnRef>
-          <a:fillRef idx="0">
-            <a:schemeClr val="accent1"/>
-          </a:fillRef>
-          <a:effectRef idx="1">
-            <a:schemeClr val="accent1"/>
-          </a:effectRef>
-          <a:fontRef idx="minor">
-            <a:schemeClr val="tx1"/>
-          </a:fontRef>
-        </p:style>
-      </p:cxnSp>
-      <p:cxnSp>
-        <p:nvCxnSpPr>
-          <p:cNvPr id="36" name="Connector 35"/>
-          <p:cNvCxnSpPr/>
-          <p:nvPr/>
-        </p:nvCxnSpPr>
-        <p:spPr>
-          <a:xfrm>
-            <a:off x="9601200.0" y="4800600"/>
-            <a:ext cx="0.0" cy="228600"/>
-          </a:xfrm>
-          <a:prstGeom prst="line">
-            <a:avLst/>
-          </a:prstGeom>
-          <a:ln w="25400">
-            <a:solidFill>
-              <a:srgbClr val="FF4545"/>
-            </a:solidFill>
-          </a:ln>
-        </p:spPr>
-        <p:style>
-          <a:lnRef idx="2">
-            <a:schemeClr val="accent1"/>
-          </a:lnRef>
-          <a:fillRef idx="0">
-            <a:schemeClr val="accent1"/>
-          </a:fillRef>
-          <a:effectRef idx="1">
-            <a:schemeClr val="accent1"/>
-          </a:effectRef>
-          <a:fontRef idx="minor">
-            <a:schemeClr val="tx1"/>
-          </a:fontRef>
-        </p:style>
-      </p:cxnSp>
-      <p:sp>
-        <p:nvSpPr>
-          <p:cNvPr id="37" name="TextBox 36"/>
-          <p:cNvSpPr txBox="1"/>
-          <p:nvPr/>
-        </p:nvSpPr>
-        <p:spPr>
-          <a:xfrm>
-            <a:off x="411480" y="1097280"/>
-            <a:ext cx="3383280" cy="365760"/>
-          </a:xfrm>
-          <a:prstGeom prst="rect">
-            <a:avLst/>
-          </a:prstGeom>
-          <a:noFill/>
-        </p:spPr>
-        <p:txBody>
-          <a:bodyPr wrap="square">
-            <a:spAutoFit/>
-          </a:bodyPr>
-          <a:lstStyle/>
-          <a:p>
-            <a:pPr algn="ctr"/>
-            <a:r>
-              <a:rPr sz="1200" b="1" i="0">
-                <a:solidFill>
-                  <a:srgbClr val="FFBF00"/>
-                </a:solidFill>
-                <a:latin typeface="Calibri"/>
-              </a:rPr>
-              <a:t>⚡ LIVE LISTENER</a:t>
-            </a:r>
-          </a:p>
-        </p:txBody>
-      </p:sp>
-      <p:sp>
-        <p:nvSpPr>
-          <p:cNvPr id="38" name="TextBox 37"/>
-          <p:cNvSpPr txBox="1"/>
-          <p:nvPr/>
-        </p:nvSpPr>
-        <p:spPr>
-          <a:xfrm>
-            <a:off x="4160520" y="1097280"/>
-            <a:ext cx="3383280" cy="365760"/>
-          </a:xfrm>
-          <a:prstGeom prst="rect">
-            <a:avLst/>
-          </a:prstGeom>
-          <a:noFill/>
-        </p:spPr>
-        <p:txBody>
-          <a:bodyPr wrap="square">
-            <a:spAutoFit/>
-          </a:bodyPr>
-          <a:lstStyle/>
-          <a:p>
-            <a:pPr algn="ctr"/>
-            <a:r>
-              <a:rPr sz="1200" b="1" i="0">
-                <a:solidFill>
-                  <a:srgbClr val="00E5FF"/>
-                </a:solidFill>
-                <a:latin typeface="Calibri"/>
-              </a:rPr>
-              <a:t>🔄 PR REVIEW (CRON)</a:t>
-            </a:r>
-          </a:p>
-        </p:txBody>
-      </p:sp>
-      <p:sp>
-        <p:nvSpPr>
-          <p:cNvPr id="39" name="TextBox 38"/>
-          <p:cNvSpPr txBox="1"/>
-          <p:nvPr/>
-        </p:nvSpPr>
-        <p:spPr>
-          <a:xfrm>
-            <a:off x="7909560" y="1097280"/>
-            <a:ext cx="3383280" cy="365760"/>
-          </a:xfrm>
-          <a:prstGeom prst="rect">
-            <a:avLst/>
-          </a:prstGeom>
-          <a:noFill/>
-        </p:spPr>
-        <p:txBody>
-          <a:bodyPr wrap="square">
-            <a:spAutoFit/>
-          </a:bodyPr>
-          <a:lstStyle/>
-          <a:p>
-            <a:pPr algn="ctr"/>
-            <a:r>
-              <a:rPr sz="1200" b="1" i="0">
-                <a:solidFill>
-                  <a:srgbClr val="FF4545"/>
-                </a:solidFill>
-                <a:latin typeface="Calibri"/>
-              </a:rPr>
-              <a:t>🔧 GITHUB ACTIONS</a:t>
-            </a:r>
-          </a:p>
-        </p:txBody>
-      </p:sp>
-      <p:sp>
-        <p:nvSpPr>
-          <p:cNvPr id="40" name="TextBox 39"/>
+      <p:sp>
+        <p:nvSpPr>
+          <p:cNvPr id="48" name="TextBox 47"/>
           <p:cNvSpPr txBox="1"/>
           <p:nvPr/>
         </p:nvSpPr>
@@ -6999,7 +7752,7 @@
         <p:spPr>
           <a:xfrm>
             <a:off x="457200" y="1234440"/>
-            <a:ext cx="11274552" cy="54864"/>
+            <a:ext cx="11274552" cy="45720"/>
           </a:xfrm>
           <a:prstGeom prst="rect">
             <a:avLst/>
@@ -7077,7 +7830,7 @@
         <p:spPr>
           <a:xfrm>
             <a:off x="457200" y="1005840"/>
-            <a:ext cx="8229600" cy="457200"/>
+            <a:ext cx="9144000" cy="457200"/>
           </a:xfrm>
           <a:prstGeom prst="rect">
             <a:avLst/>
@@ -7098,7 +7851,7 @@
                 </a:solidFill>
                 <a:latin typeface="Calibri"/>
               </a:rPr>
-              <a:t>Punkty styku: Admin · Developer · End User</a:t>
+              <a:t>User Journey: od importu CSV do zamknięcia ticketu</a:t>
             </a:r>
           </a:p>
         </p:txBody>
@@ -7111,7 +7864,7 @@
         </p:nvSpPr>
         <p:spPr>
           <a:xfrm>
-            <a:off x="457200" y="3383280"/>
+            <a:off x="457200" y="3401568"/>
             <a:ext cx="11274552" cy="73152"/>
           </a:xfrm>
           <a:prstGeom prst="rect">
@@ -7154,8 +7907,8 @@
         </p:nvSpPr>
         <p:spPr>
           <a:xfrm>
-            <a:off x="731520" y="3154680"/>
-            <a:ext cx="457200" cy="457200"/>
+            <a:off x="658368" y="3191256"/>
+            <a:ext cx="411480" cy="411480"/>
           </a:xfrm>
           <a:prstGeom prst="ellipse">
             <a:avLst/>
@@ -7197,8 +7950,8 @@
         </p:nvSpPr>
         <p:spPr>
           <a:xfrm>
-            <a:off x="731520" y="3154680"/>
-            <a:ext cx="457200" cy="457200"/>
+            <a:off x="658368" y="3191256"/>
+            <a:ext cx="411480" cy="411480"/>
           </a:xfrm>
           <a:prstGeom prst="rect">
             <a:avLst/>
@@ -7213,7 +7966,7 @@
           <a:p>
             <a:pPr algn="ctr"/>
             <a:r>
-              <a:rPr sz="1400" b="1" i="0">
+              <a:rPr sz="1300" b="1" i="0">
                 <a:solidFill>
                   <a:srgbClr val="0D1B2A"/>
                 </a:solidFill>
@@ -7232,8 +7985,8 @@
         </p:nvSpPr>
         <p:spPr>
           <a:xfrm>
-            <a:off x="457200" y="1463040"/>
-            <a:ext cx="1737360" cy="640080"/>
+            <a:off x="457200" y="2103120"/>
+            <a:ext cx="1691640" cy="685800"/>
           </a:xfrm>
           <a:prstGeom prst="roundRect">
             <a:avLst>
@@ -7289,8 +8042,8 @@
         </p:nvSpPr>
         <p:spPr>
           <a:xfrm>
-            <a:off x="457200" y="2148840"/>
-            <a:ext cx="1737360" cy="731520"/>
+            <a:off x="457200" y="2788920"/>
+            <a:ext cx="1691640" cy="594360"/>
           </a:xfrm>
           <a:prstGeom prst="rect">
             <a:avLst/>
@@ -7317,20 +8070,960 @@
           </a:p>
         </p:txBody>
       </p:sp>
-      <p:cxnSp>
-        <p:nvCxnSpPr>
-          <p:cNvPr id="11" name="Connector 10"/>
-          <p:cNvCxnSpPr/>
-          <p:nvPr/>
-        </p:nvCxnSpPr>
-        <p:spPr>
-          <a:xfrm>
-            <a:off x="960120" y="2103120"/>
-            <a:ext cx="0" cy="1261872"/>
-          </a:xfrm>
-          <a:prstGeom prst="line">
-            <a:avLst/>
-          </a:prstGeom>
+      <p:sp>
+        <p:nvSpPr>
+          <p:cNvPr id="11" name="Rectangle 10"/>
+          <p:cNvSpPr/>
+          <p:nvPr/>
+        </p:nvSpPr>
+        <p:spPr>
+          <a:xfrm>
+            <a:off x="1284732" y="3383280"/>
+            <a:ext cx="36576" cy="-100584"/>
+          </a:xfrm>
+          <a:prstGeom prst="rect">
+            <a:avLst/>
+          </a:prstGeom>
+          <a:solidFill>
+            <a:srgbClr val="FFBF00"/>
+          </a:solidFill>
+          <a:ln>
+            <a:noFill/>
+          </a:ln>
+        </p:spPr>
+        <p:style>
+          <a:lnRef idx="1">
+            <a:schemeClr val="accent1"/>
+          </a:lnRef>
+          <a:fillRef idx="3">
+            <a:schemeClr val="accent1"/>
+          </a:fillRef>
+          <a:effectRef idx="2">
+            <a:schemeClr val="accent1"/>
+          </a:effectRef>
+          <a:fontRef idx="minor">
+            <a:schemeClr val="lt1"/>
+          </a:fontRef>
+        </p:style>
+        <p:txBody>
+          <a:bodyPr rtlCol="0" anchor="ctr"/>
+          <a:lstStyle/>
+          <a:p>
+            <a:pPr algn="ctr"/>
+          </a:p>
+        </p:txBody>
+      </p:sp>
+      <p:sp>
+        <p:nvSpPr>
+          <p:cNvPr id="12" name="Rounded Rectangle 11"/>
+          <p:cNvSpPr/>
+          <p:nvPr/>
+        </p:nvSpPr>
+        <p:spPr>
+          <a:xfrm>
+            <a:off x="1239012" y="3264408"/>
+            <a:ext cx="128016" cy="128016"/>
+          </a:xfrm>
+          <a:prstGeom prst="roundRect">
+            <a:avLst/>
+          </a:prstGeom>
+          <a:solidFill>
+            <a:srgbClr val="FFBF00"/>
+          </a:solidFill>
+          <a:ln>
+            <a:noFill/>
+          </a:ln>
+        </p:spPr>
+        <p:style>
+          <a:lnRef idx="1">
+            <a:schemeClr val="accent1"/>
+          </a:lnRef>
+          <a:fillRef idx="3">
+            <a:schemeClr val="accent1"/>
+          </a:fillRef>
+          <a:effectRef idx="2">
+            <a:schemeClr val="accent1"/>
+          </a:effectRef>
+          <a:fontRef idx="minor">
+            <a:schemeClr val="lt1"/>
+          </a:fontRef>
+        </p:style>
+        <p:txBody>
+          <a:bodyPr rtlCol="0" anchor="ctr"/>
+          <a:lstStyle/>
+          <a:p>
+            <a:pPr algn="ctr"/>
+          </a:p>
+        </p:txBody>
+      </p:sp>
+      <p:sp>
+        <p:nvSpPr>
+          <p:cNvPr id="13" name="Oval 12"/>
+          <p:cNvSpPr/>
+          <p:nvPr/>
+        </p:nvSpPr>
+        <p:spPr>
+          <a:xfrm>
+            <a:off x="2624328" y="3191256"/>
+            <a:ext cx="411480" cy="411480"/>
+          </a:xfrm>
+          <a:prstGeom prst="ellipse">
+            <a:avLst/>
+          </a:prstGeom>
+          <a:solidFill>
+            <a:srgbClr val="00E5FF"/>
+          </a:solidFill>
+          <a:ln>
+            <a:noFill/>
+          </a:ln>
+        </p:spPr>
+        <p:style>
+          <a:lnRef idx="1">
+            <a:schemeClr val="accent1"/>
+          </a:lnRef>
+          <a:fillRef idx="3">
+            <a:schemeClr val="accent1"/>
+          </a:fillRef>
+          <a:effectRef idx="2">
+            <a:schemeClr val="accent1"/>
+          </a:effectRef>
+          <a:fontRef idx="minor">
+            <a:schemeClr val="lt1"/>
+          </a:fontRef>
+        </p:style>
+        <p:txBody>
+          <a:bodyPr rtlCol="0" anchor="ctr"/>
+          <a:lstStyle/>
+          <a:p>
+            <a:pPr algn="ctr"/>
+          </a:p>
+        </p:txBody>
+      </p:sp>
+      <p:sp>
+        <p:nvSpPr>
+          <p:cNvPr id="14" name="TextBox 13"/>
+          <p:cNvSpPr txBox="1"/>
+          <p:nvPr/>
+        </p:nvSpPr>
+        <p:spPr>
+          <a:xfrm>
+            <a:off x="2624328" y="3191256"/>
+            <a:ext cx="411480" cy="411480"/>
+          </a:xfrm>
+          <a:prstGeom prst="rect">
+            <a:avLst/>
+          </a:prstGeom>
+          <a:noFill/>
+        </p:spPr>
+        <p:txBody>
+          <a:bodyPr wrap="square">
+            <a:spAutoFit/>
+          </a:bodyPr>
+          <a:lstStyle/>
+          <a:p>
+            <a:pPr algn="ctr"/>
+            <a:r>
+              <a:rPr sz="1300" b="1" i="0">
+                <a:solidFill>
+                  <a:srgbClr val="0D1B2A"/>
+                </a:solidFill>
+                <a:latin typeface="Calibri"/>
+              </a:rPr>
+              <a:t>2</a:t>
+            </a:r>
+          </a:p>
+        </p:txBody>
+      </p:sp>
+      <p:sp>
+        <p:nvSpPr>
+          <p:cNvPr id="15" name="Rounded Rectangle 14"/>
+          <p:cNvSpPr/>
+          <p:nvPr/>
+        </p:nvSpPr>
+        <p:spPr>
+          <a:xfrm>
+            <a:off x="2423160" y="4069080"/>
+            <a:ext cx="1691640" cy="685800"/>
+          </a:xfrm>
+          <a:prstGeom prst="roundRect">
+            <a:avLst>
+              <a:gd name="adj" fmla="val 5000"/>
+            </a:avLst>
+          </a:prstGeom>
+          <a:solidFill>
+            <a:srgbClr val="112D4A"/>
+          </a:solidFill>
+          <a:ln w="19050">
+            <a:solidFill>
+              <a:srgbClr val="00E5FF"/>
+            </a:solidFill>
+          </a:ln>
+        </p:spPr>
+        <p:style>
+          <a:lnRef idx="1">
+            <a:schemeClr val="accent1"/>
+          </a:lnRef>
+          <a:fillRef idx="3">
+            <a:schemeClr val="accent1"/>
+          </a:fillRef>
+          <a:effectRef idx="2">
+            <a:schemeClr val="accent1"/>
+          </a:effectRef>
+          <a:fontRef idx="minor">
+            <a:schemeClr val="lt1"/>
+          </a:fontRef>
+        </p:style>
+        <p:txBody>
+          <a:bodyPr rtlCol="0" anchor="ctr" wrap="square"/>
+          <a:lstStyle/>
+          <a:p>
+            <a:pPr algn="ctr"/>
+            <a:r>
+              <a:rPr sz="1300" b="1">
+                <a:solidFill>
+                  <a:srgbClr val="00E5FF"/>
+                </a:solidFill>
+                <a:latin typeface="Calibri"/>
+              </a:rPr>
+              <a:t>Web
+Dashboard</a:t>
+            </a:r>
+          </a:p>
+        </p:txBody>
+      </p:sp>
+      <p:sp>
+        <p:nvSpPr>
+          <p:cNvPr id="16" name="TextBox 15"/>
+          <p:cNvSpPr txBox="1"/>
+          <p:nvPr/>
+        </p:nvSpPr>
+        <p:spPr>
+          <a:xfrm>
+            <a:off x="2423160" y="4754880"/>
+            <a:ext cx="1691640" cy="594360"/>
+          </a:xfrm>
+          <a:prstGeom prst="rect">
+            <a:avLst/>
+          </a:prstGeom>
+          <a:noFill/>
+        </p:spPr>
+        <p:txBody>
+          <a:bodyPr wrap="square">
+            <a:spAutoFit/>
+          </a:bodyPr>
+          <a:lstStyle/>
+          <a:p>
+            <a:pPr algn="ctr"/>
+            <a:r>
+              <a:rPr sz="1100" b="0" i="0">
+                <a:solidFill>
+                  <a:srgbClr val="A0B4C8"/>
+                </a:solidFill>
+                <a:latin typeface="Calibri"/>
+              </a:rPr>
+              <a:t>Przegląd CVE,
+filtrowanie</a:t>
+            </a:r>
+          </a:p>
+        </p:txBody>
+      </p:sp>
+      <p:sp>
+        <p:nvSpPr>
+          <p:cNvPr id="17" name="Rectangle 16"/>
+          <p:cNvSpPr/>
+          <p:nvPr/>
+        </p:nvSpPr>
+        <p:spPr>
+          <a:xfrm>
+            <a:off x="3250692" y="3474720"/>
+            <a:ext cx="36576" cy="484632"/>
+          </a:xfrm>
+          <a:prstGeom prst="rect">
+            <a:avLst/>
+          </a:prstGeom>
+          <a:solidFill>
+            <a:srgbClr val="00E5FF"/>
+          </a:solidFill>
+          <a:ln>
+            <a:noFill/>
+          </a:ln>
+        </p:spPr>
+        <p:style>
+          <a:lnRef idx="1">
+            <a:schemeClr val="accent1"/>
+          </a:lnRef>
+          <a:fillRef idx="3">
+            <a:schemeClr val="accent1"/>
+          </a:fillRef>
+          <a:effectRef idx="2">
+            <a:schemeClr val="accent1"/>
+          </a:effectRef>
+          <a:fontRef idx="minor">
+            <a:schemeClr val="lt1"/>
+          </a:fontRef>
+        </p:style>
+        <p:txBody>
+          <a:bodyPr rtlCol="0" anchor="ctr"/>
+          <a:lstStyle/>
+          <a:p>
+            <a:pPr algn="ctr"/>
+          </a:p>
+        </p:txBody>
+      </p:sp>
+      <p:sp>
+        <p:nvSpPr>
+          <p:cNvPr id="18" name="Rounded Rectangle 17"/>
+          <p:cNvSpPr/>
+          <p:nvPr/>
+        </p:nvSpPr>
+        <p:spPr>
+          <a:xfrm>
+            <a:off x="3204972" y="3941064"/>
+            <a:ext cx="128016" cy="128016"/>
+          </a:xfrm>
+          <a:prstGeom prst="roundRect">
+            <a:avLst/>
+          </a:prstGeom>
+          <a:solidFill>
+            <a:srgbClr val="00E5FF"/>
+          </a:solidFill>
+          <a:ln>
+            <a:noFill/>
+          </a:ln>
+        </p:spPr>
+        <p:style>
+          <a:lnRef idx="1">
+            <a:schemeClr val="accent1"/>
+          </a:lnRef>
+          <a:fillRef idx="3">
+            <a:schemeClr val="accent1"/>
+          </a:fillRef>
+          <a:effectRef idx="2">
+            <a:schemeClr val="accent1"/>
+          </a:effectRef>
+          <a:fontRef idx="minor">
+            <a:schemeClr val="lt1"/>
+          </a:fontRef>
+        </p:style>
+        <p:txBody>
+          <a:bodyPr rtlCol="0" anchor="ctr"/>
+          <a:lstStyle/>
+          <a:p>
+            <a:pPr algn="ctr"/>
+          </a:p>
+        </p:txBody>
+      </p:sp>
+      <p:sp>
+        <p:nvSpPr>
+          <p:cNvPr id="19" name="Oval 18"/>
+          <p:cNvSpPr/>
+          <p:nvPr/>
+        </p:nvSpPr>
+        <p:spPr>
+          <a:xfrm>
+            <a:off x="4590288" y="3191256"/>
+            <a:ext cx="411480" cy="411480"/>
+          </a:xfrm>
+          <a:prstGeom prst="ellipse">
+            <a:avLst/>
+          </a:prstGeom>
+          <a:solidFill>
+            <a:srgbClr val="00E676"/>
+          </a:solidFill>
+          <a:ln>
+            <a:noFill/>
+          </a:ln>
+        </p:spPr>
+        <p:style>
+          <a:lnRef idx="1">
+            <a:schemeClr val="accent1"/>
+          </a:lnRef>
+          <a:fillRef idx="3">
+            <a:schemeClr val="accent1"/>
+          </a:fillRef>
+          <a:effectRef idx="2">
+            <a:schemeClr val="accent1"/>
+          </a:effectRef>
+          <a:fontRef idx="minor">
+            <a:schemeClr val="lt1"/>
+          </a:fontRef>
+        </p:style>
+        <p:txBody>
+          <a:bodyPr rtlCol="0" anchor="ctr"/>
+          <a:lstStyle/>
+          <a:p>
+            <a:pPr algn="ctr"/>
+          </a:p>
+        </p:txBody>
+      </p:sp>
+      <p:sp>
+        <p:nvSpPr>
+          <p:cNvPr id="20" name="TextBox 19"/>
+          <p:cNvSpPr txBox="1"/>
+          <p:nvPr/>
+        </p:nvSpPr>
+        <p:spPr>
+          <a:xfrm>
+            <a:off x="4590288" y="3191256"/>
+            <a:ext cx="411480" cy="411480"/>
+          </a:xfrm>
+          <a:prstGeom prst="rect">
+            <a:avLst/>
+          </a:prstGeom>
+          <a:noFill/>
+        </p:spPr>
+        <p:txBody>
+          <a:bodyPr wrap="square">
+            <a:spAutoFit/>
+          </a:bodyPr>
+          <a:lstStyle/>
+          <a:p>
+            <a:pPr algn="ctr"/>
+            <a:r>
+              <a:rPr sz="1300" b="1" i="0">
+                <a:solidFill>
+                  <a:srgbClr val="0D1B2A"/>
+                </a:solidFill>
+                <a:latin typeface="Calibri"/>
+              </a:rPr>
+              <a:t>3</a:t>
+            </a:r>
+          </a:p>
+        </p:txBody>
+      </p:sp>
+      <p:sp>
+        <p:nvSpPr>
+          <p:cNvPr id="21" name="Rounded Rectangle 20"/>
+          <p:cNvSpPr/>
+          <p:nvPr/>
+        </p:nvSpPr>
+        <p:spPr>
+          <a:xfrm>
+            <a:off x="4389120" y="2103120"/>
+            <a:ext cx="1691640" cy="685800"/>
+          </a:xfrm>
+          <a:prstGeom prst="roundRect">
+            <a:avLst>
+              <a:gd name="adj" fmla="val 5000"/>
+            </a:avLst>
+          </a:prstGeom>
+          <a:solidFill>
+            <a:srgbClr val="112D4A"/>
+          </a:solidFill>
+          <a:ln w="19050">
+            <a:solidFill>
+              <a:srgbClr val="00E676"/>
+            </a:solidFill>
+          </a:ln>
+        </p:spPr>
+        <p:style>
+          <a:lnRef idx="1">
+            <a:schemeClr val="accent1"/>
+          </a:lnRef>
+          <a:fillRef idx="3">
+            <a:schemeClr val="accent1"/>
+          </a:fillRef>
+          <a:effectRef idx="2">
+            <a:schemeClr val="accent1"/>
+          </a:effectRef>
+          <a:fontRef idx="minor">
+            <a:schemeClr val="lt1"/>
+          </a:fontRef>
+        </p:style>
+        <p:txBody>
+          <a:bodyPr rtlCol="0" anchor="ctr" wrap="square"/>
+          <a:lstStyle/>
+          <a:p>
+            <a:pPr algn="ctr"/>
+            <a:r>
+              <a:rPr sz="1300" b="1">
+                <a:solidFill>
+                  <a:srgbClr val="00E676"/>
+                </a:solidFill>
+                <a:latin typeface="Calibri"/>
+              </a:rPr>
+              <a:t>Aktualizacja
+Statusu</a:t>
+            </a:r>
+          </a:p>
+        </p:txBody>
+      </p:sp>
+      <p:sp>
+        <p:nvSpPr>
+          <p:cNvPr id="22" name="TextBox 21"/>
+          <p:cNvSpPr txBox="1"/>
+          <p:nvPr/>
+        </p:nvSpPr>
+        <p:spPr>
+          <a:xfrm>
+            <a:off x="4389120" y="2788920"/>
+            <a:ext cx="1691640" cy="594360"/>
+          </a:xfrm>
+          <a:prstGeom prst="rect">
+            <a:avLst/>
+          </a:prstGeom>
+          <a:noFill/>
+        </p:spPr>
+        <p:txBody>
+          <a:bodyPr wrap="square">
+            <a:spAutoFit/>
+          </a:bodyPr>
+          <a:lstStyle/>
+          <a:p>
+            <a:pPr algn="ctr"/>
+            <a:r>
+              <a:rPr sz="1100" b="0" i="0">
+                <a:solidFill>
+                  <a:srgbClr val="A0B4C8"/>
+                </a:solidFill>
+                <a:latin typeface="Calibri"/>
+              </a:rPr>
+              <a:t>action_taken
+ticket_number</a:t>
+            </a:r>
+          </a:p>
+        </p:txBody>
+      </p:sp>
+      <p:sp>
+        <p:nvSpPr>
+          <p:cNvPr id="23" name="Rectangle 22"/>
+          <p:cNvSpPr/>
+          <p:nvPr/>
+        </p:nvSpPr>
+        <p:spPr>
+          <a:xfrm>
+            <a:off x="5216652" y="3383280"/>
+            <a:ext cx="36576" cy="-100584"/>
+          </a:xfrm>
+          <a:prstGeom prst="rect">
+            <a:avLst/>
+          </a:prstGeom>
+          <a:solidFill>
+            <a:srgbClr val="00E676"/>
+          </a:solidFill>
+          <a:ln>
+            <a:noFill/>
+          </a:ln>
+        </p:spPr>
+        <p:style>
+          <a:lnRef idx="1">
+            <a:schemeClr val="accent1"/>
+          </a:lnRef>
+          <a:fillRef idx="3">
+            <a:schemeClr val="accent1"/>
+          </a:fillRef>
+          <a:effectRef idx="2">
+            <a:schemeClr val="accent1"/>
+          </a:effectRef>
+          <a:fontRef idx="minor">
+            <a:schemeClr val="lt1"/>
+          </a:fontRef>
+        </p:style>
+        <p:txBody>
+          <a:bodyPr rtlCol="0" anchor="ctr"/>
+          <a:lstStyle/>
+          <a:p>
+            <a:pPr algn="ctr"/>
+          </a:p>
+        </p:txBody>
+      </p:sp>
+      <p:sp>
+        <p:nvSpPr>
+          <p:cNvPr id="24" name="Rounded Rectangle 23"/>
+          <p:cNvSpPr/>
+          <p:nvPr/>
+        </p:nvSpPr>
+        <p:spPr>
+          <a:xfrm>
+            <a:off x="5170932" y="3264408"/>
+            <a:ext cx="128016" cy="128016"/>
+          </a:xfrm>
+          <a:prstGeom prst="roundRect">
+            <a:avLst/>
+          </a:prstGeom>
+          <a:solidFill>
+            <a:srgbClr val="00E676"/>
+          </a:solidFill>
+          <a:ln>
+            <a:noFill/>
+          </a:ln>
+        </p:spPr>
+        <p:style>
+          <a:lnRef idx="1">
+            <a:schemeClr val="accent1"/>
+          </a:lnRef>
+          <a:fillRef idx="3">
+            <a:schemeClr val="accent1"/>
+          </a:fillRef>
+          <a:effectRef idx="2">
+            <a:schemeClr val="accent1"/>
+          </a:effectRef>
+          <a:fontRef idx="minor">
+            <a:schemeClr val="lt1"/>
+          </a:fontRef>
+        </p:style>
+        <p:txBody>
+          <a:bodyPr rtlCol="0" anchor="ctr"/>
+          <a:lstStyle/>
+          <a:p>
+            <a:pPr algn="ctr"/>
+          </a:p>
+        </p:txBody>
+      </p:sp>
+      <p:sp>
+        <p:nvSpPr>
+          <p:cNvPr id="25" name="Oval 24"/>
+          <p:cNvSpPr/>
+          <p:nvPr/>
+        </p:nvSpPr>
+        <p:spPr>
+          <a:xfrm>
+            <a:off x="6556248" y="3191256"/>
+            <a:ext cx="411480" cy="411480"/>
+          </a:xfrm>
+          <a:prstGeom prst="ellipse">
+            <a:avLst/>
+          </a:prstGeom>
+          <a:solidFill>
+            <a:srgbClr val="00E5FF"/>
+          </a:solidFill>
+          <a:ln>
+            <a:noFill/>
+          </a:ln>
+        </p:spPr>
+        <p:style>
+          <a:lnRef idx="1">
+            <a:schemeClr val="accent1"/>
+          </a:lnRef>
+          <a:fillRef idx="3">
+            <a:schemeClr val="accent1"/>
+          </a:fillRef>
+          <a:effectRef idx="2">
+            <a:schemeClr val="accent1"/>
+          </a:effectRef>
+          <a:fontRef idx="minor">
+            <a:schemeClr val="lt1"/>
+          </a:fontRef>
+        </p:style>
+        <p:txBody>
+          <a:bodyPr rtlCol="0" anchor="ctr"/>
+          <a:lstStyle/>
+          <a:p>
+            <a:pPr algn="ctr"/>
+          </a:p>
+        </p:txBody>
+      </p:sp>
+      <p:sp>
+        <p:nvSpPr>
+          <p:cNvPr id="26" name="TextBox 25"/>
+          <p:cNvSpPr txBox="1"/>
+          <p:nvPr/>
+        </p:nvSpPr>
+        <p:spPr>
+          <a:xfrm>
+            <a:off x="6556248" y="3191256"/>
+            <a:ext cx="411480" cy="411480"/>
+          </a:xfrm>
+          <a:prstGeom prst="rect">
+            <a:avLst/>
+          </a:prstGeom>
+          <a:noFill/>
+        </p:spPr>
+        <p:txBody>
+          <a:bodyPr wrap="square">
+            <a:spAutoFit/>
+          </a:bodyPr>
+          <a:lstStyle/>
+          <a:p>
+            <a:pPr algn="ctr"/>
+            <a:r>
+              <a:rPr sz="1300" b="1" i="0">
+                <a:solidFill>
+                  <a:srgbClr val="0D1B2A"/>
+                </a:solidFill>
+                <a:latin typeface="Calibri"/>
+              </a:rPr>
+              <a:t>4</a:t>
+            </a:r>
+          </a:p>
+        </p:txBody>
+      </p:sp>
+      <p:sp>
+        <p:nvSpPr>
+          <p:cNvPr id="27" name="Rounded Rectangle 26"/>
+          <p:cNvSpPr/>
+          <p:nvPr/>
+        </p:nvSpPr>
+        <p:spPr>
+          <a:xfrm>
+            <a:off x="6355080" y="4069080"/>
+            <a:ext cx="1691640" cy="685800"/>
+          </a:xfrm>
+          <a:prstGeom prst="roundRect">
+            <a:avLst>
+              <a:gd name="adj" fmla="val 5000"/>
+            </a:avLst>
+          </a:prstGeom>
+          <a:solidFill>
+            <a:srgbClr val="112D4A"/>
+          </a:solidFill>
+          <a:ln w="19050">
+            <a:solidFill>
+              <a:srgbClr val="00E5FF"/>
+            </a:solidFill>
+          </a:ln>
+        </p:spPr>
+        <p:style>
+          <a:lnRef idx="1">
+            <a:schemeClr val="accent1"/>
+          </a:lnRef>
+          <a:fillRef idx="3">
+            <a:schemeClr val="accent1"/>
+          </a:fillRef>
+          <a:effectRef idx="2">
+            <a:schemeClr val="accent1"/>
+          </a:effectRef>
+          <a:fontRef idx="minor">
+            <a:schemeClr val="lt1"/>
+          </a:fontRef>
+        </p:style>
+        <p:txBody>
+          <a:bodyPr rtlCol="0" anchor="ctr" wrap="square"/>
+          <a:lstStyle/>
+          <a:p>
+            <a:pPr algn="ctr"/>
+            <a:r>
+              <a:rPr sz="1300" b="1">
+                <a:solidFill>
+                  <a:srgbClr val="00E5FF"/>
+                </a:solidFill>
+                <a:latin typeface="Calibri"/>
+              </a:rPr>
+              <a:t>Mobile
+Podgląd</a:t>
+            </a:r>
+          </a:p>
+        </p:txBody>
+      </p:sp>
+      <p:sp>
+        <p:nvSpPr>
+          <p:cNvPr id="28" name="TextBox 27"/>
+          <p:cNvSpPr txBox="1"/>
+          <p:nvPr/>
+        </p:nvSpPr>
+        <p:spPr>
+          <a:xfrm>
+            <a:off x="6355080" y="4754880"/>
+            <a:ext cx="1691640" cy="594360"/>
+          </a:xfrm>
+          <a:prstGeom prst="rect">
+            <a:avLst/>
+          </a:prstGeom>
+          <a:noFill/>
+        </p:spPr>
+        <p:txBody>
+          <a:bodyPr wrap="square">
+            <a:spAutoFit/>
+          </a:bodyPr>
+          <a:lstStyle/>
+          <a:p>
+            <a:pPr algn="ctr"/>
+            <a:r>
+              <a:rPr sz="1100" b="0" i="0">
+                <a:solidFill>
+                  <a:srgbClr val="A0B4C8"/>
+                </a:solidFill>
+                <a:latin typeface="Calibri"/>
+              </a:rPr>
+              <a:t>iOS: /api/cves
+przez ZeroTier</a:t>
+            </a:r>
+          </a:p>
+        </p:txBody>
+      </p:sp>
+      <p:sp>
+        <p:nvSpPr>
+          <p:cNvPr id="29" name="Rectangle 28"/>
+          <p:cNvSpPr/>
+          <p:nvPr/>
+        </p:nvSpPr>
+        <p:spPr>
+          <a:xfrm>
+            <a:off x="7182612" y="3474720"/>
+            <a:ext cx="36576" cy="484632"/>
+          </a:xfrm>
+          <a:prstGeom prst="rect">
+            <a:avLst/>
+          </a:prstGeom>
+          <a:solidFill>
+            <a:srgbClr val="00E5FF"/>
+          </a:solidFill>
+          <a:ln>
+            <a:noFill/>
+          </a:ln>
+        </p:spPr>
+        <p:style>
+          <a:lnRef idx="1">
+            <a:schemeClr val="accent1"/>
+          </a:lnRef>
+          <a:fillRef idx="3">
+            <a:schemeClr val="accent1"/>
+          </a:fillRef>
+          <a:effectRef idx="2">
+            <a:schemeClr val="accent1"/>
+          </a:effectRef>
+          <a:fontRef idx="minor">
+            <a:schemeClr val="lt1"/>
+          </a:fontRef>
+        </p:style>
+        <p:txBody>
+          <a:bodyPr rtlCol="0" anchor="ctr"/>
+          <a:lstStyle/>
+          <a:p>
+            <a:pPr algn="ctr"/>
+          </a:p>
+        </p:txBody>
+      </p:sp>
+      <p:sp>
+        <p:nvSpPr>
+          <p:cNvPr id="30" name="Rounded Rectangle 29"/>
+          <p:cNvSpPr/>
+          <p:nvPr/>
+        </p:nvSpPr>
+        <p:spPr>
+          <a:xfrm>
+            <a:off x="7136892" y="3941064"/>
+            <a:ext cx="128016" cy="128016"/>
+          </a:xfrm>
+          <a:prstGeom prst="roundRect">
+            <a:avLst/>
+          </a:prstGeom>
+          <a:solidFill>
+            <a:srgbClr val="00E5FF"/>
+          </a:solidFill>
+          <a:ln>
+            <a:noFill/>
+          </a:ln>
+        </p:spPr>
+        <p:style>
+          <a:lnRef idx="1">
+            <a:schemeClr val="accent1"/>
+          </a:lnRef>
+          <a:fillRef idx="3">
+            <a:schemeClr val="accent1"/>
+          </a:fillRef>
+          <a:effectRef idx="2">
+            <a:schemeClr val="accent1"/>
+          </a:effectRef>
+          <a:fontRef idx="minor">
+            <a:schemeClr val="lt1"/>
+          </a:fontRef>
+        </p:style>
+        <p:txBody>
+          <a:bodyPr rtlCol="0" anchor="ctr"/>
+          <a:lstStyle/>
+          <a:p>
+            <a:pPr algn="ctr"/>
+          </a:p>
+        </p:txBody>
+      </p:sp>
+      <p:sp>
+        <p:nvSpPr>
+          <p:cNvPr id="31" name="Oval 30"/>
+          <p:cNvSpPr/>
+          <p:nvPr/>
+        </p:nvSpPr>
+        <p:spPr>
+          <a:xfrm>
+            <a:off x="8522208" y="3191256"/>
+            <a:ext cx="411480" cy="411480"/>
+          </a:xfrm>
+          <a:prstGeom prst="ellipse">
+            <a:avLst/>
+          </a:prstGeom>
+          <a:solidFill>
+            <a:srgbClr val="FFBF00"/>
+          </a:solidFill>
+          <a:ln>
+            <a:noFill/>
+          </a:ln>
+        </p:spPr>
+        <p:style>
+          <a:lnRef idx="1">
+            <a:schemeClr val="accent1"/>
+          </a:lnRef>
+          <a:fillRef idx="3">
+            <a:schemeClr val="accent1"/>
+          </a:fillRef>
+          <a:effectRef idx="2">
+            <a:schemeClr val="accent1"/>
+          </a:effectRef>
+          <a:fontRef idx="minor">
+            <a:schemeClr val="lt1"/>
+          </a:fontRef>
+        </p:style>
+        <p:txBody>
+          <a:bodyPr rtlCol="0" anchor="ctr"/>
+          <a:lstStyle/>
+          <a:p>
+            <a:pPr algn="ctr"/>
+          </a:p>
+        </p:txBody>
+      </p:sp>
+      <p:sp>
+        <p:nvSpPr>
+          <p:cNvPr id="32" name="TextBox 31"/>
+          <p:cNvSpPr txBox="1"/>
+          <p:nvPr/>
+        </p:nvSpPr>
+        <p:spPr>
+          <a:xfrm>
+            <a:off x="8522208" y="3191256"/>
+            <a:ext cx="411480" cy="411480"/>
+          </a:xfrm>
+          <a:prstGeom prst="rect">
+            <a:avLst/>
+          </a:prstGeom>
+          <a:noFill/>
+        </p:spPr>
+        <p:txBody>
+          <a:bodyPr wrap="square">
+            <a:spAutoFit/>
+          </a:bodyPr>
+          <a:lstStyle/>
+          <a:p>
+            <a:pPr algn="ctr"/>
+            <a:r>
+              <a:rPr sz="1300" b="1" i="0">
+                <a:solidFill>
+                  <a:srgbClr val="0D1B2A"/>
+                </a:solidFill>
+                <a:latin typeface="Calibri"/>
+              </a:rPr>
+              <a:t>5</a:t>
+            </a:r>
+          </a:p>
+        </p:txBody>
+      </p:sp>
+      <p:sp>
+        <p:nvSpPr>
+          <p:cNvPr id="33" name="Rounded Rectangle 32"/>
+          <p:cNvSpPr/>
+          <p:nvPr/>
+        </p:nvSpPr>
+        <p:spPr>
+          <a:xfrm>
+            <a:off x="8321040" y="2103120"/>
+            <a:ext cx="1691640" cy="685800"/>
+          </a:xfrm>
+          <a:prstGeom prst="roundRect">
+            <a:avLst>
+              <a:gd name="adj" fmla="val 5000"/>
+            </a:avLst>
+          </a:prstGeom>
+          <a:solidFill>
+            <a:srgbClr val="112D4A"/>
+          </a:solidFill>
           <a:ln w="19050">
             <a:solidFill>
               <a:srgbClr val="FFBF00"/>
@@ -7338,73 +9031,46 @@
           </a:ln>
         </p:spPr>
         <p:style>
-          <a:lnRef idx="2">
-            <a:schemeClr val="accent1"/>
-          </a:lnRef>
-          <a:fillRef idx="0">
-            <a:schemeClr val="accent1"/>
-          </a:fillRef>
-          <a:effectRef idx="1">
-            <a:schemeClr val="accent1"/>
-          </a:effectRef>
-          <a:fontRef idx="minor">
-            <a:schemeClr val="tx1"/>
-          </a:fontRef>
-        </p:style>
-      </p:cxnSp>
-      <p:sp>
-        <p:nvSpPr>
-          <p:cNvPr id="12" name="Oval 11"/>
-          <p:cNvSpPr/>
-          <p:nvPr/>
-        </p:nvSpPr>
-        <p:spPr>
-          <a:xfrm>
-            <a:off x="2834640" y="3154680"/>
-            <a:ext cx="457200" cy="457200"/>
-          </a:xfrm>
-          <a:prstGeom prst="ellipse">
-            <a:avLst/>
-          </a:prstGeom>
-          <a:solidFill>
-            <a:srgbClr val="00E5FF"/>
-          </a:solidFill>
-          <a:ln>
-            <a:noFill/>
-          </a:ln>
-        </p:spPr>
-        <p:style>
-          <a:lnRef idx="1">
-            <a:schemeClr val="accent1"/>
-          </a:lnRef>
-          <a:fillRef idx="3">
-            <a:schemeClr val="accent1"/>
-          </a:fillRef>
-          <a:effectRef idx="2">
-            <a:schemeClr val="accent1"/>
-          </a:effectRef>
-          <a:fontRef idx="minor">
-            <a:schemeClr val="lt1"/>
-          </a:fontRef>
-        </p:style>
-        <p:txBody>
-          <a:bodyPr rtlCol="0" anchor="ctr"/>
-          <a:lstStyle/>
-          <a:p>
-            <a:pPr algn="ctr"/>
-          </a:p>
-        </p:txBody>
-      </p:sp>
-      <p:sp>
-        <p:nvSpPr>
-          <p:cNvPr id="13" name="TextBox 12"/>
+          <a:lnRef idx="1">
+            <a:schemeClr val="accent1"/>
+          </a:lnRef>
+          <a:fillRef idx="3">
+            <a:schemeClr val="accent1"/>
+          </a:fillRef>
+          <a:effectRef idx="2">
+            <a:schemeClr val="accent1"/>
+          </a:effectRef>
+          <a:fontRef idx="minor">
+            <a:schemeClr val="lt1"/>
+          </a:fontRef>
+        </p:style>
+        <p:txBody>
+          <a:bodyPr rtlCol="0" anchor="ctr" wrap="square"/>
+          <a:lstStyle/>
+          <a:p>
+            <a:pPr algn="ctr"/>
+            <a:r>
+              <a:rPr sz="1300" b="1">
+                <a:solidFill>
+                  <a:srgbClr val="FFBF00"/>
+                </a:solidFill>
+                <a:latin typeface="Calibri"/>
+              </a:rPr>
+              <a:t>Bot Jules</a:t>
+            </a:r>
+          </a:p>
+        </p:txBody>
+      </p:sp>
+      <p:sp>
+        <p:nvSpPr>
+          <p:cNvPr id="34" name="TextBox 33"/>
           <p:cNvSpPr txBox="1"/>
           <p:nvPr/>
         </p:nvSpPr>
         <p:spPr>
           <a:xfrm>
-            <a:off x="2834640" y="3154680"/>
-            <a:ext cx="457200" cy="457200"/>
+            <a:off x="8321040" y="2788920"/>
+            <a:ext cx="1691640" cy="594360"/>
           </a:xfrm>
           <a:prstGeom prst="rect">
             <a:avLst/>
@@ -7419,27 +9085,192 @@
           <a:p>
             <a:pPr algn="ctr"/>
             <a:r>
-              <a:rPr sz="1400" b="1" i="0">
-                <a:solidFill>
-                  <a:srgbClr val="0D1B2A"/>
+              <a:rPr sz="1100" b="0" i="0">
+                <a:solidFill>
+                  <a:srgbClr val="A0B4C8"/>
                 </a:solidFill>
                 <a:latin typeface="Calibri"/>
               </a:rPr>
-              <a:t>2</a:t>
-            </a:r>
-          </a:p>
-        </p:txBody>
-      </p:sp>
-      <p:sp>
-        <p:nvSpPr>
-          <p:cNvPr id="14" name="Rounded Rectangle 13"/>
-          <p:cNvSpPr/>
-          <p:nvPr/>
-        </p:nvSpPr>
-        <p:spPr>
-          <a:xfrm>
-            <a:off x="2560320" y="4023360"/>
-            <a:ext cx="1737360" cy="640080"/>
+              <a:t>Telegram: pytania,
+PR review</a:t>
+            </a:r>
+          </a:p>
+        </p:txBody>
+      </p:sp>
+      <p:sp>
+        <p:nvSpPr>
+          <p:cNvPr id="35" name="Rectangle 34"/>
+          <p:cNvSpPr/>
+          <p:nvPr/>
+        </p:nvSpPr>
+        <p:spPr>
+          <a:xfrm>
+            <a:off x="9148572" y="3383280"/>
+            <a:ext cx="36576" cy="-100584"/>
+          </a:xfrm>
+          <a:prstGeom prst="rect">
+            <a:avLst/>
+          </a:prstGeom>
+          <a:solidFill>
+            <a:srgbClr val="FFBF00"/>
+          </a:solidFill>
+          <a:ln>
+            <a:noFill/>
+          </a:ln>
+        </p:spPr>
+        <p:style>
+          <a:lnRef idx="1">
+            <a:schemeClr val="accent1"/>
+          </a:lnRef>
+          <a:fillRef idx="3">
+            <a:schemeClr val="accent1"/>
+          </a:fillRef>
+          <a:effectRef idx="2">
+            <a:schemeClr val="accent1"/>
+          </a:effectRef>
+          <a:fontRef idx="minor">
+            <a:schemeClr val="lt1"/>
+          </a:fontRef>
+        </p:style>
+        <p:txBody>
+          <a:bodyPr rtlCol="0" anchor="ctr"/>
+          <a:lstStyle/>
+          <a:p>
+            <a:pPr algn="ctr"/>
+          </a:p>
+        </p:txBody>
+      </p:sp>
+      <p:sp>
+        <p:nvSpPr>
+          <p:cNvPr id="36" name="Rounded Rectangle 35"/>
+          <p:cNvSpPr/>
+          <p:nvPr/>
+        </p:nvSpPr>
+        <p:spPr>
+          <a:xfrm>
+            <a:off x="9102852" y="3264408"/>
+            <a:ext cx="128016" cy="128016"/>
+          </a:xfrm>
+          <a:prstGeom prst="roundRect">
+            <a:avLst/>
+          </a:prstGeom>
+          <a:solidFill>
+            <a:srgbClr val="FFBF00"/>
+          </a:solidFill>
+          <a:ln>
+            <a:noFill/>
+          </a:ln>
+        </p:spPr>
+        <p:style>
+          <a:lnRef idx="1">
+            <a:schemeClr val="accent1"/>
+          </a:lnRef>
+          <a:fillRef idx="3">
+            <a:schemeClr val="accent1"/>
+          </a:fillRef>
+          <a:effectRef idx="2">
+            <a:schemeClr val="accent1"/>
+          </a:effectRef>
+          <a:fontRef idx="minor">
+            <a:schemeClr val="lt1"/>
+          </a:fontRef>
+        </p:style>
+        <p:txBody>
+          <a:bodyPr rtlCol="0" anchor="ctr"/>
+          <a:lstStyle/>
+          <a:p>
+            <a:pPr algn="ctr"/>
+          </a:p>
+        </p:txBody>
+      </p:sp>
+      <p:sp>
+        <p:nvSpPr>
+          <p:cNvPr id="37" name="Oval 36"/>
+          <p:cNvSpPr/>
+          <p:nvPr/>
+        </p:nvSpPr>
+        <p:spPr>
+          <a:xfrm>
+            <a:off x="10488168" y="3191256"/>
+            <a:ext cx="411480" cy="411480"/>
+          </a:xfrm>
+          <a:prstGeom prst="ellipse">
+            <a:avLst/>
+          </a:prstGeom>
+          <a:solidFill>
+            <a:srgbClr val="A0B4C8"/>
+          </a:solidFill>
+          <a:ln>
+            <a:noFill/>
+          </a:ln>
+        </p:spPr>
+        <p:style>
+          <a:lnRef idx="1">
+            <a:schemeClr val="accent1"/>
+          </a:lnRef>
+          <a:fillRef idx="3">
+            <a:schemeClr val="accent1"/>
+          </a:fillRef>
+          <a:effectRef idx="2">
+            <a:schemeClr val="accent1"/>
+          </a:effectRef>
+          <a:fontRef idx="minor">
+            <a:schemeClr val="lt1"/>
+          </a:fontRef>
+        </p:style>
+        <p:txBody>
+          <a:bodyPr rtlCol="0" anchor="ctr"/>
+          <a:lstStyle/>
+          <a:p>
+            <a:pPr algn="ctr"/>
+          </a:p>
+        </p:txBody>
+      </p:sp>
+      <p:sp>
+        <p:nvSpPr>
+          <p:cNvPr id="38" name="TextBox 37"/>
+          <p:cNvSpPr txBox="1"/>
+          <p:nvPr/>
+        </p:nvSpPr>
+        <p:spPr>
+          <a:xfrm>
+            <a:off x="10488168" y="3191256"/>
+            <a:ext cx="411480" cy="411480"/>
+          </a:xfrm>
+          <a:prstGeom prst="rect">
+            <a:avLst/>
+          </a:prstGeom>
+          <a:noFill/>
+        </p:spPr>
+        <p:txBody>
+          <a:bodyPr wrap="square">
+            <a:spAutoFit/>
+          </a:bodyPr>
+          <a:lstStyle/>
+          <a:p>
+            <a:pPr algn="ctr"/>
+            <a:r>
+              <a:rPr sz="1300" b="1" i="0">
+                <a:solidFill>
+                  <a:srgbClr val="0D1B2A"/>
+                </a:solidFill>
+                <a:latin typeface="Calibri"/>
+              </a:rPr>
+              <a:t>6</a:t>
+            </a:r>
+          </a:p>
+        </p:txBody>
+      </p:sp>
+      <p:sp>
+        <p:nvSpPr>
+          <p:cNvPr id="39" name="Rounded Rectangle 38"/>
+          <p:cNvSpPr/>
+          <p:nvPr/>
+        </p:nvSpPr>
+        <p:spPr>
+          <a:xfrm>
+            <a:off x="10287000" y="4069080"/>
+            <a:ext cx="1691640" cy="685800"/>
           </a:xfrm>
           <a:prstGeom prst="roundRect">
             <a:avLst>
@@ -7451,830 +9282,6 @@
           </a:solidFill>
           <a:ln w="19050">
             <a:solidFill>
-              <a:srgbClr val="00E5FF"/>
-            </a:solidFill>
-          </a:ln>
-        </p:spPr>
-        <p:style>
-          <a:lnRef idx="1">
-            <a:schemeClr val="accent1"/>
-          </a:lnRef>
-          <a:fillRef idx="3">
-            <a:schemeClr val="accent1"/>
-          </a:fillRef>
-          <a:effectRef idx="2">
-            <a:schemeClr val="accent1"/>
-          </a:effectRef>
-          <a:fontRef idx="minor">
-            <a:schemeClr val="lt1"/>
-          </a:fontRef>
-        </p:style>
-        <p:txBody>
-          <a:bodyPr rtlCol="0" anchor="ctr" wrap="square"/>
-          <a:lstStyle/>
-          <a:p>
-            <a:pPr algn="ctr"/>
-            <a:r>
-              <a:rPr sz="1300" b="1">
-                <a:solidFill>
-                  <a:srgbClr val="00E5FF"/>
-                </a:solidFill>
-                <a:latin typeface="Calibri"/>
-              </a:rPr>
-              <a:t>Web
-Dashboard</a:t>
-            </a:r>
-          </a:p>
-        </p:txBody>
-      </p:sp>
-      <p:sp>
-        <p:nvSpPr>
-          <p:cNvPr id="15" name="TextBox 14"/>
-          <p:cNvSpPr txBox="1"/>
-          <p:nvPr/>
-        </p:nvSpPr>
-        <p:spPr>
-          <a:xfrm>
-            <a:off x="2560320" y="4709160"/>
-            <a:ext cx="1737360" cy="731520"/>
-          </a:xfrm>
-          <a:prstGeom prst="rect">
-            <a:avLst/>
-          </a:prstGeom>
-          <a:noFill/>
-        </p:spPr>
-        <p:txBody>
-          <a:bodyPr wrap="square">
-            <a:spAutoFit/>
-          </a:bodyPr>
-          <a:lstStyle/>
-          <a:p>
-            <a:pPr algn="ctr"/>
-            <a:r>
-              <a:rPr sz="1100" b="0" i="0">
-                <a:solidFill>
-                  <a:srgbClr val="A0B4C8"/>
-                </a:solidFill>
-                <a:latin typeface="Calibri"/>
-              </a:rPr>
-              <a:t>Przegląd CVE,
-filtrowanie</a:t>
-            </a:r>
-          </a:p>
-        </p:txBody>
-      </p:sp>
-      <p:cxnSp>
-        <p:nvCxnSpPr>
-          <p:cNvPr id="16" name="Connector 15"/>
-          <p:cNvCxnSpPr/>
-          <p:nvPr/>
-        </p:nvCxnSpPr>
-        <p:spPr>
-          <a:xfrm>
-            <a:off x="3063240" y="3611880"/>
-            <a:ext cx="0" cy="411480"/>
-          </a:xfrm>
-          <a:prstGeom prst="line">
-            <a:avLst/>
-          </a:prstGeom>
-          <a:ln w="19050">
-            <a:solidFill>
-              <a:srgbClr val="00E5FF"/>
-            </a:solidFill>
-          </a:ln>
-        </p:spPr>
-        <p:style>
-          <a:lnRef idx="2">
-            <a:schemeClr val="accent1"/>
-          </a:lnRef>
-          <a:fillRef idx="0">
-            <a:schemeClr val="accent1"/>
-          </a:fillRef>
-          <a:effectRef idx="1">
-            <a:schemeClr val="accent1"/>
-          </a:effectRef>
-          <a:fontRef idx="minor">
-            <a:schemeClr val="tx1"/>
-          </a:fontRef>
-        </p:style>
-      </p:cxnSp>
-      <p:sp>
-        <p:nvSpPr>
-          <p:cNvPr id="17" name="Oval 16"/>
-          <p:cNvSpPr/>
-          <p:nvPr/>
-        </p:nvSpPr>
-        <p:spPr>
-          <a:xfrm>
-            <a:off x="4937760" y="3154680"/>
-            <a:ext cx="457200" cy="457200"/>
-          </a:xfrm>
-          <a:prstGeom prst="ellipse">
-            <a:avLst/>
-          </a:prstGeom>
-          <a:solidFill>
-            <a:srgbClr val="00E676"/>
-          </a:solidFill>
-          <a:ln>
-            <a:noFill/>
-          </a:ln>
-        </p:spPr>
-        <p:style>
-          <a:lnRef idx="1">
-            <a:schemeClr val="accent1"/>
-          </a:lnRef>
-          <a:fillRef idx="3">
-            <a:schemeClr val="accent1"/>
-          </a:fillRef>
-          <a:effectRef idx="2">
-            <a:schemeClr val="accent1"/>
-          </a:effectRef>
-          <a:fontRef idx="minor">
-            <a:schemeClr val="lt1"/>
-          </a:fontRef>
-        </p:style>
-        <p:txBody>
-          <a:bodyPr rtlCol="0" anchor="ctr"/>
-          <a:lstStyle/>
-          <a:p>
-            <a:pPr algn="ctr"/>
-          </a:p>
-        </p:txBody>
-      </p:sp>
-      <p:sp>
-        <p:nvSpPr>
-          <p:cNvPr id="18" name="TextBox 17"/>
-          <p:cNvSpPr txBox="1"/>
-          <p:nvPr/>
-        </p:nvSpPr>
-        <p:spPr>
-          <a:xfrm>
-            <a:off x="4937760" y="3154680"/>
-            <a:ext cx="457200" cy="457200"/>
-          </a:xfrm>
-          <a:prstGeom prst="rect">
-            <a:avLst/>
-          </a:prstGeom>
-          <a:noFill/>
-        </p:spPr>
-        <p:txBody>
-          <a:bodyPr wrap="square">
-            <a:spAutoFit/>
-          </a:bodyPr>
-          <a:lstStyle/>
-          <a:p>
-            <a:pPr algn="ctr"/>
-            <a:r>
-              <a:rPr sz="1400" b="1" i="0">
-                <a:solidFill>
-                  <a:srgbClr val="0D1B2A"/>
-                </a:solidFill>
-                <a:latin typeface="Calibri"/>
-              </a:rPr>
-              <a:t>3</a:t>
-            </a:r>
-          </a:p>
-        </p:txBody>
-      </p:sp>
-      <p:sp>
-        <p:nvSpPr>
-          <p:cNvPr id="19" name="Rounded Rectangle 18"/>
-          <p:cNvSpPr/>
-          <p:nvPr/>
-        </p:nvSpPr>
-        <p:spPr>
-          <a:xfrm>
-            <a:off x="4663440" y="1463040"/>
-            <a:ext cx="1737360" cy="640080"/>
-          </a:xfrm>
-          <a:prstGeom prst="roundRect">
-            <a:avLst>
-              <a:gd name="adj" fmla="val 5000"/>
-            </a:avLst>
-          </a:prstGeom>
-          <a:solidFill>
-            <a:srgbClr val="112D4A"/>
-          </a:solidFill>
-          <a:ln w="19050">
-            <a:solidFill>
-              <a:srgbClr val="00E676"/>
-            </a:solidFill>
-          </a:ln>
-        </p:spPr>
-        <p:style>
-          <a:lnRef idx="1">
-            <a:schemeClr val="accent1"/>
-          </a:lnRef>
-          <a:fillRef idx="3">
-            <a:schemeClr val="accent1"/>
-          </a:fillRef>
-          <a:effectRef idx="2">
-            <a:schemeClr val="accent1"/>
-          </a:effectRef>
-          <a:fontRef idx="minor">
-            <a:schemeClr val="lt1"/>
-          </a:fontRef>
-        </p:style>
-        <p:txBody>
-          <a:bodyPr rtlCol="0" anchor="ctr" wrap="square"/>
-          <a:lstStyle/>
-          <a:p>
-            <a:pPr algn="ctr"/>
-            <a:r>
-              <a:rPr sz="1300" b="1">
-                <a:solidFill>
-                  <a:srgbClr val="00E676"/>
-                </a:solidFill>
-                <a:latin typeface="Calibri"/>
-              </a:rPr>
-              <a:t>Aktualizacja
-Statusu</a:t>
-            </a:r>
-          </a:p>
-        </p:txBody>
-      </p:sp>
-      <p:sp>
-        <p:nvSpPr>
-          <p:cNvPr id="20" name="TextBox 19"/>
-          <p:cNvSpPr txBox="1"/>
-          <p:nvPr/>
-        </p:nvSpPr>
-        <p:spPr>
-          <a:xfrm>
-            <a:off x="4663440" y="2148840"/>
-            <a:ext cx="1737360" cy="731520"/>
-          </a:xfrm>
-          <a:prstGeom prst="rect">
-            <a:avLst/>
-          </a:prstGeom>
-          <a:noFill/>
-        </p:spPr>
-        <p:txBody>
-          <a:bodyPr wrap="square">
-            <a:spAutoFit/>
-          </a:bodyPr>
-          <a:lstStyle/>
-          <a:p>
-            <a:pPr algn="ctr"/>
-            <a:r>
-              <a:rPr sz="1100" b="0" i="0">
-                <a:solidFill>
-                  <a:srgbClr val="A0B4C8"/>
-                </a:solidFill>
-                <a:latin typeface="Calibri"/>
-              </a:rPr>
-              <a:t>action_taken
-ticket_number</a:t>
-            </a:r>
-          </a:p>
-        </p:txBody>
-      </p:sp>
-      <p:cxnSp>
-        <p:nvCxnSpPr>
-          <p:cNvPr id="21" name="Connector 20"/>
-          <p:cNvCxnSpPr/>
-          <p:nvPr/>
-        </p:nvCxnSpPr>
-        <p:spPr>
-          <a:xfrm>
-            <a:off x="5166360" y="2103120"/>
-            <a:ext cx="0" cy="1261872"/>
-          </a:xfrm>
-          <a:prstGeom prst="line">
-            <a:avLst/>
-          </a:prstGeom>
-          <a:ln w="19050">
-            <a:solidFill>
-              <a:srgbClr val="00E676"/>
-            </a:solidFill>
-          </a:ln>
-        </p:spPr>
-        <p:style>
-          <a:lnRef idx="2">
-            <a:schemeClr val="accent1"/>
-          </a:lnRef>
-          <a:fillRef idx="0">
-            <a:schemeClr val="accent1"/>
-          </a:fillRef>
-          <a:effectRef idx="1">
-            <a:schemeClr val="accent1"/>
-          </a:effectRef>
-          <a:fontRef idx="minor">
-            <a:schemeClr val="tx1"/>
-          </a:fontRef>
-        </p:style>
-      </p:cxnSp>
-      <p:sp>
-        <p:nvSpPr>
-          <p:cNvPr id="22" name="Oval 21"/>
-          <p:cNvSpPr/>
-          <p:nvPr/>
-        </p:nvSpPr>
-        <p:spPr>
-          <a:xfrm>
-            <a:off x="7040880" y="3154680"/>
-            <a:ext cx="457200" cy="457200"/>
-          </a:xfrm>
-          <a:prstGeom prst="ellipse">
-            <a:avLst/>
-          </a:prstGeom>
-          <a:solidFill>
-            <a:srgbClr val="00E5FF"/>
-          </a:solidFill>
-          <a:ln>
-            <a:noFill/>
-          </a:ln>
-        </p:spPr>
-        <p:style>
-          <a:lnRef idx="1">
-            <a:schemeClr val="accent1"/>
-          </a:lnRef>
-          <a:fillRef idx="3">
-            <a:schemeClr val="accent1"/>
-          </a:fillRef>
-          <a:effectRef idx="2">
-            <a:schemeClr val="accent1"/>
-          </a:effectRef>
-          <a:fontRef idx="minor">
-            <a:schemeClr val="lt1"/>
-          </a:fontRef>
-        </p:style>
-        <p:txBody>
-          <a:bodyPr rtlCol="0" anchor="ctr"/>
-          <a:lstStyle/>
-          <a:p>
-            <a:pPr algn="ctr"/>
-          </a:p>
-        </p:txBody>
-      </p:sp>
-      <p:sp>
-        <p:nvSpPr>
-          <p:cNvPr id="23" name="TextBox 22"/>
-          <p:cNvSpPr txBox="1"/>
-          <p:nvPr/>
-        </p:nvSpPr>
-        <p:spPr>
-          <a:xfrm>
-            <a:off x="7040880" y="3154680"/>
-            <a:ext cx="457200" cy="457200"/>
-          </a:xfrm>
-          <a:prstGeom prst="rect">
-            <a:avLst/>
-          </a:prstGeom>
-          <a:noFill/>
-        </p:spPr>
-        <p:txBody>
-          <a:bodyPr wrap="square">
-            <a:spAutoFit/>
-          </a:bodyPr>
-          <a:lstStyle/>
-          <a:p>
-            <a:pPr algn="ctr"/>
-            <a:r>
-              <a:rPr sz="1400" b="1" i="0">
-                <a:solidFill>
-                  <a:srgbClr val="0D1B2A"/>
-                </a:solidFill>
-                <a:latin typeface="Calibri"/>
-              </a:rPr>
-              <a:t>4</a:t>
-            </a:r>
-          </a:p>
-        </p:txBody>
-      </p:sp>
-      <p:sp>
-        <p:nvSpPr>
-          <p:cNvPr id="24" name="Rounded Rectangle 23"/>
-          <p:cNvSpPr/>
-          <p:nvPr/>
-        </p:nvSpPr>
-        <p:spPr>
-          <a:xfrm>
-            <a:off x="6766560" y="4023360"/>
-            <a:ext cx="1737360" cy="640080"/>
-          </a:xfrm>
-          <a:prstGeom prst="roundRect">
-            <a:avLst>
-              <a:gd name="adj" fmla="val 5000"/>
-            </a:avLst>
-          </a:prstGeom>
-          <a:solidFill>
-            <a:srgbClr val="112D4A"/>
-          </a:solidFill>
-          <a:ln w="19050">
-            <a:solidFill>
-              <a:srgbClr val="00E5FF"/>
-            </a:solidFill>
-          </a:ln>
-        </p:spPr>
-        <p:style>
-          <a:lnRef idx="1">
-            <a:schemeClr val="accent1"/>
-          </a:lnRef>
-          <a:fillRef idx="3">
-            <a:schemeClr val="accent1"/>
-          </a:fillRef>
-          <a:effectRef idx="2">
-            <a:schemeClr val="accent1"/>
-          </a:effectRef>
-          <a:fontRef idx="minor">
-            <a:schemeClr val="lt1"/>
-          </a:fontRef>
-        </p:style>
-        <p:txBody>
-          <a:bodyPr rtlCol="0" anchor="ctr" wrap="square"/>
-          <a:lstStyle/>
-          <a:p>
-            <a:pPr algn="ctr"/>
-            <a:r>
-              <a:rPr sz="1300" b="1">
-                <a:solidFill>
-                  <a:srgbClr val="00E5FF"/>
-                </a:solidFill>
-                <a:latin typeface="Calibri"/>
-              </a:rPr>
-              <a:t>Mobile
-Podgląd</a:t>
-            </a:r>
-          </a:p>
-        </p:txBody>
-      </p:sp>
-      <p:sp>
-        <p:nvSpPr>
-          <p:cNvPr id="25" name="TextBox 24"/>
-          <p:cNvSpPr txBox="1"/>
-          <p:nvPr/>
-        </p:nvSpPr>
-        <p:spPr>
-          <a:xfrm>
-            <a:off x="6766560" y="4709160"/>
-            <a:ext cx="1737360" cy="731520"/>
-          </a:xfrm>
-          <a:prstGeom prst="rect">
-            <a:avLst/>
-          </a:prstGeom>
-          <a:noFill/>
-        </p:spPr>
-        <p:txBody>
-          <a:bodyPr wrap="square">
-            <a:spAutoFit/>
-          </a:bodyPr>
-          <a:lstStyle/>
-          <a:p>
-            <a:pPr algn="ctr"/>
-            <a:r>
-              <a:rPr sz="1100" b="0" i="0">
-                <a:solidFill>
-                  <a:srgbClr val="A0B4C8"/>
-                </a:solidFill>
-                <a:latin typeface="Calibri"/>
-              </a:rPr>
-              <a:t>iOS: czyta /api/cves
-przez ZeroTier</a:t>
-            </a:r>
-          </a:p>
-        </p:txBody>
-      </p:sp>
-      <p:cxnSp>
-        <p:nvCxnSpPr>
-          <p:cNvPr id="26" name="Connector 25"/>
-          <p:cNvCxnSpPr/>
-          <p:nvPr/>
-        </p:nvCxnSpPr>
-        <p:spPr>
-          <a:xfrm>
-            <a:off x="7269480" y="3611880"/>
-            <a:ext cx="0" cy="411480"/>
-          </a:xfrm>
-          <a:prstGeom prst="line">
-            <a:avLst/>
-          </a:prstGeom>
-          <a:ln w="19050">
-            <a:solidFill>
-              <a:srgbClr val="00E5FF"/>
-            </a:solidFill>
-          </a:ln>
-        </p:spPr>
-        <p:style>
-          <a:lnRef idx="2">
-            <a:schemeClr val="accent1"/>
-          </a:lnRef>
-          <a:fillRef idx="0">
-            <a:schemeClr val="accent1"/>
-          </a:fillRef>
-          <a:effectRef idx="1">
-            <a:schemeClr val="accent1"/>
-          </a:effectRef>
-          <a:fontRef idx="minor">
-            <a:schemeClr val="tx1"/>
-          </a:fontRef>
-        </p:style>
-      </p:cxnSp>
-      <p:sp>
-        <p:nvSpPr>
-          <p:cNvPr id="27" name="Oval 26"/>
-          <p:cNvSpPr/>
-          <p:nvPr/>
-        </p:nvSpPr>
-        <p:spPr>
-          <a:xfrm>
-            <a:off x="9144000" y="3154680"/>
-            <a:ext cx="457200" cy="457200"/>
-          </a:xfrm>
-          <a:prstGeom prst="ellipse">
-            <a:avLst/>
-          </a:prstGeom>
-          <a:solidFill>
-            <a:srgbClr val="FFBF00"/>
-          </a:solidFill>
-          <a:ln>
-            <a:noFill/>
-          </a:ln>
-        </p:spPr>
-        <p:style>
-          <a:lnRef idx="1">
-            <a:schemeClr val="accent1"/>
-          </a:lnRef>
-          <a:fillRef idx="3">
-            <a:schemeClr val="accent1"/>
-          </a:fillRef>
-          <a:effectRef idx="2">
-            <a:schemeClr val="accent1"/>
-          </a:effectRef>
-          <a:fontRef idx="minor">
-            <a:schemeClr val="lt1"/>
-          </a:fontRef>
-        </p:style>
-        <p:txBody>
-          <a:bodyPr rtlCol="0" anchor="ctr"/>
-          <a:lstStyle/>
-          <a:p>
-            <a:pPr algn="ctr"/>
-          </a:p>
-        </p:txBody>
-      </p:sp>
-      <p:sp>
-        <p:nvSpPr>
-          <p:cNvPr id="28" name="TextBox 27"/>
-          <p:cNvSpPr txBox="1"/>
-          <p:nvPr/>
-        </p:nvSpPr>
-        <p:spPr>
-          <a:xfrm>
-            <a:off x="9144000" y="3154680"/>
-            <a:ext cx="457200" cy="457200"/>
-          </a:xfrm>
-          <a:prstGeom prst="rect">
-            <a:avLst/>
-          </a:prstGeom>
-          <a:noFill/>
-        </p:spPr>
-        <p:txBody>
-          <a:bodyPr wrap="square">
-            <a:spAutoFit/>
-          </a:bodyPr>
-          <a:lstStyle/>
-          <a:p>
-            <a:pPr algn="ctr"/>
-            <a:r>
-              <a:rPr sz="1400" b="1" i="0">
-                <a:solidFill>
-                  <a:srgbClr val="0D1B2A"/>
-                </a:solidFill>
-                <a:latin typeface="Calibri"/>
-              </a:rPr>
-              <a:t>5</a:t>
-            </a:r>
-          </a:p>
-        </p:txBody>
-      </p:sp>
-      <p:sp>
-        <p:nvSpPr>
-          <p:cNvPr id="29" name="Rounded Rectangle 28"/>
-          <p:cNvSpPr/>
-          <p:nvPr/>
-        </p:nvSpPr>
-        <p:spPr>
-          <a:xfrm>
-            <a:off x="8869680" y="1463040"/>
-            <a:ext cx="1737360" cy="640080"/>
-          </a:xfrm>
-          <a:prstGeom prst="roundRect">
-            <a:avLst>
-              <a:gd name="adj" fmla="val 5000"/>
-            </a:avLst>
-          </a:prstGeom>
-          <a:solidFill>
-            <a:srgbClr val="112D4A"/>
-          </a:solidFill>
-          <a:ln w="19050">
-            <a:solidFill>
-              <a:srgbClr val="FFBF00"/>
-            </a:solidFill>
-          </a:ln>
-        </p:spPr>
-        <p:style>
-          <a:lnRef idx="1">
-            <a:schemeClr val="accent1"/>
-          </a:lnRef>
-          <a:fillRef idx="3">
-            <a:schemeClr val="accent1"/>
-          </a:fillRef>
-          <a:effectRef idx="2">
-            <a:schemeClr val="accent1"/>
-          </a:effectRef>
-          <a:fontRef idx="minor">
-            <a:schemeClr val="lt1"/>
-          </a:fontRef>
-        </p:style>
-        <p:txBody>
-          <a:bodyPr rtlCol="0" anchor="ctr" wrap="square"/>
-          <a:lstStyle/>
-          <a:p>
-            <a:pPr algn="ctr"/>
-            <a:r>
-              <a:rPr sz="1300" b="1">
-                <a:solidFill>
-                  <a:srgbClr val="FFBF00"/>
-                </a:solidFill>
-                <a:latin typeface="Calibri"/>
-              </a:rPr>
-              <a:t>Bot
-Jules</a:t>
-            </a:r>
-          </a:p>
-        </p:txBody>
-      </p:sp>
-      <p:sp>
-        <p:nvSpPr>
-          <p:cNvPr id="30" name="TextBox 29"/>
-          <p:cNvSpPr txBox="1"/>
-          <p:nvPr/>
-        </p:nvSpPr>
-        <p:spPr>
-          <a:xfrm>
-            <a:off x="8869680" y="2148840"/>
-            <a:ext cx="1737360" cy="731520"/>
-          </a:xfrm>
-          <a:prstGeom prst="rect">
-            <a:avLst/>
-          </a:prstGeom>
-          <a:noFill/>
-        </p:spPr>
-        <p:txBody>
-          <a:bodyPr wrap="square">
-            <a:spAutoFit/>
-          </a:bodyPr>
-          <a:lstStyle/>
-          <a:p>
-            <a:pPr algn="ctr"/>
-            <a:r>
-              <a:rPr sz="1100" b="0" i="0">
-                <a:solidFill>
-                  <a:srgbClr val="A0B4C8"/>
-                </a:solidFill>
-                <a:latin typeface="Calibri"/>
-              </a:rPr>
-              <a:t>Telegram: pytania,
-raporty, PR review</a:t>
-            </a:r>
-          </a:p>
-        </p:txBody>
-      </p:sp>
-      <p:cxnSp>
-        <p:nvCxnSpPr>
-          <p:cNvPr id="31" name="Connector 30"/>
-          <p:cNvCxnSpPr/>
-          <p:nvPr/>
-        </p:nvCxnSpPr>
-        <p:spPr>
-          <a:xfrm>
-            <a:off x="9372600" y="2103120"/>
-            <a:ext cx="0" cy="1261872"/>
-          </a:xfrm>
-          <a:prstGeom prst="line">
-            <a:avLst/>
-          </a:prstGeom>
-          <a:ln w="19050">
-            <a:solidFill>
-              <a:srgbClr val="FFBF00"/>
-            </a:solidFill>
-          </a:ln>
-        </p:spPr>
-        <p:style>
-          <a:lnRef idx="2">
-            <a:schemeClr val="accent1"/>
-          </a:lnRef>
-          <a:fillRef idx="0">
-            <a:schemeClr val="accent1"/>
-          </a:fillRef>
-          <a:effectRef idx="1">
-            <a:schemeClr val="accent1"/>
-          </a:effectRef>
-          <a:fontRef idx="minor">
-            <a:schemeClr val="tx1"/>
-          </a:fontRef>
-        </p:style>
-      </p:cxnSp>
-      <p:sp>
-        <p:nvSpPr>
-          <p:cNvPr id="32" name="Oval 31"/>
-          <p:cNvSpPr/>
-          <p:nvPr/>
-        </p:nvSpPr>
-        <p:spPr>
-          <a:xfrm>
-            <a:off x="11064240" y="3154680"/>
-            <a:ext cx="457200" cy="457200"/>
-          </a:xfrm>
-          <a:prstGeom prst="ellipse">
-            <a:avLst/>
-          </a:prstGeom>
-          <a:solidFill>
-            <a:srgbClr val="A0B4C8"/>
-          </a:solidFill>
-          <a:ln>
-            <a:noFill/>
-          </a:ln>
-        </p:spPr>
-        <p:style>
-          <a:lnRef idx="1">
-            <a:schemeClr val="accent1"/>
-          </a:lnRef>
-          <a:fillRef idx="3">
-            <a:schemeClr val="accent1"/>
-          </a:fillRef>
-          <a:effectRef idx="2">
-            <a:schemeClr val="accent1"/>
-          </a:effectRef>
-          <a:fontRef idx="minor">
-            <a:schemeClr val="lt1"/>
-          </a:fontRef>
-        </p:style>
-        <p:txBody>
-          <a:bodyPr rtlCol="0" anchor="ctr"/>
-          <a:lstStyle/>
-          <a:p>
-            <a:pPr algn="ctr"/>
-          </a:p>
-        </p:txBody>
-      </p:sp>
-      <p:sp>
-        <p:nvSpPr>
-          <p:cNvPr id="33" name="TextBox 32"/>
-          <p:cNvSpPr txBox="1"/>
-          <p:nvPr/>
-        </p:nvSpPr>
-        <p:spPr>
-          <a:xfrm>
-            <a:off x="11064240" y="3154680"/>
-            <a:ext cx="457200" cy="457200"/>
-          </a:xfrm>
-          <a:prstGeom prst="rect">
-            <a:avLst/>
-          </a:prstGeom>
-          <a:noFill/>
-        </p:spPr>
-        <p:txBody>
-          <a:bodyPr wrap="square">
-            <a:spAutoFit/>
-          </a:bodyPr>
-          <a:lstStyle/>
-          <a:p>
-            <a:pPr algn="ctr"/>
-            <a:r>
-              <a:rPr sz="1400" b="1" i="0">
-                <a:solidFill>
-                  <a:srgbClr val="0D1B2A"/>
-                </a:solidFill>
-                <a:latin typeface="Calibri"/>
-              </a:rPr>
-              <a:t>6</a:t>
-            </a:r>
-          </a:p>
-        </p:txBody>
-      </p:sp>
-      <p:sp>
-        <p:nvSpPr>
-          <p:cNvPr id="34" name="Rounded Rectangle 33"/>
-          <p:cNvSpPr/>
-          <p:nvPr/>
-        </p:nvSpPr>
-        <p:spPr>
-          <a:xfrm>
-            <a:off x="10789920" y="4023360"/>
-            <a:ext cx="1737360" cy="640080"/>
-          </a:xfrm>
-          <a:prstGeom prst="roundRect">
-            <a:avLst>
-              <a:gd name="adj" fmla="val 5000"/>
-            </a:avLst>
-          </a:prstGeom>
-          <a:solidFill>
-            <a:srgbClr val="112D4A"/>
-          </a:solidFill>
-          <a:ln w="19050">
-            <a:solidFill>
               <a:srgbClr val="A0B4C8"/>
             </a:solidFill>
           </a:ln>
@@ -8313,14 +9320,14 @@
       </p:sp>
       <p:sp>
         <p:nvSpPr>
-          <p:cNvPr id="35" name="TextBox 34"/>
+          <p:cNvPr id="40" name="TextBox 39"/>
           <p:cNvSpPr txBox="1"/>
           <p:nvPr/>
         </p:nvSpPr>
         <p:spPr>
           <a:xfrm>
-            <a:off x="10789920" y="4709160"/>
-            <a:ext cx="1737360" cy="731520"/>
+            <a:off x="10287000" y="4754880"/>
+            <a:ext cx="1691640" cy="594360"/>
           </a:xfrm>
           <a:prstGeom prst="rect">
             <a:avLst/>
@@ -8347,51 +9354,102 @@
           </a:p>
         </p:txBody>
       </p:sp>
-      <p:cxnSp>
-        <p:nvCxnSpPr>
-          <p:cNvPr id="36" name="Connector 35"/>
-          <p:cNvCxnSpPr/>
-          <p:nvPr/>
-        </p:nvCxnSpPr>
-        <p:spPr>
-          <a:xfrm>
-            <a:off x="11292840" y="3611880"/>
-            <a:ext cx="0" cy="411480"/>
-          </a:xfrm>
-          <a:prstGeom prst="line">
-            <a:avLst/>
-          </a:prstGeom>
-          <a:ln w="19050">
-            <a:solidFill>
-              <a:srgbClr val="A0B4C8"/>
-            </a:solidFill>
-          </a:ln>
-        </p:spPr>
-        <p:style>
-          <a:lnRef idx="2">
-            <a:schemeClr val="accent1"/>
-          </a:lnRef>
-          <a:fillRef idx="0">
-            <a:schemeClr val="accent1"/>
-          </a:fillRef>
-          <a:effectRef idx="1">
-            <a:schemeClr val="accent1"/>
-          </a:effectRef>
-          <a:fontRef idx="minor">
-            <a:schemeClr val="tx1"/>
-          </a:fontRef>
-        </p:style>
-      </p:cxnSp>
-      <p:sp>
-        <p:nvSpPr>
-          <p:cNvPr id="37" name="TextBox 36"/>
+      <p:sp>
+        <p:nvSpPr>
+          <p:cNvPr id="41" name="Rectangle 40"/>
+          <p:cNvSpPr/>
+          <p:nvPr/>
+        </p:nvSpPr>
+        <p:spPr>
+          <a:xfrm>
+            <a:off x="11114532" y="3474720"/>
+            <a:ext cx="36576" cy="484632"/>
+          </a:xfrm>
+          <a:prstGeom prst="rect">
+            <a:avLst/>
+          </a:prstGeom>
+          <a:solidFill>
+            <a:srgbClr val="A0B4C8"/>
+          </a:solidFill>
+          <a:ln>
+            <a:noFill/>
+          </a:ln>
+        </p:spPr>
+        <p:style>
+          <a:lnRef idx="1">
+            <a:schemeClr val="accent1"/>
+          </a:lnRef>
+          <a:fillRef idx="3">
+            <a:schemeClr val="accent1"/>
+          </a:fillRef>
+          <a:effectRef idx="2">
+            <a:schemeClr val="accent1"/>
+          </a:effectRef>
+          <a:fontRef idx="minor">
+            <a:schemeClr val="lt1"/>
+          </a:fontRef>
+        </p:style>
+        <p:txBody>
+          <a:bodyPr rtlCol="0" anchor="ctr"/>
+          <a:lstStyle/>
+          <a:p>
+            <a:pPr algn="ctr"/>
+          </a:p>
+        </p:txBody>
+      </p:sp>
+      <p:sp>
+        <p:nvSpPr>
+          <p:cNvPr id="42" name="Rounded Rectangle 41"/>
+          <p:cNvSpPr/>
+          <p:nvPr/>
+        </p:nvSpPr>
+        <p:spPr>
+          <a:xfrm>
+            <a:off x="11068812" y="3941064"/>
+            <a:ext cx="128016" cy="128016"/>
+          </a:xfrm>
+          <a:prstGeom prst="roundRect">
+            <a:avLst/>
+          </a:prstGeom>
+          <a:solidFill>
+            <a:srgbClr val="A0B4C8"/>
+          </a:solidFill>
+          <a:ln>
+            <a:noFill/>
+          </a:ln>
+        </p:spPr>
+        <p:style>
+          <a:lnRef idx="1">
+            <a:schemeClr val="accent1"/>
+          </a:lnRef>
+          <a:fillRef idx="3">
+            <a:schemeClr val="accent1"/>
+          </a:fillRef>
+          <a:effectRef idx="2">
+            <a:schemeClr val="accent1"/>
+          </a:effectRef>
+          <a:fontRef idx="minor">
+            <a:schemeClr val="lt1"/>
+          </a:fontRef>
+        </p:style>
+        <p:txBody>
+          <a:bodyPr rtlCol="0" anchor="ctr"/>
+          <a:lstStyle/>
+          <a:p>
+            <a:pPr algn="ctr"/>
+          </a:p>
+        </p:txBody>
+      </p:sp>
+      <p:sp>
+        <p:nvSpPr>
+          <p:cNvPr id="43" name="TextBox 42"/>
           <p:cNvSpPr txBox="1"/>
           <p:nvPr/>
         </p:nvSpPr>
         <p:spPr>
           <a:xfrm>
-            <a:off x="0" y="1417320"/>
-            <a:ext cx="457200" cy="2286000"/>
+            <a:off x="457200" y="5074920"/>
+            <a:ext cx="11247120" cy="365760"/>
           </a:xfrm>
           <a:prstGeom prst="rect">
             <a:avLst/>
@@ -8404,29 +9462,29 @@
           </a:bodyPr>
           <a:lstStyle/>
           <a:p>
-            <a:pPr algn="ctr"/>
-            <a:r>
-              <a:rPr sz="900" b="0" i="0">
+            <a:pPr algn="l"/>
+            <a:r>
+              <a:rPr sz="1000" b="0" i="0">
                 <a:solidFill>
                   <a:srgbClr val="FFBF00"/>
                 </a:solidFill>
                 <a:latin typeface="Calibri"/>
               </a:rPr>
-              <a:t>👔 Admin / Security Team</a:t>
-            </a:r>
-          </a:p>
-        </p:txBody>
-      </p:sp>
-      <p:sp>
-        <p:nvSpPr>
-          <p:cNvPr id="38" name="TextBox 37"/>
+              <a:t>👔 Admin / Security Team ──────────────────────────────────────────────────────</a:t>
+            </a:r>
+          </a:p>
+        </p:txBody>
+      </p:sp>
+      <p:sp>
+        <p:nvSpPr>
+          <p:cNvPr id="44" name="TextBox 43"/>
           <p:cNvSpPr txBox="1"/>
           <p:nvPr/>
         </p:nvSpPr>
         <p:spPr>
           <a:xfrm>
-            <a:off x="0" y="3840480"/>
-            <a:ext cx="457200" cy="2286000"/>
+            <a:off x="457200" y="5440680"/>
+            <a:ext cx="11247120" cy="365760"/>
           </a:xfrm>
           <a:prstGeom prst="rect">
             <a:avLst/>
@@ -8439,22 +9497,22 @@
           </a:bodyPr>
           <a:lstStyle/>
           <a:p>
-            <a:pPr algn="ctr"/>
-            <a:r>
-              <a:rPr sz="900" b="0" i="0">
+            <a:pPr algn="l"/>
+            <a:r>
+              <a:rPr sz="1000" b="0" i="0">
                 <a:solidFill>
                   <a:srgbClr val="00E5FF"/>
                 </a:solidFill>
                 <a:latin typeface="Calibri"/>
               </a:rPr>
-              <a:t>💻 Developer</a:t>
-            </a:r>
-          </a:p>
-        </p:txBody>
-      </p:sp>
-      <p:sp>
-        <p:nvSpPr>
-          <p:cNvPr id="39" name="TextBox 38"/>
+              <a:t>💻 Developer / DevOps ──────────────────────────────────────────────────────────</a:t>
+            </a:r>
+          </a:p>
+        </p:txBody>
+      </p:sp>
+      <p:sp>
+        <p:nvSpPr>
+          <p:cNvPr id="45" name="TextBox 44"/>
           <p:cNvSpPr txBox="1"/>
           <p:nvPr/>
         </p:nvSpPr>
@@ -8557,7 +9615,7 @@
         <p:spPr>
           <a:xfrm>
             <a:off x="457200" y="1234440"/>
-            <a:ext cx="11274552" cy="54864"/>
+            <a:ext cx="11274552" cy="45720"/>
           </a:xfrm>
           <a:prstGeom prst="rect">
             <a:avLst/>
@@ -9163,8 +10221,8 @@
                 </a:solidFill>
                 <a:latin typeface="Calibri"/>
               </a:rPr>
-              <a:t>PR
-Zrecenzowanych/tyg</a:t>
+              <a:t>PR Review
+/ tydzień</a:t>
             </a:r>
           </a:p>
         </p:txBody>
@@ -9290,7 +10348,8 @@
                 </a:solidFill>
                 <a:latin typeface="Calibri"/>
               </a:rPr>
-              <a:t>Poprawa MoM</a:t>
+              <a:t>Poprawa
+MoM</a:t>
             </a:r>
           </a:p>
         </p:txBody>
@@ -9381,7 +10440,7 @@
                 </a:solidFill>
                 <a:latin typeface="Calibri"/>
               </a:rPr>
-              <a:t>CVE wg. Severity (Mock Bar Chart)</a:t>
+              <a:t>CVE wg. Severity</a:t>
             </a:r>
           </a:p>
         </p:txBody>
@@ -9394,7 +10453,7 @@
         </p:nvSpPr>
         <p:spPr>
           <a:xfrm>
-            <a:off x="731520" y="3726180"/>
+            <a:off x="685800" y="3726180"/>
             <a:ext cx="822960" cy="1165860"/>
           </a:xfrm>
           <a:prstGeom prst="rect">
@@ -9437,7 +10496,7 @@
         </p:nvSpPr>
         <p:spPr>
           <a:xfrm>
-            <a:off x="640080" y="4983480"/>
+            <a:off x="594360" y="4983480"/>
             <a:ext cx="1005840" cy="320040"/>
           </a:xfrm>
           <a:prstGeom prst="rect">
@@ -9472,7 +10531,7 @@
         </p:nvSpPr>
         <p:spPr>
           <a:xfrm>
-            <a:off x="731520" y="3451860"/>
+            <a:off x="685800" y="3451860"/>
             <a:ext cx="822960" cy="274320"/>
           </a:xfrm>
           <a:prstGeom prst="rect">
@@ -9507,7 +10566,7 @@
         </p:nvSpPr>
         <p:spPr>
           <a:xfrm>
-            <a:off x="1920240" y="4069080"/>
+            <a:off x="1874520" y="4069080"/>
             <a:ext cx="822960" cy="822960"/>
           </a:xfrm>
           <a:prstGeom prst="rect">
@@ -9550,7 +10609,7 @@
         </p:nvSpPr>
         <p:spPr>
           <a:xfrm>
-            <a:off x="1828800" y="4983480"/>
+            <a:off x="1783080" y="4983480"/>
             <a:ext cx="1005840" cy="320040"/>
           </a:xfrm>
           <a:prstGeom prst="rect">
@@ -9585,7 +10644,7 @@
         </p:nvSpPr>
         <p:spPr>
           <a:xfrm>
-            <a:off x="1920240" y="3794760"/>
+            <a:off x="1874520" y="3794760"/>
             <a:ext cx="822960" cy="274320"/>
           </a:xfrm>
           <a:prstGeom prst="rect">
@@ -9620,7 +10679,7 @@
         </p:nvSpPr>
         <p:spPr>
           <a:xfrm>
-            <a:off x="3108960" y="4343400"/>
+            <a:off x="3063240" y="4343400"/>
             <a:ext cx="822960" cy="548640"/>
           </a:xfrm>
           <a:prstGeom prst="rect">
@@ -9663,7 +10722,7 @@
         </p:nvSpPr>
         <p:spPr>
           <a:xfrm>
-            <a:off x="3017520" y="4983480"/>
+            <a:off x="2971800" y="4983480"/>
             <a:ext cx="1005840" cy="320040"/>
           </a:xfrm>
           <a:prstGeom prst="rect">
@@ -9698,7 +10757,7 @@
         </p:nvSpPr>
         <p:spPr>
           <a:xfrm>
-            <a:off x="3108960" y="4069080"/>
+            <a:off x="3063240" y="4069080"/>
             <a:ext cx="822960" cy="274320"/>
           </a:xfrm>
           <a:prstGeom prst="rect">
@@ -9733,7 +10792,7 @@
         </p:nvSpPr>
         <p:spPr>
           <a:xfrm>
-            <a:off x="4297680" y="4617720"/>
+            <a:off x="4251960" y="4617720"/>
             <a:ext cx="822960" cy="274320"/>
           </a:xfrm>
           <a:prstGeom prst="rect">
@@ -9776,7 +10835,7 @@
         </p:nvSpPr>
         <p:spPr>
           <a:xfrm>
-            <a:off x="4206240" y="4983480"/>
+            <a:off x="4160520" y="4983480"/>
             <a:ext cx="1005840" cy="320040"/>
           </a:xfrm>
           <a:prstGeom prst="rect">
@@ -9811,7 +10870,7 @@
         </p:nvSpPr>
         <p:spPr>
           <a:xfrm>
-            <a:off x="4297680" y="4343400"/>
+            <a:off x="4251960" y="4343400"/>
             <a:ext cx="822960" cy="274320"/>
           </a:xfrm>
           <a:prstGeom prst="rect">
@@ -9924,21 +10983,333 @@
                 </a:solidFill>
                 <a:latin typeface="Calibri"/>
               </a:rPr>
-              <a:t>Status Ticketów (Mock Donut)</a:t>
-            </a:r>
-          </a:p>
-        </p:txBody>
-      </p:sp>
-      <p:sp>
-        <p:nvSpPr>
-          <p:cNvPr id="37" name="Rounded Rectangle 36"/>
+              <a:t>Status Ticketów</a:t>
+            </a:r>
+          </a:p>
+        </p:txBody>
+      </p:sp>
+      <p:sp>
+        <p:nvSpPr>
+          <p:cNvPr id="37" name="Rectangle 36"/>
           <p:cNvSpPr/>
           <p:nvPr/>
         </p:nvSpPr>
         <p:spPr>
           <a:xfrm>
             <a:off x="6126480" y="3520440"/>
-            <a:ext cx="2468880" cy="685800"/>
+            <a:ext cx="2551176" cy="347472"/>
+          </a:xfrm>
+          <a:prstGeom prst="rect">
+            <a:avLst/>
+          </a:prstGeom>
+          <a:solidFill>
+            <a:srgbClr val="00E676"/>
+          </a:solidFill>
+          <a:ln>
+            <a:noFill/>
+          </a:ln>
+        </p:spPr>
+        <p:style>
+          <a:lnRef idx="1">
+            <a:schemeClr val="accent1"/>
+          </a:lnRef>
+          <a:fillRef idx="3">
+            <a:schemeClr val="accent1"/>
+          </a:fillRef>
+          <a:effectRef idx="2">
+            <a:schemeClr val="accent1"/>
+          </a:effectRef>
+          <a:fontRef idx="minor">
+            <a:schemeClr val="lt1"/>
+          </a:fontRef>
+        </p:style>
+        <p:txBody>
+          <a:bodyPr rtlCol="0" anchor="ctr"/>
+          <a:lstStyle/>
+          <a:p>
+            <a:pPr algn="ctr"/>
+          </a:p>
+        </p:txBody>
+      </p:sp>
+      <p:sp>
+        <p:nvSpPr>
+          <p:cNvPr id="38" name="TextBox 37"/>
+          <p:cNvSpPr txBox="1"/>
+          <p:nvPr/>
+        </p:nvSpPr>
+        <p:spPr>
+          <a:xfrm>
+            <a:off x="6126480" y="3520440"/>
+            <a:ext cx="5029200" cy="347472"/>
+          </a:xfrm>
+          <a:prstGeom prst="rect">
+            <a:avLst/>
+          </a:prstGeom>
+          <a:noFill/>
+        </p:spPr>
+        <p:txBody>
+          <a:bodyPr wrap="square">
+            <a:spAutoFit/>
+          </a:bodyPr>
+          <a:lstStyle/>
+          <a:p>
+            <a:pPr algn="l"/>
+            <a:r>
+              <a:rPr sz="1200" b="0" i="0">
+                <a:solidFill>
+                  <a:srgbClr val="FFFFFF"/>
+                </a:solidFill>
+                <a:latin typeface="Calibri"/>
+              </a:rPr>
+              <a:t>✅  Zamknięte  62%</a:t>
+            </a:r>
+          </a:p>
+        </p:txBody>
+      </p:sp>
+      <p:sp>
+        <p:nvSpPr>
+          <p:cNvPr id="39" name="Rectangle 38"/>
+          <p:cNvSpPr/>
+          <p:nvPr/>
+        </p:nvSpPr>
+        <p:spPr>
+          <a:xfrm>
+            <a:off x="6126480" y="4114800"/>
+            <a:ext cx="987552" cy="347472"/>
+          </a:xfrm>
+          <a:prstGeom prst="rect">
+            <a:avLst/>
+          </a:prstGeom>
+          <a:solidFill>
+            <a:srgbClr val="00E5FF"/>
+          </a:solidFill>
+          <a:ln>
+            <a:noFill/>
+          </a:ln>
+        </p:spPr>
+        <p:style>
+          <a:lnRef idx="1">
+            <a:schemeClr val="accent1"/>
+          </a:lnRef>
+          <a:fillRef idx="3">
+            <a:schemeClr val="accent1"/>
+          </a:fillRef>
+          <a:effectRef idx="2">
+            <a:schemeClr val="accent1"/>
+          </a:effectRef>
+          <a:fontRef idx="minor">
+            <a:schemeClr val="lt1"/>
+          </a:fontRef>
+        </p:style>
+        <p:txBody>
+          <a:bodyPr rtlCol="0" anchor="ctr"/>
+          <a:lstStyle/>
+          <a:p>
+            <a:pPr algn="ctr"/>
+          </a:p>
+        </p:txBody>
+      </p:sp>
+      <p:sp>
+        <p:nvSpPr>
+          <p:cNvPr id="40" name="TextBox 39"/>
+          <p:cNvSpPr txBox="1"/>
+          <p:nvPr/>
+        </p:nvSpPr>
+        <p:spPr>
+          <a:xfrm>
+            <a:off x="6126480" y="4114800"/>
+            <a:ext cx="5029200" cy="347472"/>
+          </a:xfrm>
+          <a:prstGeom prst="rect">
+            <a:avLst/>
+          </a:prstGeom>
+          <a:noFill/>
+        </p:spPr>
+        <p:txBody>
+          <a:bodyPr wrap="square">
+            <a:spAutoFit/>
+          </a:bodyPr>
+          <a:lstStyle/>
+          <a:p>
+            <a:pPr algn="l"/>
+            <a:r>
+              <a:rPr sz="1200" b="0" i="0">
+                <a:solidFill>
+                  <a:srgbClr val="FFFFFF"/>
+                </a:solidFill>
+                <a:latin typeface="Calibri"/>
+              </a:rPr>
+              <a:t>🔄  W trakcie  24%</a:t>
+            </a:r>
+          </a:p>
+        </p:txBody>
+      </p:sp>
+      <p:sp>
+        <p:nvSpPr>
+          <p:cNvPr id="41" name="Rectangle 40"/>
+          <p:cNvSpPr/>
+          <p:nvPr/>
+        </p:nvSpPr>
+        <p:spPr>
+          <a:xfrm>
+            <a:off x="6126480" y="4709160"/>
+            <a:ext cx="411480" cy="347472"/>
+          </a:xfrm>
+          <a:prstGeom prst="rect">
+            <a:avLst/>
+          </a:prstGeom>
+          <a:solidFill>
+            <a:srgbClr val="FFBF00"/>
+          </a:solidFill>
+          <a:ln>
+            <a:noFill/>
+          </a:ln>
+        </p:spPr>
+        <p:style>
+          <a:lnRef idx="1">
+            <a:schemeClr val="accent1"/>
+          </a:lnRef>
+          <a:fillRef idx="3">
+            <a:schemeClr val="accent1"/>
+          </a:fillRef>
+          <a:effectRef idx="2">
+            <a:schemeClr val="accent1"/>
+          </a:effectRef>
+          <a:fontRef idx="minor">
+            <a:schemeClr val="lt1"/>
+          </a:fontRef>
+        </p:style>
+        <p:txBody>
+          <a:bodyPr rtlCol="0" anchor="ctr"/>
+          <a:lstStyle/>
+          <a:p>
+            <a:pPr algn="ctr"/>
+          </a:p>
+        </p:txBody>
+      </p:sp>
+      <p:sp>
+        <p:nvSpPr>
+          <p:cNvPr id="42" name="TextBox 41"/>
+          <p:cNvSpPr txBox="1"/>
+          <p:nvPr/>
+        </p:nvSpPr>
+        <p:spPr>
+          <a:xfrm>
+            <a:off x="6126480" y="4709160"/>
+            <a:ext cx="5029200" cy="347472"/>
+          </a:xfrm>
+          <a:prstGeom prst="rect">
+            <a:avLst/>
+          </a:prstGeom>
+          <a:noFill/>
+        </p:spPr>
+        <p:txBody>
+          <a:bodyPr wrap="square">
+            <a:spAutoFit/>
+          </a:bodyPr>
+          <a:lstStyle/>
+          <a:p>
+            <a:pPr algn="l"/>
+            <a:r>
+              <a:rPr sz="1200" b="0" i="0">
+                <a:solidFill>
+                  <a:srgbClr val="FFFFFF"/>
+                </a:solidFill>
+                <a:latin typeface="Calibri"/>
+              </a:rPr>
+              <a:t>⚠️  Zaległe  10%</a:t>
+            </a:r>
+          </a:p>
+        </p:txBody>
+      </p:sp>
+      <p:sp>
+        <p:nvSpPr>
+          <p:cNvPr id="43" name="Rectangle 42"/>
+          <p:cNvSpPr/>
+          <p:nvPr/>
+        </p:nvSpPr>
+        <p:spPr>
+          <a:xfrm>
+            <a:off x="6126480" y="5303520"/>
+            <a:ext cx="164592" cy="347472"/>
+          </a:xfrm>
+          <a:prstGeom prst="rect">
+            <a:avLst/>
+          </a:prstGeom>
+          <a:solidFill>
+            <a:srgbClr val="FF4545"/>
+          </a:solidFill>
+          <a:ln>
+            <a:noFill/>
+          </a:ln>
+        </p:spPr>
+        <p:style>
+          <a:lnRef idx="1">
+            <a:schemeClr val="accent1"/>
+          </a:lnRef>
+          <a:fillRef idx="3">
+            <a:schemeClr val="accent1"/>
+          </a:fillRef>
+          <a:effectRef idx="2">
+            <a:schemeClr val="accent1"/>
+          </a:effectRef>
+          <a:fontRef idx="minor">
+            <a:schemeClr val="lt1"/>
+          </a:fontRef>
+        </p:style>
+        <p:txBody>
+          <a:bodyPr rtlCol="0" anchor="ctr"/>
+          <a:lstStyle/>
+          <a:p>
+            <a:pPr algn="ctr"/>
+          </a:p>
+        </p:txBody>
+      </p:sp>
+      <p:sp>
+        <p:nvSpPr>
+          <p:cNvPr id="44" name="TextBox 43"/>
+          <p:cNvSpPr txBox="1"/>
+          <p:nvPr/>
+        </p:nvSpPr>
+        <p:spPr>
+          <a:xfrm>
+            <a:off x="6126480" y="5303520"/>
+            <a:ext cx="5029200" cy="347472"/>
+          </a:xfrm>
+          <a:prstGeom prst="rect">
+            <a:avLst/>
+          </a:prstGeom>
+          <a:noFill/>
+        </p:spPr>
+        <p:txBody>
+          <a:bodyPr wrap="square">
+            <a:spAutoFit/>
+          </a:bodyPr>
+          <a:lstStyle/>
+          <a:p>
+            <a:pPr algn="l"/>
+            <a:r>
+              <a:rPr sz="1200" b="0" i="0">
+                <a:solidFill>
+                  <a:srgbClr val="FFFFFF"/>
+                </a:solidFill>
+                <a:latin typeface="Calibri"/>
+              </a:rPr>
+              <a:t>🔴  Krytyczne   4%</a:t>
+            </a:r>
+          </a:p>
+        </p:txBody>
+      </p:sp>
+      <p:sp>
+        <p:nvSpPr>
+          <p:cNvPr id="45" name="Rounded Rectangle 44"/>
+          <p:cNvSpPr/>
+          <p:nvPr/>
+        </p:nvSpPr>
+        <p:spPr>
+          <a:xfrm>
+            <a:off x="365760" y="5715000"/>
+            <a:ext cx="11338560" cy="457200"/>
           </a:xfrm>
           <a:prstGeom prst="roundRect">
             <a:avLst>
@@ -9946,119 +11317,7 @@
             </a:avLst>
           </a:prstGeom>
           <a:solidFill>
-            <a:srgbClr val="163860"/>
-          </a:solidFill>
-          <a:ln w="19050">
-            <a:solidFill>
-              <a:srgbClr val="00E676"/>
-            </a:solidFill>
-          </a:ln>
-        </p:spPr>
-        <p:style>
-          <a:lnRef idx="1">
-            <a:schemeClr val="accent1"/>
-          </a:lnRef>
-          <a:fillRef idx="3">
-            <a:schemeClr val="accent1"/>
-          </a:fillRef>
-          <a:effectRef idx="2">
-            <a:schemeClr val="accent1"/>
-          </a:effectRef>
-          <a:fontRef idx="minor">
-            <a:schemeClr val="lt1"/>
-          </a:fontRef>
-        </p:style>
-        <p:txBody>
-          <a:bodyPr rtlCol="0" anchor="ctr" wrap="square"/>
-          <a:lstStyle/>
-          <a:p>
-            <a:pPr algn="ctr"/>
-            <a:r>
-              <a:rPr sz="1200" b="0">
-                <a:solidFill>
-                  <a:srgbClr val="00E676"/>
-                </a:solidFill>
-                <a:latin typeface="Calibri"/>
-              </a:rPr>
-              <a:t>✅ Zamknięte  62%</a:t>
-            </a:r>
-          </a:p>
-        </p:txBody>
-      </p:sp>
-      <p:sp>
-        <p:nvSpPr>
-          <p:cNvPr id="38" name="Rounded Rectangle 37"/>
-          <p:cNvSpPr/>
-          <p:nvPr/>
-        </p:nvSpPr>
-        <p:spPr>
-          <a:xfrm>
-            <a:off x="8869680" y="3520440"/>
-            <a:ext cx="2468880" cy="685800"/>
-          </a:xfrm>
-          <a:prstGeom prst="roundRect">
-            <a:avLst>
-              <a:gd name="adj" fmla="val 5000"/>
-            </a:avLst>
-          </a:prstGeom>
-          <a:solidFill>
-            <a:srgbClr val="163860"/>
-          </a:solidFill>
-          <a:ln w="19050">
-            <a:solidFill>
-              <a:srgbClr val="00E5FF"/>
-            </a:solidFill>
-          </a:ln>
-        </p:spPr>
-        <p:style>
-          <a:lnRef idx="1">
-            <a:schemeClr val="accent1"/>
-          </a:lnRef>
-          <a:fillRef idx="3">
-            <a:schemeClr val="accent1"/>
-          </a:fillRef>
-          <a:effectRef idx="2">
-            <a:schemeClr val="accent1"/>
-          </a:effectRef>
-          <a:fontRef idx="minor">
-            <a:schemeClr val="lt1"/>
-          </a:fontRef>
-        </p:style>
-        <p:txBody>
-          <a:bodyPr rtlCol="0" anchor="ctr" wrap="square"/>
-          <a:lstStyle/>
-          <a:p>
-            <a:pPr algn="ctr"/>
-            <a:r>
-              <a:rPr sz="1200" b="0">
-                <a:solidFill>
-                  <a:srgbClr val="00E5FF"/>
-                </a:solidFill>
-                <a:latin typeface="Calibri"/>
-              </a:rPr>
-              <a:t>🔄 W trakcie  24%</a:t>
-            </a:r>
-          </a:p>
-        </p:txBody>
-      </p:sp>
-      <p:sp>
-        <p:nvSpPr>
-          <p:cNvPr id="39" name="Rounded Rectangle 38"/>
-          <p:cNvSpPr/>
-          <p:nvPr/>
-        </p:nvSpPr>
-        <p:spPr>
-          <a:xfrm>
-            <a:off x="6126480" y="4343400"/>
-            <a:ext cx="2468880" cy="685800"/>
-          </a:xfrm>
-          <a:prstGeom prst="roundRect">
-            <a:avLst>
-              <a:gd name="adj" fmla="val 5000"/>
-            </a:avLst>
-          </a:prstGeom>
-          <a:solidFill>
-            <a:srgbClr val="163860"/>
+            <a:srgbClr val="112D4A"/>
           </a:solidFill>
           <a:ln w="19050">
             <a:solidFill>
@@ -10092,133 +11351,21 @@
                 </a:solidFill>
                 <a:latin typeface="Calibri"/>
               </a:rPr>
-              <a:t>⚠️ Zaległe  10%</a:t>
-            </a:r>
-          </a:p>
-        </p:txBody>
-      </p:sp>
-      <p:sp>
-        <p:nvSpPr>
-          <p:cNvPr id="40" name="Rounded Rectangle 39"/>
-          <p:cNvSpPr/>
-          <p:nvPr/>
-        </p:nvSpPr>
-        <p:spPr>
-          <a:xfrm>
-            <a:off x="8869680" y="4343400"/>
-            <a:ext cx="2468880" cy="685800"/>
-          </a:xfrm>
-          <a:prstGeom prst="roundRect">
-            <a:avLst>
-              <a:gd name="adj" fmla="val 5000"/>
-            </a:avLst>
-          </a:prstGeom>
-          <a:solidFill>
-            <a:srgbClr val="163860"/>
-          </a:solidFill>
-          <a:ln w="19050">
-            <a:solidFill>
-              <a:srgbClr val="FF4545"/>
-            </a:solidFill>
-          </a:ln>
-        </p:spPr>
-        <p:style>
-          <a:lnRef idx="1">
-            <a:schemeClr val="accent1"/>
-          </a:lnRef>
-          <a:fillRef idx="3">
-            <a:schemeClr val="accent1"/>
-          </a:fillRef>
-          <a:effectRef idx="2">
-            <a:schemeClr val="accent1"/>
-          </a:effectRef>
-          <a:fontRef idx="minor">
-            <a:schemeClr val="lt1"/>
-          </a:fontRef>
-        </p:style>
-        <p:txBody>
-          <a:bodyPr rtlCol="0" anchor="ctr" wrap="square"/>
-          <a:lstStyle/>
-          <a:p>
-            <a:pPr algn="ctr"/>
-            <a:r>
-              <a:rPr sz="1200" b="0">
-                <a:solidFill>
-                  <a:srgbClr val="FF4545"/>
-                </a:solidFill>
-                <a:latin typeface="Calibri"/>
-              </a:rPr>
-              <a:t>🔴 Krytyczne  4%</a:t>
-            </a:r>
-          </a:p>
-        </p:txBody>
-      </p:sp>
-      <p:sp>
-        <p:nvSpPr>
-          <p:cNvPr id="41" name="Rounded Rectangle 40"/>
-          <p:cNvSpPr/>
-          <p:nvPr/>
-        </p:nvSpPr>
-        <p:spPr>
-          <a:xfrm>
-            <a:off x="5943600" y="4709160"/>
-            <a:ext cx="5760720" cy="868680"/>
-          </a:xfrm>
-          <a:prstGeom prst="roundRect">
-            <a:avLst>
-              <a:gd name="adj" fmla="val 5000"/>
-            </a:avLst>
-          </a:prstGeom>
-          <a:solidFill>
-            <a:srgbClr val="112D4A"/>
-          </a:solidFill>
-          <a:ln w="19050">
-            <a:solidFill>
-              <a:srgbClr val="FFBF00"/>
-            </a:solidFill>
-          </a:ln>
-        </p:spPr>
-        <p:style>
-          <a:lnRef idx="1">
-            <a:schemeClr val="accent1"/>
-          </a:lnRef>
-          <a:fillRef idx="3">
-            <a:schemeClr val="accent1"/>
-          </a:fillRef>
-          <a:effectRef idx="2">
-            <a:schemeClr val="accent1"/>
-          </a:effectRef>
-          <a:fontRef idx="minor">
-            <a:schemeClr val="lt1"/>
-          </a:fontRef>
-        </p:style>
-        <p:txBody>
-          <a:bodyPr rtlCol="0" anchor="ctr" wrap="square"/>
-          <a:lstStyle/>
-          <a:p>
-            <a:pPr algn="ctr"/>
-            <a:r>
-              <a:rPr sz="1300" b="0">
-                <a:solidFill>
-                  <a:srgbClr val="FFBF00"/>
-                </a:solidFill>
-                <a:latin typeface="Calibri"/>
-              </a:rPr>
-              <a:t>🤖  Jules: 47 komend tygodniowo  |  12 PR review  |  ∅ 8s latency</a:t>
-            </a:r>
-          </a:p>
-        </p:txBody>
-      </p:sp>
-      <p:sp>
-        <p:nvSpPr>
-          <p:cNvPr id="42" name="TextBox 41"/>
+              <a:t>🤖  Jules:  47 komend/tydzień  |  12 PR review  |  ∅ 8s latency  |  uptime 99.8%</a:t>
+            </a:r>
+          </a:p>
+        </p:txBody>
+      </p:sp>
+      <p:sp>
+        <p:nvSpPr>
+          <p:cNvPr id="46" name="TextBox 45"/>
           <p:cNvSpPr txBox="1"/>
           <p:nvPr/>
         </p:nvSpPr>
         <p:spPr>
           <a:xfrm>
-            <a:off x="10789920" y="6309360"/>
-            <a:ext cx="1188720" cy="365760"/>
+            <a:off x="457200" y="6291072"/>
+            <a:ext cx="10058400" cy="365760"/>
           </a:xfrm>
           <a:prstGeom prst="rect">
             <a:avLst/>
@@ -10231,6 +11378,41 @@
           </a:bodyPr>
           <a:lstStyle/>
           <a:p>
+            <a:pPr algn="l"/>
+            <a:r>
+              <a:rPr sz="1000" b="0" i="1">
+                <a:solidFill>
+                  <a:srgbClr val="A0B4C8"/>
+                </a:solidFill>
+                <a:latin typeface="Calibri"/>
+              </a:rPr>
+              <a:t>* Dane poglądowe — docelowo integracja z logami systemd i GitHub API</a:t>
+            </a:r>
+          </a:p>
+        </p:txBody>
+      </p:sp>
+      <p:sp>
+        <p:nvSpPr>
+          <p:cNvPr id="47" name="TextBox 46"/>
+          <p:cNvSpPr txBox="1"/>
+          <p:nvPr/>
+        </p:nvSpPr>
+        <p:spPr>
+          <a:xfrm>
+            <a:off x="10789920" y="6291072"/>
+            <a:ext cx="1188720" cy="365760"/>
+          </a:xfrm>
+          <a:prstGeom prst="rect">
+            <a:avLst/>
+          </a:prstGeom>
+          <a:noFill/>
+        </p:spPr>
+        <p:txBody>
+          <a:bodyPr wrap="square">
+            <a:spAutoFit/>
+          </a:bodyPr>
+          <a:lstStyle/>
+          <a:p>
             <a:pPr algn="r"/>
             <a:r>
               <a:rPr sz="1100" b="0" i="0">
@@ -10240,41 +11422,6 @@
                 <a:latin typeface="Calibri"/>
               </a:rPr>
               <a:t>05 / 05</a:t>
-            </a:r>
-          </a:p>
-        </p:txBody>
-      </p:sp>
-      <p:sp>
-        <p:nvSpPr>
-          <p:cNvPr id="43" name="TextBox 42"/>
-          <p:cNvSpPr txBox="1"/>
-          <p:nvPr/>
-        </p:nvSpPr>
-        <p:spPr>
-          <a:xfrm>
-            <a:off x="457200" y="6309360"/>
-            <a:ext cx="10058400" cy="365760"/>
-          </a:xfrm>
-          <a:prstGeom prst="rect">
-            <a:avLst/>
-          </a:prstGeom>
-          <a:noFill/>
-        </p:spPr>
-        <p:txBody>
-          <a:bodyPr wrap="square">
-            <a:spAutoFit/>
-          </a:bodyPr>
-          <a:lstStyle/>
-          <a:p>
-            <a:pPr algn="l"/>
-            <a:r>
-              <a:rPr sz="1000" b="0" i="1">
-                <a:solidFill>
-                  <a:srgbClr val="A0B4C8"/>
-                </a:solidFill>
-                <a:latin typeface="Calibri"/>
-              </a:rPr>
-              <a:t>* Dane poglądowe — docelowo integracja z logami systemd i GitHub API</a:t>
             </a:r>
           </a:p>
         </p:txBody>
